--- a/09-ai-competencies/inference-model-apis/text-generation-app/docs/architecture.pptx
+++ b/09-ai-competencies/inference-model-apis/text-generation-app/docs/architecture.pptx
@@ -3865,7 +3865,7 @@
                 </a:solidFill>
                 <a:latin typeface="Calibri"/>
               </a:rPr>
-              <a:t>Simple Text Generation App</a:t>
+              <a:t>Text Generation Playground</a:t>
             </a:r>
           </a:p>
         </p:txBody>
@@ -3947,7 +3947,7 @@
                 </a:solidFill>
                 <a:latin typeface="Calibri"/>
               </a:rPr>
-              <a:t>A rebuild of “Building a Simple Text Generation App with Hugging Face Model APIs” (J. Raza, 2025)</a:t>
+              <a:t>Type a prompt, pick a model, get the answer streamed back</a:t>
             </a:r>
           </a:p>
         </p:txBody>
@@ -6001,7 +6001,7 @@
                 </a:solidFill>
                 <a:latin typeface="Calibri"/>
               </a:rPr>
-              <a:t>Simple Text Generation App  ·  09-ai-competencies/inference-model-apis/text-generation-app</a:t>
+              <a:t>Text Generation Playground  ·  09-ai-competencies/inference-model-apis/text-generation-app</a:t>
             </a:r>
           </a:p>
         </p:txBody>
@@ -7398,7 +7398,7 @@
                 </a:solidFill>
                 <a:latin typeface="Calibri"/>
               </a:rPr>
-              <a:t>Simple Text Generation App  ·  09-ai-competencies/inference-model-apis/text-generation-app</a:t>
+              <a:t>Text Generation Playground  ·  09-ai-competencies/inference-model-apis/text-generation-app</a:t>
             </a:r>
           </a:p>
         </p:txBody>
@@ -8229,7 +8229,7 @@
                 </a:solidFill>
                 <a:latin typeface="Calibri"/>
               </a:rPr>
-              <a:t>Simple Text Generation App  ·  09-ai-competencies/inference-model-apis/text-generation-app</a:t>
+              <a:t>Text Generation Playground  ·  09-ai-competencies/inference-model-apis/text-generation-app</a:t>
             </a:r>
           </a:p>
         </p:txBody>
@@ -9634,7 +9634,7 @@
                 </a:solidFill>
                 <a:latin typeface="Calibri"/>
               </a:rPr>
-              <a:t>Simple Text Generation App  ·  09-ai-competencies/inference-model-apis/text-generation-app</a:t>
+              <a:t>Text Generation Playground  ·  09-ai-competencies/inference-model-apis/text-generation-app</a:t>
             </a:r>
           </a:p>
         </p:txBody>

--- a/09-ai-competencies/inference-model-apis/text-generation-app/docs/architecture.pptx
+++ b/09-ai-competencies/inference-model-apis/text-generation-app/docs/architecture.pptx
@@ -10,6 +10,7 @@
     <p:sldId id="258" r:id="rId10"/>
     <p:sldId id="259" r:id="rId11"/>
     <p:sldId id="260" r:id="rId12"/>
+    <p:sldId id="261" r:id="rId13"/>
   </p:sldIdLst>
   <p:sldSz cx="12191695" cy="6858000" type="screen4x3"/>
   <p:notesSz cx="6858000" cy="9144000"/>
@@ -506,7 +507,7 @@
           <a:lstStyle/>
           <a:p>
             <a:r>
-              <a:t>Title slide. The four colours are used consistently on every diagram: blue = user interface, purple = LangChain orchestration, teal = Hugging Face model serving, amber = configuration and secrets.</a:t>
+              <a:t>The app can use two model sources: a model running on this computer through Ollama (the default), or a hosted model on Hugging Face Inference Providers. The colours are used on every slide: blue = user interface, purple = LangChain, green = local model, teal = hosted model, amber = configuration.</a:t>
             </a:r>
           </a:p>
         </p:txBody>
@@ -576,7 +577,7 @@
           <a:lstStyle/>
           <a:p>
             <a:r>
-              <a:t>Everything on the left runs on your Mac: the browser and one Python process (Streamlit + LangChain). Only the model itself runs in the cloud. The router authenticates the token, checks gated-licence approval and billing credits, then forwards the request to an inference provider that serves the model. The answer is streamed back token by token.</a:t>
+              <a:t>Everything inside 'This computer' runs locally: the browser, one Python process (Streamlit + LangChain) and, in local mode, the Ollama server. The sidebar switch decides which model block the chain uses. a) Local mode: ChatOllama talks to Ollama at localhost:11434, so nothing leaves the computer. b) Hosted mode: ChatHuggingFace calls the Hugging Face router, which checks the token, licence and credits and forwards the request to a provider. In both modes the answer is streamed back token by token.</a:t>
             </a:r>
           </a:p>
         </p:txBody>
@@ -646,7 +647,7 @@
           <a:lstStyle/>
           <a:p>
             <a:r>
-              <a:t>Steps 1-4 happen on your Mac. Step 5 is the only network call. Step 6 is where the 401/402/403 errors come from. Steps 8-10 repeat for every chunk, which is why the answer appears gradually.</a:t>
+              <a:t>Steps 1-4 always run on this computer. Then exactly one branch runs, depending on the Model source switch: 5a/6a in local mode (Ollama on localhost, no token, nothing leaves the machine), or 5b/6b in hosted mode, where the Hugging Face router checks the token, licence and credits; this is where 401, 402 and 403 errors come from. Steps 7-8 repeat for every chunk, which is why the answer appears gradually.</a:t>
             </a:r>
           </a:p>
         </p:txBody>
@@ -716,7 +717,7 @@
           <a:lstStyle/>
           <a:p>
             <a:r>
-              <a:t>Because the layers are separate, swapping the model backend (for example to a local Ollama model) only changes the model-integration layer; the UI and the prompt chain stay the same.</a:t>
+              <a:t>Use local mode when cost, privacy or offline use matter and a small model is good enough. Use hosted mode for bigger, better models without local hardware limits. Because both are LangChain chat models, the app switches between them by changing one block of the chain.</a:t>
             </a:r>
           </a:p>
         </p:txBody>
@@ -786,7 +787,77 @@
           <a:lstStyle/>
           <a:p>
             <a:r>
-              <a:t>friendly_error() in app.py maps these HTTP status codes to plain-language advice and appends Hugging Face's own message. check_access.py diagnoses 401/403 problems from the command line.</a:t>
+              <a:t>Adding the local mode only touched the model-integration and serving layers; the UI layout, the prompt template and the output parser are shared by both sources.</a:t>
+            </a:r>
+          </a:p>
+        </p:txBody>
+      </p:sp>
+      <p:sp>
+        <p:nvSpPr>
+          <p:cNvPr id="4" name="Slide Number Placeholder 3"/>
+          <p:cNvSpPr>
+            <a:spLocks noGrp="1"/>
+          </p:cNvSpPr>
+          <p:nvPr>
+            <p:ph type="sldNum" idx="5" sz="quarter"/>
+          </p:nvPr>
+        </p:nvSpPr>
+        <p:spPr/>
+      </p:sp>
+    </p:spTree>
+  </p:cSld>
+  <p:clrMapOvr>
+    <a:masterClrMapping/>
+  </p:clrMapOvr>
+</p:notes>
+</file>
+
+<file path=ppt/notesSlides/notesSlide6.xml><?xml version="1.0" encoding="utf-8"?>
+<p:notes xmlns:a="http://schemas.openxmlformats.org/drawingml/2006/main" xmlns:p="http://schemas.openxmlformats.org/presentationml/2006/main" xmlns:r="http://schemas.openxmlformats.org/officeDocument/2006/relationships">
+  <p:cSld>
+    <p:spTree>
+      <p:nvGrpSpPr>
+        <p:cNvPr id="1" name=""/>
+        <p:cNvGrpSpPr/>
+        <p:nvPr/>
+      </p:nvGrpSpPr>
+      <p:grpSpPr>
+        <a:xfrm>
+          <a:off x="0" y="0"/>
+          <a:ext cx="0" cy="0"/>
+          <a:chOff x="0" y="0"/>
+          <a:chExt cx="0" cy="0"/>
+        </a:xfrm>
+      </p:grpSpPr>
+      <p:sp>
+        <p:nvSpPr>
+          <p:cNvPr id="2" name="Slide Image Placeholder 1"/>
+          <p:cNvSpPr>
+            <a:spLocks noGrp="1"/>
+          </p:cNvSpPr>
+          <p:nvPr>
+            <p:ph type="sldImg" idx="2"/>
+          </p:nvPr>
+        </p:nvSpPr>
+        <p:spPr/>
+      </p:sp>
+      <p:sp>
+        <p:nvSpPr>
+          <p:cNvPr id="3" name="Notes Placeholder 2"/>
+          <p:cNvSpPr>
+            <a:spLocks noGrp="1"/>
+          </p:cNvSpPr>
+          <p:nvPr>
+            <p:ph type="body" idx="3" sz="quarter"/>
+          </p:nvPr>
+        </p:nvSpPr>
+        <p:spPr/>
+        <p:txBody>
+          <a:bodyPr/>
+          <a:lstStyle/>
+          <a:p>
+            <a:r>
+              <a:t>friendly_error() in app.py recognises the local Ollama errors by exception type (connection refused, model not found) and the Hugging Face errors by HTTP status code, and turns each into plain-language advice. check_access.py diagnoses token and access problems for the hosted mode.</a:t>
             </a:r>
           </a:p>
         </p:txBody>
@@ -3843,7 +3914,7 @@
         </p:nvSpPr>
         <p:spPr>
           <a:xfrm>
-            <a:off x="822960" y="2011680"/>
+            <a:off x="822960" y="1828800"/>
             <a:ext cx="10515600" cy="914400"/>
           </a:xfrm>
           <a:prstGeom prst="rect">
@@ -3878,7 +3949,7 @@
         </p:nvSpPr>
         <p:spPr>
           <a:xfrm>
-            <a:off x="822960" y="2926080"/>
+            <a:off x="822960" y="2743200"/>
             <a:ext cx="10515600" cy="548640"/>
           </a:xfrm>
           <a:prstGeom prst="rect">
@@ -3913,7 +3984,7 @@
         </p:nvSpPr>
         <p:spPr>
           <a:xfrm>
-            <a:off x="822960" y="3840480"/>
+            <a:off x="822960" y="3657600"/>
             <a:ext cx="10515600" cy="822960"/>
           </a:xfrm>
           <a:prstGeom prst="rect">
@@ -3935,7 +4006,7 @@
                 </a:solidFill>
                 <a:latin typeface="Calibri"/>
               </a:rPr>
-              <a:t>Streamlit  ·  LangChain  ·  Hugging Face Inference Providers</a:t>
+              <a:t>Streamlit  ·  LangChain  ·  a local model (Ollama) or a hosted model (Hugging Face)</a:t>
             </a:r>
           </a:p>
           <a:p>
@@ -3960,8 +4031,8 @@
         </p:nvSpPr>
         <p:spPr>
           <a:xfrm>
-            <a:off x="822960" y="5120640"/>
-            <a:ext cx="1965960" cy="457200"/>
+            <a:off x="822960" y="5029200"/>
+            <a:ext cx="1874519" cy="457200"/>
           </a:xfrm>
           <a:prstGeom prst="roundRect">
             <a:avLst/>
@@ -4012,8 +4083,8 @@
         </p:nvSpPr>
         <p:spPr>
           <a:xfrm>
-            <a:off x="2971800" y="5120640"/>
-            <a:ext cx="1965960" cy="457200"/>
+            <a:off x="2880360" y="5029200"/>
+            <a:ext cx="1874519" cy="457200"/>
           </a:xfrm>
           <a:prstGeom prst="roundRect">
             <a:avLst/>
@@ -4064,8 +4135,60 @@
         </p:nvSpPr>
         <p:spPr>
           <a:xfrm>
-            <a:off x="5120640" y="5120640"/>
-            <a:ext cx="1965960" cy="457200"/>
+            <a:off x="4937760" y="5029200"/>
+            <a:ext cx="1874519" cy="457200"/>
+          </a:xfrm>
+          <a:prstGeom prst="roundRect">
+            <a:avLst/>
+          </a:prstGeom>
+          <a:solidFill>
+            <a:srgbClr val="15803D"/>
+          </a:solidFill>
+          <a:ln>
+            <a:noFill/>
+          </a:ln>
+        </p:spPr>
+        <p:style>
+          <a:lnRef idx="1">
+            <a:schemeClr val="accent1"/>
+          </a:lnRef>
+          <a:fillRef idx="3">
+            <a:schemeClr val="accent1"/>
+          </a:fillRef>
+          <a:effectRef idx="2">
+            <a:schemeClr val="accent1"/>
+          </a:effectRef>
+          <a:fontRef idx="minor">
+            <a:schemeClr val="lt1"/>
+          </a:fontRef>
+        </p:style>
+        <p:txBody>
+          <a:bodyPr rtlCol="0" anchor="ctr"/>
+          <a:lstStyle/>
+          <a:p>
+            <a:pPr algn="ctr"/>
+            <a:r>
+              <a:rPr sz="1300" b="1">
+                <a:solidFill>
+                  <a:srgbClr val="FFFFFF"/>
+                </a:solidFill>
+                <a:latin typeface="Calibri"/>
+              </a:rPr>
+              <a:t>Local model</a:t>
+            </a:r>
+          </a:p>
+        </p:txBody>
+      </p:sp>
+      <p:sp>
+        <p:nvSpPr>
+          <p:cNvPr id="9" name="Rounded Rectangle 8"/>
+          <p:cNvSpPr/>
+          <p:nvPr/>
+        </p:nvSpPr>
+        <p:spPr>
+          <a:xfrm>
+            <a:off x="6995160" y="5029200"/>
+            <a:ext cx="1874519" cy="457200"/>
           </a:xfrm>
           <a:prstGeom prst="roundRect">
             <a:avLst/>
@@ -4103,21 +4226,21 @@
                 </a:solidFill>
                 <a:latin typeface="Calibri"/>
               </a:rPr>
-              <a:t>Model serving</a:t>
-            </a:r>
-          </a:p>
-        </p:txBody>
-      </p:sp>
-      <p:sp>
-        <p:nvSpPr>
-          <p:cNvPr id="9" name="Rounded Rectangle 8"/>
+              <a:t>Hosted model</a:t>
+            </a:r>
+          </a:p>
+        </p:txBody>
+      </p:sp>
+      <p:sp>
+        <p:nvSpPr>
+          <p:cNvPr id="10" name="Rounded Rectangle 9"/>
           <p:cNvSpPr/>
           <p:nvPr/>
         </p:nvSpPr>
         <p:spPr>
           <a:xfrm>
-            <a:off x="7269480" y="5120640"/>
-            <a:ext cx="1965960" cy="457200"/>
+            <a:off x="9052560" y="5029200"/>
+            <a:ext cx="1874519" cy="457200"/>
           </a:xfrm>
           <a:prstGeom prst="roundRect">
             <a:avLst/>
@@ -4243,7 +4366,7 @@
                 </a:solidFill>
                 <a:latin typeface="Calibri"/>
               </a:rPr>
-              <a:t>What runs where, and how a prompt becomes generated text</a:t>
+              <a:t>One app, two places the model can run: on this computer, or in the cloud</a:t>
             </a:r>
           </a:p>
         </p:txBody>
@@ -4299,8 +4422,8 @@
         </p:nvSpPr>
         <p:spPr>
           <a:xfrm>
-            <a:off x="411480" y="1645920"/>
-            <a:ext cx="6903720" cy="4526280"/>
+            <a:off x="365760" y="1645920"/>
+            <a:ext cx="7452360" cy="4572000"/>
           </a:xfrm>
           <a:prstGeom prst="roundRect">
             <a:avLst>
@@ -4348,8 +4471,8 @@
         </p:nvSpPr>
         <p:spPr>
           <a:xfrm>
-            <a:off x="548640" y="1700784"/>
-            <a:ext cx="6629400" cy="320040"/>
+            <a:off x="502920" y="1700784"/>
+            <a:ext cx="7178040" cy="320040"/>
           </a:xfrm>
           <a:prstGeom prst="rect">
             <a:avLst/>
@@ -4370,7 +4493,7 @@
                 </a:solidFill>
                 <a:latin typeface="Calibri"/>
               </a:rPr>
-              <a:t>YOUR MAC  (localhost)</a:t>
+              <a:t>THIS COMPUTER</a:t>
             </a:r>
           </a:p>
         </p:txBody>
@@ -4383,8 +4506,8 @@
         </p:nvSpPr>
         <p:spPr>
           <a:xfrm>
-            <a:off x="685800" y="2148840"/>
-            <a:ext cx="2011680" cy="2103120"/>
+            <a:off x="594360" y="2103120"/>
+            <a:ext cx="1691640" cy="2240280"/>
           </a:xfrm>
           <a:prstGeom prst="roundRect">
             <a:avLst>
@@ -4421,7 +4544,7 @@
           <a:p>
             <a:pPr algn="ctr"/>
             <a:r>
-              <a:rPr sz="1500" b="1">
+              <a:rPr sz="1400" b="1">
                 <a:solidFill>
                   <a:srgbClr val="2563EB"/>
                 </a:solidFill>
@@ -4433,7 +4556,7 @@
           <a:p>
             <a:pPr algn="ctr"/>
             <a:r>
-              <a:rPr sz="1200" b="0">
+              <a:rPr sz="1100" b="0">
                 <a:solidFill>
                   <a:srgbClr val="1F2937"/>
                 </a:solidFill>
@@ -4445,7 +4568,7 @@
           <a:p>
             <a:pPr algn="ctr"/>
             <a:r>
-              <a:rPr sz="1200" b="0">
+              <a:rPr sz="1100" b="0">
                 <a:solidFill>
                   <a:srgbClr val="1F2937"/>
                 </a:solidFill>
@@ -4457,31 +4580,43 @@
           <a:p>
             <a:pPr algn="ctr"/>
             <a:r>
-              <a:rPr sz="1200" b="0">
+              <a:rPr sz="1100" b="0">
                 <a:solidFill>
                   <a:srgbClr val="1F2937"/>
                 </a:solidFill>
                 <a:latin typeface="Calibri"/>
               </a:rPr>
-              <a:t>token · model</a:t>
+              <a:t>source switch</a:t>
             </a:r>
           </a:p>
           <a:p>
             <a:pPr algn="ctr"/>
             <a:r>
-              <a:rPr sz="1200" b="0">
+              <a:rPr sz="1100" b="0">
                 <a:solidFill>
                   <a:srgbClr val="1F2937"/>
                 </a:solidFill>
                 <a:latin typeface="Calibri"/>
               </a:rPr>
-              <a:t>prompt · sliders</a:t>
+              <a:t>model · prompt</a:t>
             </a:r>
           </a:p>
           <a:p>
             <a:pPr algn="ctr"/>
             <a:r>
-              <a:rPr sz="1200" b="0">
+              <a:rPr sz="1100" b="0">
+                <a:solidFill>
+                  <a:srgbClr val="1F2937"/>
+                </a:solidFill>
+                <a:latin typeface="Calibri"/>
+              </a:rPr>
+              <a:t>sliders</a:t>
+            </a:r>
+          </a:p>
+          <a:p>
+            <a:pPr algn="ctr"/>
+            <a:r>
+              <a:rPr sz="1100" b="0">
                 <a:solidFill>
                   <a:srgbClr val="1F2937"/>
                 </a:solidFill>
@@ -4500,8 +4635,8 @@
         </p:nvSpPr>
         <p:spPr>
           <a:xfrm>
-            <a:off x="3063240" y="2057400"/>
-            <a:ext cx="4069080" cy="2880360"/>
+            <a:off x="2606040" y="2011680"/>
+            <a:ext cx="4983480" cy="2514600"/>
           </a:xfrm>
           <a:prstGeom prst="roundRect">
             <a:avLst>
@@ -4549,8 +4684,8 @@
         </p:nvSpPr>
         <p:spPr>
           <a:xfrm>
-            <a:off x="3200400" y="2112264"/>
-            <a:ext cx="3794760" cy="320040"/>
+            <a:off x="2743200" y="2066544"/>
+            <a:ext cx="4709160" cy="320040"/>
           </a:xfrm>
           <a:prstGeom prst="rect">
             <a:avLst/>
@@ -4584,8 +4719,8 @@
         </p:nvSpPr>
         <p:spPr>
           <a:xfrm>
-            <a:off x="3291840" y="2468880"/>
-            <a:ext cx="3611880" cy="640080"/>
+            <a:off x="2788920" y="2395728"/>
+            <a:ext cx="4617720" cy="566928"/>
           </a:xfrm>
           <a:prstGeom prst="roundRect">
             <a:avLst>
@@ -4622,7 +4757,7 @@
           <a:p>
             <a:pPr algn="ctr"/>
             <a:r>
-              <a:rPr sz="1300" b="1">
+              <a:rPr sz="1200" b="1">
                 <a:solidFill>
                   <a:srgbClr val="2563EB"/>
                 </a:solidFill>
@@ -4634,13 +4769,13 @@
           <a:p>
             <a:pPr algn="ctr"/>
             <a:r>
-              <a:rPr sz="1100" b="0">
+              <a:rPr sz="1000" b="0">
                 <a:solidFill>
                   <a:srgbClr val="1F2937"/>
                 </a:solidFill>
                 <a:latin typeface="Calibri"/>
               </a:rPr>
-              <a:t>sidebar · selectbox · text_area · button</a:t>
+              <a:t>Model source: Local (Ollama) | Hugging Face (hosted)</a:t>
             </a:r>
           </a:p>
         </p:txBody>
@@ -4653,8 +4788,8 @@
         </p:nvSpPr>
         <p:spPr>
           <a:xfrm>
-            <a:off x="3291840" y="3246120"/>
-            <a:ext cx="3611880" cy="1554480"/>
+            <a:off x="2788920" y="3063240"/>
+            <a:ext cx="4617720" cy="1325880"/>
           </a:xfrm>
           <a:prstGeom prst="roundRect">
             <a:avLst>
@@ -4702,8 +4837,8 @@
         </p:nvSpPr>
         <p:spPr>
           <a:xfrm>
-            <a:off x="3429000" y="3300984"/>
-            <a:ext cx="3337560" cy="320040"/>
+            <a:off x="2926079" y="3118104"/>
+            <a:ext cx="4343400" cy="320040"/>
           </a:xfrm>
           <a:prstGeom prst="rect">
             <a:avLst/>
@@ -4737,8 +4872,8 @@
         </p:nvSpPr>
         <p:spPr>
           <a:xfrm>
-            <a:off x="3429000" y="3611880"/>
-            <a:ext cx="1024128" cy="1024128"/>
+            <a:off x="2926080" y="3429000"/>
+            <a:ext cx="1234440" cy="822960"/>
           </a:xfrm>
           <a:prstGeom prst="roundRect">
             <a:avLst>
@@ -4807,8 +4942,122 @@
         </p:nvSpPr>
         <p:spPr>
           <a:xfrm>
-            <a:off x="4599432" y="3611880"/>
-            <a:ext cx="1024128" cy="1024128"/>
+            <a:off x="4434840" y="3401568"/>
+            <a:ext cx="1463040" cy="420624"/>
+          </a:xfrm>
+          <a:prstGeom prst="roundRect">
+            <a:avLst>
+              <a:gd name="adj" fmla="val 12000"/>
+            </a:avLst>
+          </a:prstGeom>
+          <a:solidFill>
+            <a:srgbClr val="E8F7EE"/>
+          </a:solidFill>
+          <a:ln w="19050">
+            <a:solidFill>
+              <a:srgbClr val="15803D"/>
+            </a:solidFill>
+          </a:ln>
+          <a:effectLst/>
+        </p:spPr>
+        <p:style>
+          <a:lnRef idx="1">
+            <a:schemeClr val="accent1"/>
+          </a:lnRef>
+          <a:fillRef idx="3">
+            <a:schemeClr val="accent1"/>
+          </a:fillRef>
+          <a:effectRef idx="2">
+            <a:schemeClr val="accent1"/>
+          </a:effectRef>
+          <a:fontRef idx="minor">
+            <a:schemeClr val="lt1"/>
+          </a:fontRef>
+        </p:style>
+        <p:txBody>
+          <a:bodyPr rtlCol="0" anchor="ctr" wrap="square"/>
+          <a:lstStyle/>
+          <a:p>
+            <a:pPr algn="ctr"/>
+            <a:r>
+              <a:rPr sz="1000" b="1">
+                <a:solidFill>
+                  <a:srgbClr val="15803D"/>
+                </a:solidFill>
+                <a:latin typeface="Calibri"/>
+              </a:rPr>
+              <a:t>ChatOllama</a:t>
+            </a:r>
+          </a:p>
+        </p:txBody>
+      </p:sp>
+      <p:sp>
+        <p:nvSpPr>
+          <p:cNvPr id="15" name="Rounded Rectangle 14"/>
+          <p:cNvSpPr/>
+          <p:nvPr/>
+        </p:nvSpPr>
+        <p:spPr>
+          <a:xfrm>
+            <a:off x="4434840" y="3877056"/>
+            <a:ext cx="1463040" cy="420624"/>
+          </a:xfrm>
+          <a:prstGeom prst="roundRect">
+            <a:avLst>
+              <a:gd name="adj" fmla="val 12000"/>
+            </a:avLst>
+          </a:prstGeom>
+          <a:solidFill>
+            <a:srgbClr val="E6F6F4"/>
+          </a:solidFill>
+          <a:ln w="19050">
+            <a:solidFill>
+              <a:srgbClr val="0F766E"/>
+            </a:solidFill>
+          </a:ln>
+          <a:effectLst/>
+        </p:spPr>
+        <p:style>
+          <a:lnRef idx="1">
+            <a:schemeClr val="accent1"/>
+          </a:lnRef>
+          <a:fillRef idx="3">
+            <a:schemeClr val="accent1"/>
+          </a:fillRef>
+          <a:effectRef idx="2">
+            <a:schemeClr val="accent1"/>
+          </a:effectRef>
+          <a:fontRef idx="minor">
+            <a:schemeClr val="lt1"/>
+          </a:fontRef>
+        </p:style>
+        <p:txBody>
+          <a:bodyPr rtlCol="0" anchor="ctr" wrap="square"/>
+          <a:lstStyle/>
+          <a:p>
+            <a:pPr algn="ctr"/>
+            <a:r>
+              <a:rPr sz="1000" b="1">
+                <a:solidFill>
+                  <a:srgbClr val="0F766E"/>
+                </a:solidFill>
+                <a:latin typeface="Calibri"/>
+              </a:rPr>
+              <a:t>ChatHuggingFace</a:t>
+            </a:r>
+          </a:p>
+        </p:txBody>
+      </p:sp>
+      <p:sp>
+        <p:nvSpPr>
+          <p:cNvPr id="16" name="Rounded Rectangle 15"/>
+          <p:cNvSpPr/>
+          <p:nvPr/>
+        </p:nvSpPr>
+        <p:spPr>
+          <a:xfrm>
+            <a:off x="6172200" y="3429000"/>
+            <a:ext cx="1097280" cy="822960"/>
           </a:xfrm>
           <a:prstGeom prst="roundRect">
             <a:avLst>
@@ -4851,76 +5100,6 @@
                 </a:solidFill>
                 <a:latin typeface="Calibri"/>
               </a:rPr>
-              <a:t>ChatHugging
-Face</a:t>
-            </a:r>
-          </a:p>
-          <a:p>
-            <a:pPr algn="ctr"/>
-            <a:r>
-              <a:rPr sz="900" b="0">
-                <a:solidFill>
-                  <a:srgbClr val="1F2937"/>
-                </a:solidFill>
-                <a:latin typeface="Calibri"/>
-              </a:rPr>
-              <a:t>the model</a:t>
-            </a:r>
-          </a:p>
-        </p:txBody>
-      </p:sp>
-      <p:sp>
-        <p:nvSpPr>
-          <p:cNvPr id="15" name="Rounded Rectangle 14"/>
-          <p:cNvSpPr/>
-          <p:nvPr/>
-        </p:nvSpPr>
-        <p:spPr>
-          <a:xfrm>
-            <a:off x="5769864" y="3611880"/>
-            <a:ext cx="1024128" cy="1024128"/>
-          </a:xfrm>
-          <a:prstGeom prst="roundRect">
-            <a:avLst>
-              <a:gd name="adj" fmla="val 12000"/>
-            </a:avLst>
-          </a:prstGeom>
-          <a:solidFill>
-            <a:srgbClr val="FFFFFF"/>
-          </a:solidFill>
-          <a:ln w="19050">
-            <a:solidFill>
-              <a:srgbClr val="7C3AED"/>
-            </a:solidFill>
-          </a:ln>
-          <a:effectLst/>
-        </p:spPr>
-        <p:style>
-          <a:lnRef idx="1">
-            <a:schemeClr val="accent1"/>
-          </a:lnRef>
-          <a:fillRef idx="3">
-            <a:schemeClr val="accent1"/>
-          </a:fillRef>
-          <a:effectRef idx="2">
-            <a:schemeClr val="accent1"/>
-          </a:effectRef>
-          <a:fontRef idx="minor">
-            <a:schemeClr val="lt1"/>
-          </a:fontRef>
-        </p:style>
-        <p:txBody>
-          <a:bodyPr rtlCol="0" anchor="ctr" wrap="square"/>
-          <a:lstStyle/>
-          <a:p>
-            <a:pPr algn="ctr"/>
-            <a:r>
-              <a:rPr sz="1000" b="1">
-                <a:solidFill>
-                  <a:srgbClr val="7C3AED"/>
-                </a:solidFill>
-                <a:latin typeface="Calibri"/>
-              </a:rPr>
               <a:t>StrOutput
 Parser</a:t>
             </a:r>
@@ -4941,19 +5120,19 @@
       </p:sp>
       <p:cxnSp>
         <p:nvCxnSpPr>
-          <p:cNvPr id="16" name="Connector 15"/>
+          <p:cNvPr id="17" name="Connector 16"/>
           <p:cNvCxnSpPr/>
           <p:nvPr/>
         </p:nvCxnSpPr>
         <p:spPr>
-          <a:xfrm>
-            <a:off x="4453128" y="4123944"/>
-            <a:ext cx="146304" cy="0"/>
+          <a:xfrm flipV="1">
+            <a:off x="4160520" y="3611880"/>
+            <a:ext cx="274320" cy="228600"/>
           </a:xfrm>
           <a:prstGeom prst="line">
             <a:avLst/>
           </a:prstGeom>
-          <a:ln w="19050">
+          <a:ln w="15875">
             <a:solidFill>
               <a:srgbClr val="7C3AED"/>
             </a:solidFill>
@@ -4977,19 +5156,19 @@
       </p:cxnSp>
       <p:cxnSp>
         <p:nvCxnSpPr>
-          <p:cNvPr id="17" name="Connector 16"/>
+          <p:cNvPr id="18" name="Connector 17"/>
           <p:cNvCxnSpPr/>
           <p:nvPr/>
         </p:nvCxnSpPr>
         <p:spPr>
           <a:xfrm>
-            <a:off x="5623560" y="4123944"/>
-            <a:ext cx="146304" cy="0"/>
+            <a:off x="4160520" y="3840480"/>
+            <a:ext cx="274320" cy="246888"/>
           </a:xfrm>
           <a:prstGeom prst="line">
             <a:avLst/>
           </a:prstGeom>
-          <a:ln w="19050">
+          <a:ln w="15875">
             <a:solidFill>
               <a:srgbClr val="7C3AED"/>
             </a:solidFill>
@@ -5011,16 +5190,216 @@
           </a:fontRef>
         </p:style>
       </p:cxnSp>
-      <p:sp>
-        <p:nvSpPr>
-          <p:cNvPr id="18" name="Rounded Rectangle 17"/>
+      <p:cxnSp>
+        <p:nvCxnSpPr>
+          <p:cNvPr id="19" name="Connector 18"/>
+          <p:cNvCxnSpPr/>
+          <p:nvPr/>
+        </p:nvCxnSpPr>
+        <p:spPr>
+          <a:xfrm>
+            <a:off x="5897880" y="3611880"/>
+            <a:ext cx="274320" cy="228600"/>
+          </a:xfrm>
+          <a:prstGeom prst="line">
+            <a:avLst/>
+          </a:prstGeom>
+          <a:ln w="15875">
+            <a:solidFill>
+              <a:srgbClr val="7C3AED"/>
+            </a:solidFill>
+            <a:tailEnd type="triangle" w="med" len="med"/>
+          </a:ln>
+        </p:spPr>
+        <p:style>
+          <a:lnRef idx="2">
+            <a:schemeClr val="accent1"/>
+          </a:lnRef>
+          <a:fillRef idx="0">
+            <a:schemeClr val="accent1"/>
+          </a:fillRef>
+          <a:effectRef idx="1">
+            <a:schemeClr val="accent1"/>
+          </a:effectRef>
+          <a:fontRef idx="minor">
+            <a:schemeClr val="tx1"/>
+          </a:fontRef>
+        </p:style>
+      </p:cxnSp>
+      <p:cxnSp>
+        <p:nvCxnSpPr>
+          <p:cNvPr id="20" name="Connector 19"/>
+          <p:cNvCxnSpPr/>
+          <p:nvPr/>
+        </p:nvCxnSpPr>
+        <p:spPr>
+          <a:xfrm flipV="1">
+            <a:off x="5897880" y="3840480"/>
+            <a:ext cx="274320" cy="246888"/>
+          </a:xfrm>
+          <a:prstGeom prst="line">
+            <a:avLst/>
+          </a:prstGeom>
+          <a:ln w="15875">
+            <a:solidFill>
+              <a:srgbClr val="7C3AED"/>
+            </a:solidFill>
+            <a:tailEnd type="triangle" w="med" len="med"/>
+          </a:ln>
+        </p:spPr>
+        <p:style>
+          <a:lnRef idx="2">
+            <a:schemeClr val="accent1"/>
+          </a:lnRef>
+          <a:fillRef idx="0">
+            <a:schemeClr val="accent1"/>
+          </a:fillRef>
+          <a:effectRef idx="1">
+            <a:schemeClr val="accent1"/>
+          </a:effectRef>
+          <a:fontRef idx="minor">
+            <a:schemeClr val="tx1"/>
+          </a:fontRef>
+        </p:style>
+      </p:cxnSp>
+      <p:sp>
+        <p:nvSpPr>
+          <p:cNvPr id="21" name="TextBox 20"/>
+          <p:cNvSpPr txBox="1"/>
+          <p:nvPr/>
+        </p:nvSpPr>
+        <p:spPr>
+          <a:xfrm>
+            <a:off x="5120640" y="3090672"/>
+            <a:ext cx="2240280" cy="274320"/>
+          </a:xfrm>
+          <a:prstGeom prst="rect">
+            <a:avLst/>
+          </a:prstGeom>
+          <a:noFill/>
+        </p:spPr>
+        <p:txBody>
+          <a:bodyPr wrap="square" lIns="36576" rIns="36576" anchor="t">
+            <a:spAutoFit/>
+          </a:bodyPr>
+          <a:lstStyle/>
+          <a:p>
+            <a:pPr algn="r"/>
+            <a:r>
+              <a:rPr sz="900" b="0">
+                <a:solidFill>
+                  <a:srgbClr val="5B6778"/>
+                </a:solidFill>
+                <a:latin typeface="Calibri"/>
+              </a:rPr>
+              <a:t>one of the two, per the switch</a:t>
+            </a:r>
+          </a:p>
+        </p:txBody>
+      </p:sp>
+      <p:sp>
+        <p:nvSpPr>
+          <p:cNvPr id="22" name="Rounded Rectangle 21"/>
           <p:cNvSpPr/>
           <p:nvPr/>
         </p:nvSpPr>
         <p:spPr>
           <a:xfrm>
-            <a:off x="685800" y="5120640"/>
-            <a:ext cx="3017520" cy="868680"/>
+            <a:off x="594360" y="4709160"/>
+            <a:ext cx="3108960" cy="1325880"/>
+          </a:xfrm>
+          <a:prstGeom prst="roundRect">
+            <a:avLst>
+              <a:gd name="adj" fmla="val 12000"/>
+            </a:avLst>
+          </a:prstGeom>
+          <a:solidFill>
+            <a:srgbClr val="E8F7EE"/>
+          </a:solidFill>
+          <a:ln w="19050">
+            <a:solidFill>
+              <a:srgbClr val="15803D"/>
+            </a:solidFill>
+          </a:ln>
+          <a:effectLst/>
+        </p:spPr>
+        <p:style>
+          <a:lnRef idx="1">
+            <a:schemeClr val="accent1"/>
+          </a:lnRef>
+          <a:fillRef idx="3">
+            <a:schemeClr val="accent1"/>
+          </a:fillRef>
+          <a:effectRef idx="2">
+            <a:schemeClr val="accent1"/>
+          </a:effectRef>
+          <a:fontRef idx="minor">
+            <a:schemeClr val="lt1"/>
+          </a:fontRef>
+        </p:style>
+        <p:txBody>
+          <a:bodyPr rtlCol="0" anchor="ctr" wrap="square"/>
+          <a:lstStyle/>
+          <a:p>
+            <a:pPr algn="ctr"/>
+            <a:r>
+              <a:rPr sz="1200" b="1">
+                <a:solidFill>
+                  <a:srgbClr val="15803D"/>
+                </a:solidFill>
+                <a:latin typeface="Calibri"/>
+              </a:rPr>
+              <a:t>Ollama  ·  localhost:11434</a:t>
+            </a:r>
+          </a:p>
+          <a:p>
+            <a:pPr algn="ctr"/>
+            <a:r>
+              <a:rPr sz="1000" b="0">
+                <a:solidFill>
+                  <a:srgbClr val="1F2937"/>
+                </a:solidFill>
+                <a:latin typeface="Calibri"/>
+              </a:rPr>
+              <a:t>runs a downloaded model</a:t>
+            </a:r>
+          </a:p>
+          <a:p>
+            <a:pPr algn="ctr"/>
+            <a:r>
+              <a:rPr sz="1000" b="0">
+                <a:solidFill>
+                  <a:srgbClr val="1F2937"/>
+                </a:solidFill>
+                <a:latin typeface="Calibri"/>
+              </a:rPr>
+              <a:t>(e.g. llama3.2) on this computer</a:t>
+            </a:r>
+          </a:p>
+          <a:p>
+            <a:pPr algn="ctr"/>
+            <a:r>
+              <a:rPr sz="1000" b="0">
+                <a:solidFill>
+                  <a:srgbClr val="1F2937"/>
+                </a:solidFill>
+                <a:latin typeface="Calibri"/>
+              </a:rPr>
+              <a:t>free · private · no token · offline</a:t>
+            </a:r>
+          </a:p>
+        </p:txBody>
+      </p:sp>
+      <p:sp>
+        <p:nvSpPr>
+          <p:cNvPr id="23" name="Rounded Rectangle 22"/>
+          <p:cNvSpPr/>
+          <p:nvPr/>
+        </p:nvSpPr>
+        <p:spPr>
+          <a:xfrm>
+            <a:off x="3977639" y="4709160"/>
+            <a:ext cx="3611880" cy="621792"/>
           </a:xfrm>
           <a:prstGeom prst="roundRect">
             <a:avLst>
@@ -5057,39 +5436,39 @@
           <a:p>
             <a:pPr algn="ctr"/>
             <a:r>
-              <a:rPr sz="1200" b="1">
+              <a:rPr sz="1100" b="1">
                 <a:solidFill>
                   <a:srgbClr val="B45309"/>
                 </a:solidFill>
                 <a:latin typeface="Calibri"/>
               </a:rPr>
-              <a:t>Token sources (first found wins)</a:t>
+              <a:t>Token sources (Hugging Face mode only)</a:t>
             </a:r>
           </a:p>
           <a:p>
             <a:pPr algn="ctr"/>
             <a:r>
-              <a:rPr sz="1100" b="0">
+              <a:rPr sz="1000" b="0">
                 <a:solidFill>
                   <a:srgbClr val="1F2937"/>
                 </a:solidFill>
                 <a:latin typeface="Calibri"/>
               </a:rPr>
-              <a:t>1 sidebar  ·  2 secrets.toml  ·  3 HF_TOKEN env</a:t>
-            </a:r>
-          </a:p>
-        </p:txBody>
-      </p:sp>
-      <p:sp>
-        <p:nvSpPr>
-          <p:cNvPr id="19" name="Rounded Rectangle 18"/>
+              <a:t>1 sidebar · 2 secrets.toml · 3 HF_TOKEN env</a:t>
+            </a:r>
+          </a:p>
+        </p:txBody>
+      </p:sp>
+      <p:sp>
+        <p:nvSpPr>
+          <p:cNvPr id="24" name="Rounded Rectangle 23"/>
           <p:cNvSpPr/>
           <p:nvPr/>
         </p:nvSpPr>
         <p:spPr>
           <a:xfrm>
-            <a:off x="3931920" y="5120640"/>
-            <a:ext cx="3200400" cy="868680"/>
+            <a:off x="3977639" y="5413248"/>
+            <a:ext cx="3611880" cy="621792"/>
           </a:xfrm>
           <a:prstGeom prst="roundRect">
             <a:avLst>
@@ -5126,7 +5505,7 @@
           <a:p>
             <a:pPr algn="ctr"/>
             <a:r>
-              <a:rPr sz="1200" b="1">
+              <a:rPr sz="1100" b="1">
                 <a:solidFill>
                   <a:srgbClr val="0F766E"/>
                 </a:solidFill>
@@ -5138,7 +5517,7 @@
           <a:p>
             <a:pPr algn="ctr"/>
             <a:r>
-              <a:rPr sz="1100" b="0">
+              <a:rPr sz="1000" b="0">
                 <a:solidFill>
                   <a:srgbClr val="1F2937"/>
                 </a:solidFill>
@@ -5151,14 +5530,14 @@
       </p:sp>
       <p:sp>
         <p:nvSpPr>
-          <p:cNvPr id="20" name="Rounded Rectangle 19"/>
+          <p:cNvPr id="25" name="Rounded Rectangle 24"/>
           <p:cNvSpPr/>
           <p:nvPr/>
         </p:nvSpPr>
         <p:spPr>
           <a:xfrm>
-            <a:off x="7680960" y="1645920"/>
-            <a:ext cx="4114800" cy="4526280"/>
+            <a:off x="8138160" y="1645920"/>
+            <a:ext cx="3703320" cy="4572000"/>
           </a:xfrm>
           <a:prstGeom prst="roundRect">
             <a:avLst>
@@ -5200,14 +5579,14 @@
       </p:sp>
       <p:sp>
         <p:nvSpPr>
-          <p:cNvPr id="21" name="TextBox 20"/>
+          <p:cNvPr id="26" name="TextBox 25"/>
           <p:cNvSpPr txBox="1"/>
           <p:nvPr/>
         </p:nvSpPr>
         <p:spPr>
           <a:xfrm>
-            <a:off x="7818120" y="1700784"/>
-            <a:ext cx="3840480" cy="320040"/>
+            <a:off x="8275320" y="1700784"/>
+            <a:ext cx="3429000" cy="320040"/>
           </a:xfrm>
           <a:prstGeom prst="rect">
             <a:avLst/>
@@ -5235,14 +5614,14 @@
       </p:sp>
       <p:sp>
         <p:nvSpPr>
-          <p:cNvPr id="22" name="Rounded Rectangle 21"/>
+          <p:cNvPr id="27" name="Rounded Rectangle 26"/>
           <p:cNvSpPr/>
           <p:nvPr/>
         </p:nvSpPr>
         <p:spPr>
           <a:xfrm>
-            <a:off x="7955279" y="2148840"/>
-            <a:ext cx="3566160" cy="1097280"/>
+            <a:off x="8366760" y="2103120"/>
+            <a:ext cx="3246120" cy="1051560"/>
           </a:xfrm>
           <a:prstGeom prst="roundRect">
             <a:avLst>
@@ -5297,7 +5676,7 @@
                 </a:solidFill>
                 <a:latin typeface="Calibri"/>
               </a:rPr>
-              <a:t>router.huggingface.co/v1/chat/completions</a:t>
+              <a:t>router.huggingface.co</a:t>
             </a:r>
           </a:p>
           <a:p>
@@ -5316,83 +5695,14 @@
       </p:sp>
       <p:sp>
         <p:nvSpPr>
-          <p:cNvPr id="23" name="Rounded Rectangle 22"/>
+          <p:cNvPr id="28" name="Rounded Rectangle 27"/>
           <p:cNvSpPr/>
           <p:nvPr/>
         </p:nvSpPr>
         <p:spPr>
           <a:xfrm>
-            <a:off x="7955279" y="3566160"/>
-            <a:ext cx="3566160" cy="914400"/>
-          </a:xfrm>
-          <a:prstGeom prst="roundRect">
-            <a:avLst>
-              <a:gd name="adj" fmla="val 12000"/>
-            </a:avLst>
-          </a:prstGeom>
-          <a:solidFill>
-            <a:srgbClr val="FFFFFF"/>
-          </a:solidFill>
-          <a:ln w="19050">
-            <a:solidFill>
-              <a:srgbClr val="0F766E"/>
-            </a:solidFill>
-          </a:ln>
-          <a:effectLst/>
-        </p:spPr>
-        <p:style>
-          <a:lnRef idx="1">
-            <a:schemeClr val="accent1"/>
-          </a:lnRef>
-          <a:fillRef idx="3">
-            <a:schemeClr val="accent1"/>
-          </a:fillRef>
-          <a:effectRef idx="2">
-            <a:schemeClr val="accent1"/>
-          </a:effectRef>
-          <a:fontRef idx="minor">
-            <a:schemeClr val="lt1"/>
-          </a:fontRef>
-        </p:style>
-        <p:txBody>
-          <a:bodyPr rtlCol="0" anchor="ctr" wrap="square"/>
-          <a:lstStyle/>
-          <a:p>
-            <a:pPr algn="ctr"/>
-            <a:r>
-              <a:rPr sz="1200" b="1">
-                <a:solidFill>
-                  <a:srgbClr val="0F766E"/>
-                </a:solidFill>
-                <a:latin typeface="Calibri"/>
-              </a:rPr>
-              <a:t>Account checks</a:t>
-            </a:r>
-          </a:p>
-          <a:p>
-            <a:pPr algn="ctr"/>
-            <a:r>
-              <a:rPr sz="1000" b="0">
-                <a:solidFill>
-                  <a:srgbClr val="1F2937"/>
-                </a:solidFill>
-                <a:latin typeface="Calibri"/>
-              </a:rPr>
-              <a:t>gated licence approved?  ·  credits left?</a:t>
-            </a:r>
-          </a:p>
-        </p:txBody>
-      </p:sp>
-      <p:sp>
-        <p:nvSpPr>
-          <p:cNvPr id="24" name="Rounded Rectangle 23"/>
-          <p:cNvSpPr/>
-          <p:nvPr/>
-        </p:nvSpPr>
-        <p:spPr>
-          <a:xfrm>
-            <a:off x="7955279" y="4709160"/>
-            <a:ext cx="1737360" cy="548640"/>
+            <a:off x="8366760" y="3520440"/>
+            <a:ext cx="1581912" cy="530352"/>
           </a:xfrm>
           <a:prstGeom prst="roundRect">
             <a:avLst>
@@ -5442,14 +5752,14 @@
       </p:sp>
       <p:sp>
         <p:nvSpPr>
-          <p:cNvPr id="25" name="Rounded Rectangle 24"/>
+          <p:cNvPr id="29" name="Rounded Rectangle 28"/>
           <p:cNvSpPr/>
           <p:nvPr/>
         </p:nvSpPr>
         <p:spPr>
           <a:xfrm>
-            <a:off x="9784080" y="4709160"/>
-            <a:ext cx="1737360" cy="548640"/>
+            <a:off x="10030968" y="3520440"/>
+            <a:ext cx="1581912" cy="530352"/>
           </a:xfrm>
           <a:prstGeom prst="roundRect">
             <a:avLst>
@@ -5499,14 +5809,14 @@
       </p:sp>
       <p:sp>
         <p:nvSpPr>
-          <p:cNvPr id="26" name="Rounded Rectangle 25"/>
+          <p:cNvPr id="30" name="Rounded Rectangle 29"/>
           <p:cNvSpPr/>
           <p:nvPr/>
         </p:nvSpPr>
         <p:spPr>
           <a:xfrm>
-            <a:off x="7955279" y="5367528"/>
-            <a:ext cx="1737360" cy="548640"/>
+            <a:off x="8366760" y="4160520"/>
+            <a:ext cx="1581912" cy="530352"/>
           </a:xfrm>
           <a:prstGeom prst="roundRect">
             <a:avLst>
@@ -5556,14 +5866,14 @@
       </p:sp>
       <p:sp>
         <p:nvSpPr>
-          <p:cNvPr id="27" name="Rounded Rectangle 26"/>
+          <p:cNvPr id="31" name="Rounded Rectangle 30"/>
           <p:cNvSpPr/>
           <p:nvPr/>
         </p:nvSpPr>
         <p:spPr>
           <a:xfrm>
-            <a:off x="9784080" y="5367528"/>
-            <a:ext cx="1737360" cy="548640"/>
+            <a:off x="10030968" y="4160520"/>
+            <a:ext cx="1581912" cy="530352"/>
           </a:xfrm>
           <a:prstGeom prst="roundRect">
             <a:avLst>
@@ -5613,14 +5923,14 @@
       </p:sp>
       <p:sp>
         <p:nvSpPr>
-          <p:cNvPr id="28" name="TextBox 27"/>
+          <p:cNvPr id="32" name="TextBox 31"/>
           <p:cNvSpPr txBox="1"/>
           <p:nvPr/>
         </p:nvSpPr>
         <p:spPr>
           <a:xfrm>
-            <a:off x="7955279" y="5989320"/>
-            <a:ext cx="3566160" cy="274320"/>
+            <a:off x="8366760" y="4846320"/>
+            <a:ext cx="3246120" cy="548640"/>
           </a:xfrm>
           <a:prstGeom prst="rect">
             <a:avLst/>
@@ -5641,21 +5951,33 @@
                 </a:solidFill>
                 <a:latin typeface="Calibri"/>
               </a:rPr>
-              <a:t>Inference providers run the model on GPUs</a:t>
+              <a:t>Inference providers run large</a:t>
+            </a:r>
+          </a:p>
+          <a:p>
+            <a:pPr algn="ctr"/>
+            <a:r>
+              <a:rPr sz="1000" b="0">
+                <a:solidFill>
+                  <a:srgbClr val="5B6778"/>
+                </a:solidFill>
+                <a:latin typeface="Calibri"/>
+              </a:rPr>
+              <a:t>models on GPUs (paid, needs a token)</a:t>
             </a:r>
           </a:p>
         </p:txBody>
       </p:sp>
       <p:cxnSp>
         <p:nvCxnSpPr>
-          <p:cNvPr id="29" name="Connector 28"/>
+          <p:cNvPr id="33" name="Connector 32"/>
           <p:cNvCxnSpPr/>
           <p:nvPr/>
         </p:nvCxnSpPr>
         <p:spPr>
           <a:xfrm flipV="1">
-            <a:off x="2697480" y="2788920"/>
-            <a:ext cx="594360" cy="182880"/>
+            <a:off x="2286000" y="2697480"/>
+            <a:ext cx="502920" cy="228600"/>
           </a:xfrm>
           <a:prstGeom prst="line">
             <a:avLst/>
@@ -5666,150 +5988,6 @@
             </a:solidFill>
             <a:tailEnd type="triangle" w="med" len="med"/>
             <a:headEnd type="triangle" w="med" len="med"/>
-          </a:ln>
-        </p:spPr>
-        <p:style>
-          <a:lnRef idx="2">
-            <a:schemeClr val="accent1"/>
-          </a:lnRef>
-          <a:fillRef idx="0">
-            <a:schemeClr val="accent1"/>
-          </a:fillRef>
-          <a:effectRef idx="1">
-            <a:schemeClr val="accent1"/>
-          </a:effectRef>
-          <a:fontRef idx="minor">
-            <a:schemeClr val="tx1"/>
-          </a:fontRef>
-        </p:style>
-      </p:cxnSp>
-      <p:sp>
-        <p:nvSpPr>
-          <p:cNvPr id="30" name="TextBox 29"/>
-          <p:cNvSpPr txBox="1"/>
-          <p:nvPr/>
-        </p:nvSpPr>
-        <p:spPr>
-          <a:xfrm>
-            <a:off x="2651760" y="2514600"/>
-            <a:ext cx="731520" cy="274320"/>
-          </a:xfrm>
-          <a:prstGeom prst="rect">
-            <a:avLst/>
-          </a:prstGeom>
-          <a:noFill/>
-        </p:spPr>
-        <p:txBody>
-          <a:bodyPr wrap="square" lIns="36576" rIns="36576" anchor="t">
-            <a:spAutoFit/>
-          </a:bodyPr>
-          <a:lstStyle/>
-          <a:p>
-            <a:pPr algn="l"/>
-            <a:r>
-              <a:rPr sz="1000" b="0">
-                <a:solidFill>
-                  <a:srgbClr val="5B6778"/>
-                </a:solidFill>
-                <a:latin typeface="Calibri"/>
-              </a:rPr>
-              <a:t>HTTP</a:t>
-            </a:r>
-          </a:p>
-        </p:txBody>
-      </p:sp>
-      <p:cxnSp>
-        <p:nvCxnSpPr>
-          <p:cNvPr id="31" name="Connector 30"/>
-          <p:cNvCxnSpPr/>
-          <p:nvPr/>
-        </p:nvCxnSpPr>
-        <p:spPr>
-          <a:xfrm>
-            <a:off x="5093208" y="3108960"/>
-            <a:ext cx="0" cy="502920"/>
-          </a:xfrm>
-          <a:prstGeom prst="line">
-            <a:avLst/>
-          </a:prstGeom>
-          <a:ln w="19050">
-            <a:solidFill>
-              <a:srgbClr val="7C3AED"/>
-            </a:solidFill>
-            <a:tailEnd type="triangle" w="med" len="med"/>
-          </a:ln>
-        </p:spPr>
-        <p:style>
-          <a:lnRef idx="2">
-            <a:schemeClr val="accent1"/>
-          </a:lnRef>
-          <a:fillRef idx="0">
-            <a:schemeClr val="accent1"/>
-          </a:fillRef>
-          <a:effectRef idx="1">
-            <a:schemeClr val="accent1"/>
-          </a:effectRef>
-          <a:fontRef idx="minor">
-            <a:schemeClr val="tx1"/>
-          </a:fontRef>
-        </p:style>
-      </p:cxnSp>
-      <p:cxnSp>
-        <p:nvCxnSpPr>
-          <p:cNvPr id="32" name="Connector 31"/>
-          <p:cNvCxnSpPr/>
-          <p:nvPr/>
-        </p:nvCxnSpPr>
-        <p:spPr>
-          <a:xfrm flipV="1">
-            <a:off x="2194560" y="4434840"/>
-            <a:ext cx="1097280" cy="685800"/>
-          </a:xfrm>
-          <a:prstGeom prst="line">
-            <a:avLst/>
-          </a:prstGeom>
-          <a:ln w="19050">
-            <a:solidFill>
-              <a:srgbClr val="B45309"/>
-            </a:solidFill>
-            <a:prstDash val="lgDash"/>
-            <a:tailEnd type="triangle" w="med" len="med"/>
-          </a:ln>
-        </p:spPr>
-        <p:style>
-          <a:lnRef idx="2">
-            <a:schemeClr val="accent1"/>
-          </a:lnRef>
-          <a:fillRef idx="0">
-            <a:schemeClr val="accent1"/>
-          </a:fillRef>
-          <a:effectRef idx="1">
-            <a:schemeClr val="accent1"/>
-          </a:effectRef>
-          <a:fontRef idx="minor">
-            <a:schemeClr val="tx1"/>
-          </a:fontRef>
-        </p:style>
-      </p:cxnSp>
-      <p:cxnSp>
-        <p:nvCxnSpPr>
-          <p:cNvPr id="33" name="Connector 32"/>
-          <p:cNvCxnSpPr/>
-          <p:nvPr/>
-        </p:nvCxnSpPr>
-        <p:spPr>
-          <a:xfrm>
-            <a:off x="5486400" y="4636008"/>
-            <a:ext cx="0" cy="484632"/>
-          </a:xfrm>
-          <a:prstGeom prst="line">
-            <a:avLst/>
-          </a:prstGeom>
-          <a:ln w="19050">
-            <a:solidFill>
-              <a:srgbClr val="0F766E"/>
-            </a:solidFill>
-            <a:tailEnd type="triangle" w="med" len="med"/>
           </a:ln>
         </p:spPr>
         <p:style>
@@ -5834,88 +6012,16 @@
           <p:nvPr/>
         </p:nvCxnSpPr>
         <p:spPr>
-          <a:xfrm flipV="1">
-            <a:off x="7132320" y="2743200"/>
-            <a:ext cx="822959" cy="2743200"/>
+          <a:xfrm>
+            <a:off x="5093208" y="2962656"/>
+            <a:ext cx="0" cy="100584"/>
           </a:xfrm>
           <a:prstGeom prst="line">
             <a:avLst/>
           </a:prstGeom>
-          <a:ln w="31750">
+          <a:ln w="15875">
             <a:solidFill>
-              <a:srgbClr val="0F766E"/>
-            </a:solidFill>
-            <a:tailEnd type="triangle" w="med" len="med"/>
-            <a:headEnd type="triangle" w="med" len="med"/>
-          </a:ln>
-        </p:spPr>
-        <p:style>
-          <a:lnRef idx="2">
-            <a:schemeClr val="accent1"/>
-          </a:lnRef>
-          <a:fillRef idx="0">
-            <a:schemeClr val="accent1"/>
-          </a:fillRef>
-          <a:effectRef idx="1">
-            <a:schemeClr val="accent1"/>
-          </a:effectRef>
-          <a:fontRef idx="minor">
-            <a:schemeClr val="tx1"/>
-          </a:fontRef>
-        </p:style>
-      </p:cxnSp>
-      <p:sp>
-        <p:nvSpPr>
-          <p:cNvPr id="35" name="TextBox 34"/>
-          <p:cNvSpPr txBox="1"/>
-          <p:nvPr/>
-        </p:nvSpPr>
-        <p:spPr>
-          <a:xfrm>
-            <a:off x="5852160" y="6199632"/>
-            <a:ext cx="2926080" cy="274320"/>
-          </a:xfrm>
-          <a:prstGeom prst="rect">
-            <a:avLst/>
-          </a:prstGeom>
-          <a:noFill/>
-        </p:spPr>
-        <p:txBody>
-          <a:bodyPr wrap="square" lIns="36576" rIns="36576" anchor="t">
-            <a:spAutoFit/>
-          </a:bodyPr>
-          <a:lstStyle/>
-          <a:p>
-            <a:pPr algn="ctr"/>
-            <a:r>
-              <a:rPr sz="1000" b="0">
-                <a:solidFill>
-                  <a:srgbClr val="0F766E"/>
-                </a:solidFill>
-                <a:latin typeface="Calibri"/>
-              </a:rPr>
-              <a:t>HTTPS  ·  answer streamed back token by token</a:t>
-            </a:r>
-          </a:p>
-        </p:txBody>
-      </p:sp>
-      <p:cxnSp>
-        <p:nvCxnSpPr>
-          <p:cNvPr id="36" name="Connector 35"/>
-          <p:cNvCxnSpPr/>
-          <p:nvPr/>
-        </p:nvCxnSpPr>
-        <p:spPr>
-          <a:xfrm>
-            <a:off x="9738360" y="3246120"/>
-            <a:ext cx="0" cy="320040"/>
-          </a:xfrm>
-          <a:prstGeom prst="line">
-            <a:avLst/>
-          </a:prstGeom>
-          <a:ln w="19050">
-            <a:solidFill>
-              <a:srgbClr val="0F766E"/>
+              <a:srgbClr val="7C3AED"/>
             </a:solidFill>
             <a:tailEnd type="triangle" w="med" len="med"/>
           </a:ln>
@@ -5937,14 +6043,86 @@
       </p:cxnSp>
       <p:cxnSp>
         <p:nvCxnSpPr>
+          <p:cNvPr id="35" name="Connector 34"/>
+          <p:cNvCxnSpPr/>
+          <p:nvPr/>
+        </p:nvCxnSpPr>
+        <p:spPr>
+          <a:xfrm flipH="1">
+            <a:off x="2377440" y="4389120"/>
+            <a:ext cx="914400" cy="320040"/>
+          </a:xfrm>
+          <a:prstGeom prst="line">
+            <a:avLst/>
+          </a:prstGeom>
+          <a:ln w="28575">
+            <a:solidFill>
+              <a:srgbClr val="15803D"/>
+            </a:solidFill>
+            <a:tailEnd type="triangle" w="med" len="med"/>
+            <a:headEnd type="triangle" w="med" len="med"/>
+          </a:ln>
+        </p:spPr>
+        <p:style>
+          <a:lnRef idx="2">
+            <a:schemeClr val="accent1"/>
+          </a:lnRef>
+          <a:fillRef idx="0">
+            <a:schemeClr val="accent1"/>
+          </a:fillRef>
+          <a:effectRef idx="1">
+            <a:schemeClr val="accent1"/>
+          </a:effectRef>
+          <a:fontRef idx="minor">
+            <a:schemeClr val="tx1"/>
+          </a:fontRef>
+        </p:style>
+      </p:cxnSp>
+      <p:sp>
+        <p:nvSpPr>
+          <p:cNvPr id="36" name="TextBox 35"/>
+          <p:cNvSpPr txBox="1"/>
+          <p:nvPr/>
+        </p:nvSpPr>
+        <p:spPr>
+          <a:xfrm>
+            <a:off x="594360" y="4407408"/>
+            <a:ext cx="1828800" cy="274320"/>
+          </a:xfrm>
+          <a:prstGeom prst="rect">
+            <a:avLst/>
+          </a:prstGeom>
+          <a:noFill/>
+        </p:spPr>
+        <p:txBody>
+          <a:bodyPr wrap="square" lIns="36576" rIns="36576" anchor="t">
+            <a:spAutoFit/>
+          </a:bodyPr>
+          <a:lstStyle/>
+          <a:p>
+            <a:pPr algn="l"/>
+            <a:r>
+              <a:rPr sz="1000" b="1">
+                <a:solidFill>
+                  <a:srgbClr val="15803D"/>
+                </a:solidFill>
+                <a:latin typeface="Calibri"/>
+              </a:rPr>
+              <a:t>a) Local: HTTP</a:t>
+            </a:r>
+          </a:p>
+        </p:txBody>
+      </p:sp>
+      <p:cxnSp>
+        <p:nvCxnSpPr>
           <p:cNvPr id="37" name="Connector 36"/>
           <p:cNvCxnSpPr/>
           <p:nvPr/>
         </p:nvCxnSpPr>
         <p:spPr>
           <a:xfrm>
-            <a:off x="9738360" y="4480560"/>
-            <a:ext cx="0" cy="228600"/>
+            <a:off x="5760720" y="4297680"/>
+            <a:ext cx="0" cy="1115568"/>
           </a:xfrm>
           <a:prstGeom prst="line">
             <a:avLst/>
@@ -5971,16 +6149,53 @@
           </a:fontRef>
         </p:style>
       </p:cxnSp>
-      <p:sp>
-        <p:nvSpPr>
-          <p:cNvPr id="38" name="TextBox 37"/>
+      <p:cxnSp>
+        <p:nvCxnSpPr>
+          <p:cNvPr id="38" name="Connector 37"/>
+          <p:cNvCxnSpPr/>
+          <p:nvPr/>
+        </p:nvCxnSpPr>
+        <p:spPr>
+          <a:xfrm flipV="1">
+            <a:off x="7589520" y="2651760"/>
+            <a:ext cx="777240" cy="3072384"/>
+          </a:xfrm>
+          <a:prstGeom prst="line">
+            <a:avLst/>
+          </a:prstGeom>
+          <a:ln w="28575">
+            <a:solidFill>
+              <a:srgbClr val="0F766E"/>
+            </a:solidFill>
+            <a:tailEnd type="triangle" w="med" len="med"/>
+            <a:headEnd type="triangle" w="med" len="med"/>
+          </a:ln>
+        </p:spPr>
+        <p:style>
+          <a:lnRef idx="2">
+            <a:schemeClr val="accent1"/>
+          </a:lnRef>
+          <a:fillRef idx="0">
+            <a:schemeClr val="accent1"/>
+          </a:fillRef>
+          <a:effectRef idx="1">
+            <a:schemeClr val="accent1"/>
+          </a:effectRef>
+          <a:fontRef idx="minor">
+            <a:schemeClr val="tx1"/>
+          </a:fontRef>
+        </p:style>
+      </p:cxnSp>
+      <p:sp>
+        <p:nvSpPr>
+          <p:cNvPr id="39" name="TextBox 38"/>
           <p:cNvSpPr txBox="1"/>
           <p:nvPr/>
         </p:nvSpPr>
         <p:spPr>
           <a:xfrm>
-            <a:off x="548640" y="6446520"/>
-            <a:ext cx="8229600" cy="274320"/>
+            <a:off x="6537960" y="6245352"/>
+            <a:ext cx="3200400" cy="228600"/>
           </a:xfrm>
           <a:prstGeom prst="rect">
             <a:avLst/>
@@ -5993,29 +6208,65 @@
           </a:bodyPr>
           <a:lstStyle/>
           <a:p>
-            <a:pPr algn="l"/>
-            <a:r>
-              <a:rPr sz="1000" b="0">
-                <a:solidFill>
-                  <a:srgbClr val="8A94A3"/>
-                </a:solidFill>
-                <a:latin typeface="Calibri"/>
-              </a:rPr>
-              <a:t>Text Generation Playground  ·  09-ai-competencies/inference-model-apis/text-generation-app</a:t>
-            </a:r>
-          </a:p>
-        </p:txBody>
-      </p:sp>
-      <p:sp>
-        <p:nvSpPr>
-          <p:cNvPr id="39" name="TextBox 38"/>
+            <a:pPr algn="ctr"/>
+            <a:r>
+              <a:rPr sz="1000" b="1">
+                <a:solidFill>
+                  <a:srgbClr val="0F766E"/>
+                </a:solidFill>
+                <a:latin typeface="Calibri"/>
+              </a:rPr>
+              <a:t>b) Hosted: HTTPS, answer streamed back</a:t>
+            </a:r>
+          </a:p>
+        </p:txBody>
+      </p:sp>
+      <p:cxnSp>
+        <p:nvCxnSpPr>
+          <p:cNvPr id="40" name="Connector 39"/>
+          <p:cNvCxnSpPr/>
+          <p:nvPr/>
+        </p:nvCxnSpPr>
+        <p:spPr>
+          <a:xfrm>
+            <a:off x="9985248" y="3154680"/>
+            <a:ext cx="0" cy="365760"/>
+          </a:xfrm>
+          <a:prstGeom prst="line">
+            <a:avLst/>
+          </a:prstGeom>
+          <a:ln w="19050">
+            <a:solidFill>
+              <a:srgbClr val="0F766E"/>
+            </a:solidFill>
+            <a:tailEnd type="triangle" w="med" len="med"/>
+          </a:ln>
+        </p:spPr>
+        <p:style>
+          <a:lnRef idx="2">
+            <a:schemeClr val="accent1"/>
+          </a:lnRef>
+          <a:fillRef idx="0">
+            <a:schemeClr val="accent1"/>
+          </a:fillRef>
+          <a:effectRef idx="1">
+            <a:schemeClr val="accent1"/>
+          </a:effectRef>
+          <a:fontRef idx="minor">
+            <a:schemeClr val="tx1"/>
+          </a:fontRef>
+        </p:style>
+      </p:cxnSp>
+      <p:sp>
+        <p:nvSpPr>
+          <p:cNvPr id="41" name="TextBox 40"/>
           <p:cNvSpPr txBox="1"/>
           <p:nvPr/>
         </p:nvSpPr>
         <p:spPr>
           <a:xfrm>
-            <a:off x="10972800" y="6446520"/>
-            <a:ext cx="731520" cy="274320"/>
+            <a:off x="548640" y="6446520"/>
+            <a:ext cx="8229600" cy="274320"/>
           </a:xfrm>
           <a:prstGeom prst="rect">
             <a:avLst/>
@@ -6028,6 +6279,41 @@
           </a:bodyPr>
           <a:lstStyle/>
           <a:p>
+            <a:pPr algn="l"/>
+            <a:r>
+              <a:rPr sz="1000" b="0">
+                <a:solidFill>
+                  <a:srgbClr val="8A94A3"/>
+                </a:solidFill>
+                <a:latin typeface="Calibri"/>
+              </a:rPr>
+              <a:t>Text Generation Playground  ·  09-ai-competencies/inference-model-apis/text-generation-app</a:t>
+            </a:r>
+          </a:p>
+        </p:txBody>
+      </p:sp>
+      <p:sp>
+        <p:nvSpPr>
+          <p:cNvPr id="42" name="TextBox 41"/>
+          <p:cNvSpPr txBox="1"/>
+          <p:nvPr/>
+        </p:nvSpPr>
+        <p:spPr>
+          <a:xfrm>
+            <a:off x="10881360" y="6446520"/>
+            <a:ext cx="822960" cy="274320"/>
+          </a:xfrm>
+          <a:prstGeom prst="rect">
+            <a:avLst/>
+          </a:prstGeom>
+          <a:noFill/>
+        </p:spPr>
+        <p:txBody>
+          <a:bodyPr wrap="square" lIns="36576" rIns="36576" anchor="t">
+            <a:spAutoFit/>
+          </a:bodyPr>
+          <a:lstStyle/>
+          <a:p>
             <a:pPr algn="r"/>
             <a:r>
               <a:rPr sz="1000" b="0">
@@ -6036,7 +6322,7 @@
                 </a:solidFill>
                 <a:latin typeface="Calibri"/>
               </a:rPr>
-              <a:t>2</a:t>
+              <a:t>2 / 6</a:t>
             </a:r>
           </a:p>
         </p:txBody>
@@ -6180,7 +6466,7 @@
         </p:nvSpPr>
         <p:spPr>
           <a:xfrm>
-            <a:off x="320040" y="1691640"/>
+            <a:off x="320040" y="1645920"/>
             <a:ext cx="1828800" cy="502920"/>
           </a:xfrm>
           <a:prstGeom prst="roundRect">
@@ -6237,8 +6523,8 @@
         </p:nvCxnSpPr>
         <p:spPr>
           <a:xfrm>
-            <a:off x="1234440" y="2194560"/>
-            <a:ext cx="0" cy="4069080"/>
+            <a:off x="1234440" y="2148840"/>
+            <a:ext cx="0" cy="4160520"/>
           </a:xfrm>
           <a:prstGeom prst="line">
             <a:avLst/>
@@ -6273,7 +6559,7 @@
         </p:nvSpPr>
         <p:spPr>
           <a:xfrm>
-            <a:off x="2606040" y="1691640"/>
+            <a:off x="2606040" y="1645920"/>
             <a:ext cx="1828800" cy="502920"/>
           </a:xfrm>
           <a:prstGeom prst="roundRect">
@@ -6330,8 +6616,8 @@
         </p:nvCxnSpPr>
         <p:spPr>
           <a:xfrm>
-            <a:off x="3520440" y="2194560"/>
-            <a:ext cx="0" cy="4069080"/>
+            <a:off x="3520440" y="2148840"/>
+            <a:ext cx="0" cy="4160520"/>
           </a:xfrm>
           <a:prstGeom prst="line">
             <a:avLst/>
@@ -6366,7 +6652,7 @@
         </p:nvSpPr>
         <p:spPr>
           <a:xfrm>
-            <a:off x="4892040" y="1691640"/>
+            <a:off x="4892040" y="1645920"/>
             <a:ext cx="1828800" cy="502920"/>
           </a:xfrm>
           <a:prstGeom prst="roundRect">
@@ -6423,8 +6709,8 @@
         </p:nvCxnSpPr>
         <p:spPr>
           <a:xfrm>
-            <a:off x="5806440" y="2194560"/>
-            <a:ext cx="0" cy="4069080"/>
+            <a:off x="5806440" y="2148840"/>
+            <a:ext cx="0" cy="4160520"/>
           </a:xfrm>
           <a:prstGeom prst="line">
             <a:avLst/>
@@ -6459,7 +6745,100 @@
         </p:nvSpPr>
         <p:spPr>
           <a:xfrm>
-            <a:off x="7178040" y="1691640"/>
+            <a:off x="7178040" y="1645920"/>
+            <a:ext cx="1828800" cy="502920"/>
+          </a:xfrm>
+          <a:prstGeom prst="roundRect">
+            <a:avLst>
+              <a:gd name="adj" fmla="val 12000"/>
+            </a:avLst>
+          </a:prstGeom>
+          <a:solidFill>
+            <a:srgbClr val="E8F7EE"/>
+          </a:solidFill>
+          <a:ln w="19050">
+            <a:solidFill>
+              <a:srgbClr val="15803D"/>
+            </a:solidFill>
+          </a:ln>
+          <a:effectLst/>
+        </p:spPr>
+        <p:style>
+          <a:lnRef idx="1">
+            <a:schemeClr val="accent1"/>
+          </a:lnRef>
+          <a:fillRef idx="3">
+            <a:schemeClr val="accent1"/>
+          </a:fillRef>
+          <a:effectRef idx="2">
+            <a:schemeClr val="accent1"/>
+          </a:effectRef>
+          <a:fontRef idx="minor">
+            <a:schemeClr val="lt1"/>
+          </a:fontRef>
+        </p:style>
+        <p:txBody>
+          <a:bodyPr rtlCol="0" anchor="ctr" wrap="square"/>
+          <a:lstStyle/>
+          <a:p>
+            <a:pPr algn="ctr"/>
+            <a:r>
+              <a:rPr sz="1300" b="1">
+                <a:solidFill>
+                  <a:srgbClr val="15803D"/>
+                </a:solidFill>
+                <a:latin typeface="Calibri"/>
+              </a:rPr>
+              <a:t>Ollama (local)</a:t>
+            </a:r>
+          </a:p>
+        </p:txBody>
+      </p:sp>
+      <p:cxnSp>
+        <p:nvCxnSpPr>
+          <p:cNvPr id="12" name="Connector 11"/>
+          <p:cNvCxnSpPr/>
+          <p:nvPr/>
+        </p:nvCxnSpPr>
+        <p:spPr>
+          <a:xfrm>
+            <a:off x="8092440" y="2148840"/>
+            <a:ext cx="0" cy="4160520"/>
+          </a:xfrm>
+          <a:prstGeom prst="line">
+            <a:avLst/>
+          </a:prstGeom>
+          <a:ln w="15875">
+            <a:solidFill>
+              <a:srgbClr val="D1D5DB"/>
+            </a:solidFill>
+            <a:prstDash val="lgDash"/>
+          </a:ln>
+        </p:spPr>
+        <p:style>
+          <a:lnRef idx="2">
+            <a:schemeClr val="accent1"/>
+          </a:lnRef>
+          <a:fillRef idx="0">
+            <a:schemeClr val="accent1"/>
+          </a:fillRef>
+          <a:effectRef idx="1">
+            <a:schemeClr val="accent1"/>
+          </a:effectRef>
+          <a:fontRef idx="minor">
+            <a:schemeClr val="tx1"/>
+          </a:fontRef>
+        </p:style>
+      </p:cxnSp>
+      <p:sp>
+        <p:nvSpPr>
+          <p:cNvPr id="13" name="Rounded Rectangle 12"/>
+          <p:cNvSpPr/>
+          <p:nvPr/>
+        </p:nvSpPr>
+        <p:spPr>
+          <a:xfrm>
+            <a:off x="9464040" y="1645920"/>
             <a:ext cx="1828800" cy="502920"/>
           </a:xfrm>
           <a:prstGeom prst="roundRect">
@@ -6503,100 +6882,7 @@
                 </a:solidFill>
                 <a:latin typeface="Calibri"/>
               </a:rPr>
-              <a:t>HF router</a:t>
-            </a:r>
-          </a:p>
-        </p:txBody>
-      </p:sp>
-      <p:cxnSp>
-        <p:nvCxnSpPr>
-          <p:cNvPr id="12" name="Connector 11"/>
-          <p:cNvCxnSpPr/>
-          <p:nvPr/>
-        </p:nvCxnSpPr>
-        <p:spPr>
-          <a:xfrm>
-            <a:off x="8092440" y="2194560"/>
-            <a:ext cx="0" cy="4069080"/>
-          </a:xfrm>
-          <a:prstGeom prst="line">
-            <a:avLst/>
-          </a:prstGeom>
-          <a:ln w="15875">
-            <a:solidFill>
-              <a:srgbClr val="D1D5DB"/>
-            </a:solidFill>
-            <a:prstDash val="lgDash"/>
-          </a:ln>
-        </p:spPr>
-        <p:style>
-          <a:lnRef idx="2">
-            <a:schemeClr val="accent1"/>
-          </a:lnRef>
-          <a:fillRef idx="0">
-            <a:schemeClr val="accent1"/>
-          </a:fillRef>
-          <a:effectRef idx="1">
-            <a:schemeClr val="accent1"/>
-          </a:effectRef>
-          <a:fontRef idx="minor">
-            <a:schemeClr val="tx1"/>
-          </a:fontRef>
-        </p:style>
-      </p:cxnSp>
-      <p:sp>
-        <p:nvSpPr>
-          <p:cNvPr id="13" name="Rounded Rectangle 12"/>
-          <p:cNvSpPr/>
-          <p:nvPr/>
-        </p:nvSpPr>
-        <p:spPr>
-          <a:xfrm>
-            <a:off x="9464040" y="1691640"/>
-            <a:ext cx="1828800" cy="502920"/>
-          </a:xfrm>
-          <a:prstGeom prst="roundRect">
-            <a:avLst>
-              <a:gd name="adj" fmla="val 12000"/>
-            </a:avLst>
-          </a:prstGeom>
-          <a:solidFill>
-            <a:srgbClr val="E6F6F4"/>
-          </a:solidFill>
-          <a:ln w="19050">
-            <a:solidFill>
-              <a:srgbClr val="0F766E"/>
-            </a:solidFill>
-          </a:ln>
-          <a:effectLst/>
-        </p:spPr>
-        <p:style>
-          <a:lnRef idx="1">
-            <a:schemeClr val="accent1"/>
-          </a:lnRef>
-          <a:fillRef idx="3">
-            <a:schemeClr val="accent1"/>
-          </a:fillRef>
-          <a:effectRef idx="2">
-            <a:schemeClr val="accent1"/>
-          </a:effectRef>
-          <a:fontRef idx="minor">
-            <a:schemeClr val="lt1"/>
-          </a:fontRef>
-        </p:style>
-        <p:txBody>
-          <a:bodyPr rtlCol="0" anchor="ctr" wrap="square"/>
-          <a:lstStyle/>
-          <a:p>
-            <a:pPr algn="ctr"/>
-            <a:r>
-              <a:rPr sz="1300" b="1">
-                <a:solidFill>
-                  <a:srgbClr val="0F766E"/>
-                </a:solidFill>
-                <a:latin typeface="Calibri"/>
-              </a:rPr>
-              <a:t>Provider</a:t>
+              <a:t>Hugging Face</a:t>
             </a:r>
           </a:p>
         </p:txBody>
@@ -6609,8 +6895,8 @@
         </p:nvCxnSpPr>
         <p:spPr>
           <a:xfrm>
-            <a:off x="10378440" y="2194560"/>
-            <a:ext cx="0" cy="4069080"/>
+            <a:off x="10378440" y="2148840"/>
+            <a:ext cx="0" cy="4160520"/>
           </a:xfrm>
           <a:prstGeom prst="line">
             <a:avLst/>
@@ -6645,7 +6931,7 @@
         </p:nvCxnSpPr>
         <p:spPr>
           <a:xfrm>
-            <a:off x="1234440" y="2514600"/>
+            <a:off x="1234440" y="2450592"/>
             <a:ext cx="2286000" cy="0"/>
           </a:xfrm>
           <a:prstGeom prst="line">
@@ -6681,7 +6967,7 @@
         </p:nvSpPr>
         <p:spPr>
           <a:xfrm>
-            <a:off x="1325880" y="2212848"/>
+            <a:off x="1325880" y="2148840"/>
             <a:ext cx="2194560" cy="274320"/>
           </a:xfrm>
           <a:prstGeom prst="rect">
@@ -6716,7 +7002,7 @@
         </p:nvSpPr>
         <p:spPr>
           <a:xfrm>
-            <a:off x="3438144" y="2807208"/>
+            <a:off x="3438144" y="2720340"/>
             <a:ext cx="164592" cy="164592"/>
           </a:xfrm>
           <a:prstGeom prst="ellipse">
@@ -6759,8 +7045,8 @@
         </p:nvSpPr>
         <p:spPr>
           <a:xfrm>
-            <a:off x="3657600" y="2734056"/>
-            <a:ext cx="2103120" cy="292608"/>
+            <a:off x="3657600" y="2647188"/>
+            <a:ext cx="2926080" cy="292608"/>
           </a:xfrm>
           <a:prstGeom prst="rect">
             <a:avLst/>
@@ -6781,7 +7067,7 @@
                 </a:solidFill>
                 <a:latin typeface="Calibri"/>
               </a:rPr>
-              <a:t>2  check token &amp; prompt</a:t>
+              <a:t>2  check model &amp; prompt (+ token if hosted)</a:t>
             </a:r>
           </a:p>
         </p:txBody>
@@ -6794,7 +7080,7 @@
         </p:nvCxnSpPr>
         <p:spPr>
           <a:xfrm>
-            <a:off x="3520440" y="3264408"/>
+            <a:off x="3520440" y="3154680"/>
             <a:ext cx="2286000" cy="0"/>
           </a:xfrm>
           <a:prstGeom prst="line">
@@ -6830,7 +7116,7 @@
         </p:nvSpPr>
         <p:spPr>
           <a:xfrm>
-            <a:off x="3611880" y="2962656"/>
+            <a:off x="3611880" y="2852928"/>
             <a:ext cx="2194559" cy="274320"/>
           </a:xfrm>
           <a:prstGeom prst="rect">
@@ -6852,7 +7138,7 @@
                 </a:solidFill>
                 <a:latin typeface="Calibri"/>
               </a:rPr>
-              <a:t>3  build chain, stream()</a:t>
+              <a:t>3  build chain for the chosen source</a:t>
             </a:r>
           </a:p>
         </p:txBody>
@@ -6865,7 +7151,7 @@
         </p:nvSpPr>
         <p:spPr>
           <a:xfrm>
-            <a:off x="5724144" y="3557016"/>
+            <a:off x="5724144" y="3424428"/>
             <a:ext cx="164592" cy="164592"/>
           </a:xfrm>
           <a:prstGeom prst="ellipse">
@@ -6908,8 +7194,8 @@
         </p:nvSpPr>
         <p:spPr>
           <a:xfrm>
-            <a:off x="5943600" y="3483864"/>
-            <a:ext cx="2103120" cy="292608"/>
+            <a:off x="5943600" y="3351276"/>
+            <a:ext cx="2926080" cy="292608"/>
           </a:xfrm>
           <a:prstGeom prst="rect">
             <a:avLst/>
@@ -6943,8 +7229,150 @@
         </p:nvCxnSpPr>
         <p:spPr>
           <a:xfrm>
-            <a:off x="5806440" y="4014216"/>
+            <a:off x="5806440" y="3858768"/>
             <a:ext cx="2286000" cy="0"/>
+          </a:xfrm>
+          <a:prstGeom prst="line">
+            <a:avLst/>
+          </a:prstGeom>
+          <a:ln w="22225">
+            <a:solidFill>
+              <a:srgbClr val="15803D"/>
+            </a:solidFill>
+            <a:tailEnd type="triangle" w="med" len="med"/>
+          </a:ln>
+        </p:spPr>
+        <p:style>
+          <a:lnRef idx="2">
+            <a:schemeClr val="accent1"/>
+          </a:lnRef>
+          <a:fillRef idx="0">
+            <a:schemeClr val="accent1"/>
+          </a:fillRef>
+          <a:effectRef idx="1">
+            <a:schemeClr val="accent1"/>
+          </a:effectRef>
+          <a:fontRef idx="minor">
+            <a:schemeClr val="tx1"/>
+          </a:fontRef>
+        </p:style>
+      </p:cxnSp>
+      <p:sp>
+        <p:nvSpPr>
+          <p:cNvPr id="24" name="TextBox 23"/>
+          <p:cNvSpPr txBox="1"/>
+          <p:nvPr/>
+        </p:nvSpPr>
+        <p:spPr>
+          <a:xfrm>
+            <a:off x="5897879" y="3557015"/>
+            <a:ext cx="2194560" cy="274320"/>
+          </a:xfrm>
+          <a:prstGeom prst="rect">
+            <a:avLst/>
+          </a:prstGeom>
+          <a:noFill/>
+        </p:spPr>
+        <p:txBody>
+          <a:bodyPr wrap="square" lIns="36576" rIns="36576" anchor="t">
+            <a:spAutoFit/>
+          </a:bodyPr>
+          <a:lstStyle/>
+          <a:p>
+            <a:pPr algn="l"/>
+            <a:r>
+              <a:rPr sz="1100" b="0">
+                <a:solidFill>
+                  <a:srgbClr val="1F2937"/>
+                </a:solidFill>
+                <a:latin typeface="Calibri"/>
+              </a:rPr>
+              <a:t>5a  Local: POST localhost:11434/api/chat</a:t>
+            </a:r>
+          </a:p>
+        </p:txBody>
+      </p:sp>
+      <p:cxnSp>
+        <p:nvCxnSpPr>
+          <p:cNvPr id="25" name="Connector 24"/>
+          <p:cNvCxnSpPr/>
+          <p:nvPr/>
+        </p:nvCxnSpPr>
+        <p:spPr>
+          <a:xfrm flipH="1">
+            <a:off x="5806440" y="4210812"/>
+            <a:ext cx="2286000" cy="0"/>
+          </a:xfrm>
+          <a:prstGeom prst="line">
+            <a:avLst/>
+          </a:prstGeom>
+          <a:ln w="22225">
+            <a:solidFill>
+              <a:srgbClr val="15803D"/>
+            </a:solidFill>
+            <a:tailEnd type="triangle" w="med" len="med"/>
+          </a:ln>
+        </p:spPr>
+        <p:style>
+          <a:lnRef idx="2">
+            <a:schemeClr val="accent1"/>
+          </a:lnRef>
+          <a:fillRef idx="0">
+            <a:schemeClr val="accent1"/>
+          </a:fillRef>
+          <a:effectRef idx="1">
+            <a:schemeClr val="accent1"/>
+          </a:effectRef>
+          <a:fontRef idx="minor">
+            <a:schemeClr val="tx1"/>
+          </a:fontRef>
+        </p:style>
+      </p:cxnSp>
+      <p:sp>
+        <p:nvSpPr>
+          <p:cNvPr id="26" name="TextBox 25"/>
+          <p:cNvSpPr txBox="1"/>
+          <p:nvPr/>
+        </p:nvSpPr>
+        <p:spPr>
+          <a:xfrm>
+            <a:off x="5897879" y="3909059"/>
+            <a:ext cx="2194560" cy="274320"/>
+          </a:xfrm>
+          <a:prstGeom prst="rect">
+            <a:avLst/>
+          </a:prstGeom>
+          <a:noFill/>
+        </p:spPr>
+        <p:txBody>
+          <a:bodyPr wrap="square" lIns="36576" rIns="36576" anchor="t">
+            <a:spAutoFit/>
+          </a:bodyPr>
+          <a:lstStyle/>
+          <a:p>
+            <a:pPr algn="l"/>
+            <a:r>
+              <a:rPr sz="1100" b="0">
+                <a:solidFill>
+                  <a:srgbClr val="1F2937"/>
+                </a:solidFill>
+                <a:latin typeface="Calibri"/>
+              </a:rPr>
+              <a:t>6a  answer streamed back</a:t>
+            </a:r>
+          </a:p>
+        </p:txBody>
+      </p:sp>
+      <p:cxnSp>
+        <p:nvCxnSpPr>
+          <p:cNvPr id="27" name="Connector 26"/>
+          <p:cNvCxnSpPr/>
+          <p:nvPr/>
+        </p:nvCxnSpPr>
+        <p:spPr>
+          <a:xfrm>
+            <a:off x="5806440" y="4562855"/>
+            <a:ext cx="4572000" cy="0"/>
           </a:xfrm>
           <a:prstGeom prst="line">
             <a:avLst/>
@@ -6973,14 +7401,14 @@
       </p:cxnSp>
       <p:sp>
         <p:nvSpPr>
-          <p:cNvPr id="24" name="TextBox 23"/>
+          <p:cNvPr id="28" name="TextBox 27"/>
           <p:cNvSpPr txBox="1"/>
           <p:nvPr/>
         </p:nvSpPr>
         <p:spPr>
           <a:xfrm>
-            <a:off x="5897879" y="3712464"/>
-            <a:ext cx="2194560" cy="274320"/>
+            <a:off x="5897879" y="4261103"/>
+            <a:ext cx="4480560" cy="274320"/>
           </a:xfrm>
           <a:prstGeom prst="rect">
             <a:avLst/>
@@ -7001,20 +7429,20 @@
                 </a:solidFill>
                 <a:latin typeface="Calibri"/>
               </a:rPr>
-              <a:t>5  POST chat/completions</a:t>
-            </a:r>
-          </a:p>
-        </p:txBody>
-      </p:sp>
-      <p:sp>
-        <p:nvSpPr>
-          <p:cNvPr id="25" name="Oval 24"/>
+              <a:t>5b  Hosted: POST router chat/completions</a:t>
+            </a:r>
+          </a:p>
+        </p:txBody>
+      </p:sp>
+      <p:sp>
+        <p:nvSpPr>
+          <p:cNvPr id="29" name="Oval 28"/>
           <p:cNvSpPr/>
           <p:nvPr/>
         </p:nvSpPr>
         <p:spPr>
           <a:xfrm>
-            <a:off x="8010144" y="4306824"/>
+            <a:off x="10296144" y="4832603"/>
             <a:ext cx="164592" cy="164592"/>
           </a:xfrm>
           <a:prstGeom prst="ellipse">
@@ -7051,14 +7479,14 @@
       </p:sp>
       <p:sp>
         <p:nvSpPr>
-          <p:cNvPr id="26" name="TextBox 25"/>
+          <p:cNvPr id="30" name="TextBox 29"/>
           <p:cNvSpPr txBox="1"/>
           <p:nvPr/>
         </p:nvSpPr>
         <p:spPr>
           <a:xfrm>
-            <a:off x="8229600" y="4233672"/>
-            <a:ext cx="2103120" cy="292608"/>
+            <a:off x="7635240" y="4759451"/>
+            <a:ext cx="2606040" cy="292608"/>
           </a:xfrm>
           <a:prstGeom prst="rect">
             <a:avLst/>
@@ -7071,7 +7499,7 @@
           </a:bodyPr>
           <a:lstStyle/>
           <a:p>
-            <a:pPr algn="l"/>
+            <a:pPr algn="r"/>
             <a:r>
               <a:rPr sz="1100" b="0">
                 <a:solidFill>
@@ -7079,21 +7507,21 @@
                 </a:solidFill>
                 <a:latin typeface="Calibri"/>
               </a:rPr>
-              <a:t>6  token · licence · credits</a:t>
+              <a:t>router checks token · licence · credits</a:t>
             </a:r>
           </a:p>
         </p:txBody>
       </p:sp>
       <p:cxnSp>
         <p:nvCxnSpPr>
-          <p:cNvPr id="27" name="Connector 26"/>
+          <p:cNvPr id="31" name="Connector 30"/>
           <p:cNvCxnSpPr/>
           <p:nvPr/>
         </p:nvCxnSpPr>
         <p:spPr>
-          <a:xfrm>
-            <a:off x="8092440" y="4764024"/>
-            <a:ext cx="2286000" cy="0"/>
+          <a:xfrm flipH="1">
+            <a:off x="5806440" y="5266943"/>
+            <a:ext cx="4572000" cy="0"/>
           </a:xfrm>
           <a:prstGeom prst="line">
             <a:avLst/>
@@ -7122,14 +7550,14 @@
       </p:cxnSp>
       <p:sp>
         <p:nvSpPr>
-          <p:cNvPr id="28" name="TextBox 27"/>
+          <p:cNvPr id="32" name="TextBox 31"/>
           <p:cNvSpPr txBox="1"/>
           <p:nvPr/>
         </p:nvSpPr>
         <p:spPr>
           <a:xfrm>
-            <a:off x="8183879" y="4462272"/>
-            <a:ext cx="2194560" cy="274320"/>
+            <a:off x="5897879" y="4965191"/>
+            <a:ext cx="4480560" cy="274320"/>
           </a:xfrm>
           <a:prstGeom prst="rect">
             <a:avLst/>
@@ -7150,28 +7578,28 @@
                 </a:solidFill>
                 <a:latin typeface="Calibri"/>
               </a:rPr>
-              <a:t>7  forward to provider</a:t>
+              <a:t>6b  answer streamed back from a provider</a:t>
             </a:r>
           </a:p>
         </p:txBody>
       </p:sp>
       <p:cxnSp>
         <p:nvCxnSpPr>
-          <p:cNvPr id="29" name="Connector 28"/>
+          <p:cNvPr id="33" name="Connector 32"/>
           <p:cNvCxnSpPr/>
           <p:nvPr/>
         </p:nvCxnSpPr>
         <p:spPr>
           <a:xfrm flipH="1">
-            <a:off x="5806440" y="5138928"/>
-            <a:ext cx="4572000" cy="0"/>
+            <a:off x="3520440" y="5618987"/>
+            <a:ext cx="2286000" cy="0"/>
           </a:xfrm>
           <a:prstGeom prst="line">
             <a:avLst/>
           </a:prstGeom>
           <a:ln w="22225">
             <a:solidFill>
-              <a:srgbClr val="0F766E"/>
+              <a:srgbClr val="7C3AED"/>
             </a:solidFill>
             <a:tailEnd type="triangle" w="med" len="med"/>
           </a:ln>
@@ -7193,14 +7621,14 @@
       </p:cxnSp>
       <p:sp>
         <p:nvSpPr>
-          <p:cNvPr id="30" name="TextBox 29"/>
+          <p:cNvPr id="34" name="TextBox 33"/>
           <p:cNvSpPr txBox="1"/>
           <p:nvPr/>
         </p:nvSpPr>
         <p:spPr>
           <a:xfrm>
-            <a:off x="5897879" y="4837176"/>
-            <a:ext cx="4480560" cy="274320"/>
+            <a:off x="3611880" y="5317235"/>
+            <a:ext cx="2194559" cy="274320"/>
           </a:xfrm>
           <a:prstGeom prst="rect">
             <a:avLst/>
@@ -7221,20 +7649,20 @@
                 </a:solidFill>
                 <a:latin typeface="Calibri"/>
               </a:rPr>
-              <a:t>8  tokens streamed back</a:t>
+              <a:t>7  text chunks</a:t>
             </a:r>
           </a:p>
         </p:txBody>
       </p:sp>
       <p:cxnSp>
         <p:nvCxnSpPr>
-          <p:cNvPr id="31" name="Connector 30"/>
+          <p:cNvPr id="35" name="Connector 34"/>
           <p:cNvCxnSpPr/>
           <p:nvPr/>
         </p:nvCxnSpPr>
         <p:spPr>
           <a:xfrm flipH="1">
-            <a:off x="3520440" y="5513832"/>
+            <a:off x="1234440" y="5971031"/>
             <a:ext cx="2286000" cy="0"/>
           </a:xfrm>
           <a:prstGeom prst="line">
@@ -7242,7 +7670,7 @@
           </a:prstGeom>
           <a:ln w="22225">
             <a:solidFill>
-              <a:srgbClr val="7C3AED"/>
+              <a:srgbClr val="2563EB"/>
             </a:solidFill>
             <a:tailEnd type="triangle" w="med" len="med"/>
           </a:ln>
@@ -7264,14 +7692,14 @@
       </p:cxnSp>
       <p:sp>
         <p:nvSpPr>
-          <p:cNvPr id="32" name="TextBox 31"/>
+          <p:cNvPr id="36" name="TextBox 35"/>
           <p:cNvSpPr txBox="1"/>
           <p:nvPr/>
         </p:nvSpPr>
         <p:spPr>
           <a:xfrm>
-            <a:off x="3611880" y="5212080"/>
-            <a:ext cx="2194559" cy="274320"/>
+            <a:off x="1325880" y="5669279"/>
+            <a:ext cx="2194560" cy="274320"/>
           </a:xfrm>
           <a:prstGeom prst="rect">
             <a:avLst/>
@@ -7292,30 +7720,29 @@
                 </a:solidFill>
                 <a:latin typeface="Calibri"/>
               </a:rPr>
-              <a:t>9  text chunks</a:t>
+              <a:t>8  st.write_stream shows the text live</a:t>
             </a:r>
           </a:p>
         </p:txBody>
       </p:sp>
       <p:cxnSp>
         <p:nvCxnSpPr>
-          <p:cNvPr id="33" name="Connector 32"/>
+          <p:cNvPr id="37" name="Connector 36"/>
           <p:cNvCxnSpPr/>
           <p:nvPr/>
         </p:nvCxnSpPr>
         <p:spPr>
-          <a:xfrm flipH="1">
-            <a:off x="1234440" y="5888736"/>
-            <a:ext cx="2286000" cy="0"/>
+          <a:xfrm>
+            <a:off x="5577840" y="3703320"/>
+            <a:ext cx="0" cy="1691640"/>
           </a:xfrm>
           <a:prstGeom prst="line">
             <a:avLst/>
           </a:prstGeom>
-          <a:ln w="22225">
+          <a:ln w="19050">
             <a:solidFill>
-              <a:srgbClr val="2563EB"/>
+              <a:srgbClr val="8A94A3"/>
             </a:solidFill>
-            <a:tailEnd type="triangle" w="med" len="med"/>
           </a:ln>
         </p:spPr>
         <p:style>
@@ -7335,14 +7762,14 @@
       </p:cxnSp>
       <p:sp>
         <p:nvSpPr>
-          <p:cNvPr id="34" name="TextBox 33"/>
+          <p:cNvPr id="38" name="TextBox 37"/>
           <p:cNvSpPr txBox="1"/>
           <p:nvPr/>
         </p:nvSpPr>
         <p:spPr>
           <a:xfrm>
-            <a:off x="1325880" y="5586984"/>
-            <a:ext cx="2194560" cy="274320"/>
+            <a:off x="3657600" y="4297680"/>
+            <a:ext cx="1828800" cy="548640"/>
           </a:xfrm>
           <a:prstGeom prst="rect">
             <a:avLst/>
@@ -7355,22 +7782,34 @@
           </a:bodyPr>
           <a:lstStyle/>
           <a:p>
-            <a:pPr algn="l"/>
-            <a:r>
-              <a:rPr sz="1100" b="0">
-                <a:solidFill>
-                  <a:srgbClr val="1F2937"/>
-                </a:solidFill>
-                <a:latin typeface="Calibri"/>
-              </a:rPr>
-              <a:t>10  st.write_stream shows text live</a:t>
-            </a:r>
-          </a:p>
-        </p:txBody>
-      </p:sp>
-      <p:sp>
-        <p:nvSpPr>
-          <p:cNvPr id="35" name="TextBox 34"/>
+            <a:pPr algn="r"/>
+            <a:r>
+              <a:rPr sz="1000" b="0">
+                <a:solidFill>
+                  <a:srgbClr val="5B6778"/>
+                </a:solidFill>
+                <a:latin typeface="Calibri"/>
+              </a:rPr>
+              <a:t>only one branch runs:</a:t>
+            </a:r>
+          </a:p>
+          <a:p>
+            <a:pPr algn="r"/>
+            <a:r>
+              <a:rPr sz="1000" b="0">
+                <a:solidFill>
+                  <a:srgbClr val="5B6778"/>
+                </a:solidFill>
+                <a:latin typeface="Calibri"/>
+              </a:rPr>
+              <a:t>a) local or b) hosted</a:t>
+            </a:r>
+          </a:p>
+        </p:txBody>
+      </p:sp>
+      <p:sp>
+        <p:nvSpPr>
+          <p:cNvPr id="39" name="TextBox 38"/>
           <p:cNvSpPr txBox="1"/>
           <p:nvPr/>
         </p:nvSpPr>
@@ -7405,14 +7844,14 @@
       </p:sp>
       <p:sp>
         <p:nvSpPr>
-          <p:cNvPr id="36" name="TextBox 35"/>
+          <p:cNvPr id="40" name="TextBox 39"/>
           <p:cNvSpPr txBox="1"/>
           <p:nvPr/>
         </p:nvSpPr>
         <p:spPr>
           <a:xfrm>
-            <a:off x="10972800" y="6446520"/>
-            <a:ext cx="731520" cy="274320"/>
+            <a:off x="10881360" y="6446520"/>
+            <a:ext cx="822960" cy="274320"/>
           </a:xfrm>
           <a:prstGeom prst="rect">
             <a:avLst/>
@@ -7433,7 +7872,7 @@
                 </a:solidFill>
                 <a:latin typeface="Calibri"/>
               </a:rPr>
-              <a:t>3</a:t>
+              <a:t>3 / 6</a:t>
             </a:r>
           </a:p>
         </p:txBody>
@@ -7486,7 +7925,7 @@
                 </a:solidFill>
                 <a:latin typeface="Calibri"/>
               </a:rPr>
-              <a:t>Components and responsibilities</a:t>
+              <a:t>Two model sources compared</a:t>
             </a:r>
           </a:p>
         </p:txBody>
@@ -7521,7 +7960,7 @@
                 </a:solidFill>
                 <a:latin typeface="Calibri"/>
               </a:rPr>
-              <a:t>Each layer has one job and depends only on the layer below</a:t>
+              <a:t>The same UI, prompt and chain; only the model block changes</a:t>
             </a:r>
           </a:p>
         </p:txBody>
@@ -7577,20 +8016,20 @@
         </p:nvSpPr>
         <p:spPr>
           <a:xfrm>
-            <a:off x="548640" y="1691640"/>
-            <a:ext cx="2651760" cy="777240"/>
+            <a:off x="3291840" y="1691640"/>
+            <a:ext cx="4069080" cy="402336"/>
           </a:xfrm>
           <a:prstGeom prst="roundRect">
             <a:avLst>
-              <a:gd name="adj" fmla="val 12000"/>
+              <a:gd name="adj" fmla="val 8000"/>
             </a:avLst>
           </a:prstGeom>
           <a:solidFill>
-            <a:srgbClr val="E8F0FE"/>
+            <a:srgbClr val="15803D"/>
           </a:solidFill>
           <a:ln w="19050">
             <a:solidFill>
-              <a:srgbClr val="2563EB"/>
+              <a:srgbClr val="15803D"/>
             </a:solidFill>
           </a:ln>
           <a:effectLst/>
@@ -7615,25 +8054,13 @@
           <a:p>
             <a:pPr algn="ctr"/>
             <a:r>
-              <a:rPr sz="1500" b="1">
-                <a:solidFill>
-                  <a:srgbClr val="2563EB"/>
-                </a:solidFill>
-                <a:latin typeface="Calibri"/>
-              </a:rPr>
-              <a:t>Presentation</a:t>
-            </a:r>
-          </a:p>
-          <a:p>
-            <a:pPr algn="ctr"/>
-            <a:r>
-              <a:rPr sz="1000" b="0">
-                <a:solidFill>
-                  <a:srgbClr val="1F2937"/>
-                </a:solidFill>
-                <a:latin typeface="Calibri"/>
-              </a:rPr>
-              <a:t>Streamlit 1.66</a:t>
+              <a:rPr sz="1300" b="1">
+                <a:solidFill>
+                  <a:srgbClr val="FFFFFF"/>
+                </a:solidFill>
+                <a:latin typeface="Calibri"/>
+              </a:rPr>
+              <a:t>Local (Ollama)  ·  default</a:t>
             </a:r>
           </a:p>
         </p:txBody>
@@ -7646,16 +8073,73 @@
         </p:nvSpPr>
         <p:spPr>
           <a:xfrm>
-            <a:off x="3337560" y="1691640"/>
-            <a:ext cx="8275320" cy="777240"/>
+            <a:off x="7452360" y="1691640"/>
+            <a:ext cx="4206240" cy="402336"/>
           </a:xfrm>
           <a:prstGeom prst="roundRect">
             <a:avLst>
-              <a:gd name="adj" fmla="val 12000"/>
+              <a:gd name="adj" fmla="val 8000"/>
             </a:avLst>
           </a:prstGeom>
           <a:solidFill>
-            <a:srgbClr val="FFFFFF"/>
+            <a:srgbClr val="0F766E"/>
+          </a:solidFill>
+          <a:ln w="19050">
+            <a:solidFill>
+              <a:srgbClr val="0F766E"/>
+            </a:solidFill>
+          </a:ln>
+          <a:effectLst/>
+        </p:spPr>
+        <p:style>
+          <a:lnRef idx="1">
+            <a:schemeClr val="accent1"/>
+          </a:lnRef>
+          <a:fillRef idx="3">
+            <a:schemeClr val="accent1"/>
+          </a:fillRef>
+          <a:effectRef idx="2">
+            <a:schemeClr val="accent1"/>
+          </a:effectRef>
+          <a:fontRef idx="minor">
+            <a:schemeClr val="lt1"/>
+          </a:fontRef>
+        </p:style>
+        <p:txBody>
+          <a:bodyPr rtlCol="0" anchor="ctr" wrap="square"/>
+          <a:lstStyle/>
+          <a:p>
+            <a:pPr algn="ctr"/>
+            <a:r>
+              <a:rPr sz="1300" b="1">
+                <a:solidFill>
+                  <a:srgbClr val="FFFFFF"/>
+                </a:solidFill>
+                <a:latin typeface="Calibri"/>
+              </a:rPr>
+              <a:t>Hugging Face (hosted)</a:t>
+            </a:r>
+          </a:p>
+        </p:txBody>
+      </p:sp>
+      <p:sp>
+        <p:nvSpPr>
+          <p:cNvPr id="7" name="Rounded Rectangle 6"/>
+          <p:cNvSpPr/>
+          <p:nvPr/>
+        </p:nvSpPr>
+        <p:spPr>
+          <a:xfrm>
+            <a:off x="548640" y="2148840"/>
+            <a:ext cx="2651760" cy="402336"/>
+          </a:xfrm>
+          <a:prstGeom prst="roundRect">
+            <a:avLst>
+              <a:gd name="adj" fmla="val 8000"/>
+            </a:avLst>
+          </a:prstGeom>
+          <a:solidFill>
+            <a:srgbClr val="F3F4F6"/>
           </a:solidFill>
           <a:ln w="19050">
             <a:solidFill>
@@ -7684,104 +8168,35 @@
           <a:p>
             <a:pPr algn="l"/>
             <a:r>
-              <a:rPr sz="1300" b="0">
+              <a:rPr sz="1150" b="1">
                 <a:solidFill>
                   <a:srgbClr val="1F2937"/>
                 </a:solidFill>
                 <a:latin typeface="Calibri"/>
               </a:rPr>
-              <a:t>Turns app.py into a web page, re-runs it on every click, streams the answer live</a:t>
-            </a:r>
-          </a:p>
-        </p:txBody>
-      </p:sp>
-      <p:sp>
-        <p:nvSpPr>
-          <p:cNvPr id="7" name="Rounded Rectangle 6"/>
+              <a:t>Where the model runs</a:t>
+            </a:r>
+          </a:p>
+        </p:txBody>
+      </p:sp>
+      <p:sp>
+        <p:nvSpPr>
+          <p:cNvPr id="8" name="Rounded Rectangle 7"/>
           <p:cNvSpPr/>
           <p:nvPr/>
         </p:nvSpPr>
         <p:spPr>
           <a:xfrm>
-            <a:off x="548640" y="2606040"/>
-            <a:ext cx="2651760" cy="777240"/>
+            <a:off x="3291840" y="2148840"/>
+            <a:ext cx="4069080" cy="402336"/>
           </a:xfrm>
           <a:prstGeom prst="roundRect">
             <a:avLst>
-              <a:gd name="adj" fmla="val 12000"/>
+              <a:gd name="adj" fmla="val 8000"/>
             </a:avLst>
           </a:prstGeom>
           <a:solidFill>
-            <a:srgbClr val="F1EAFE"/>
-          </a:solidFill>
-          <a:ln w="19050">
-            <a:solidFill>
-              <a:srgbClr val="7C3AED"/>
-            </a:solidFill>
-          </a:ln>
-          <a:effectLst/>
-        </p:spPr>
-        <p:style>
-          <a:lnRef idx="1">
-            <a:schemeClr val="accent1"/>
-          </a:lnRef>
-          <a:fillRef idx="3">
-            <a:schemeClr val="accent1"/>
-          </a:fillRef>
-          <a:effectRef idx="2">
-            <a:schemeClr val="accent1"/>
-          </a:effectRef>
-          <a:fontRef idx="minor">
-            <a:schemeClr val="lt1"/>
-          </a:fontRef>
-        </p:style>
-        <p:txBody>
-          <a:bodyPr rtlCol="0" anchor="ctr" wrap="square"/>
-          <a:lstStyle/>
-          <a:p>
-            <a:pPr algn="ctr"/>
-            <a:r>
-              <a:rPr sz="1500" b="1">
-                <a:solidFill>
-                  <a:srgbClr val="7C3AED"/>
-                </a:solidFill>
-                <a:latin typeface="Calibri"/>
-              </a:rPr>
-              <a:t>Orchestration</a:t>
-            </a:r>
-          </a:p>
-          <a:p>
-            <a:pPr algn="ctr"/>
-            <a:r>
-              <a:rPr sz="1000" b="0">
-                <a:solidFill>
-                  <a:srgbClr val="1F2937"/>
-                </a:solidFill>
-                <a:latin typeface="Calibri"/>
-              </a:rPr>
-              <a:t>langchain-core 1.7</a:t>
-            </a:r>
-          </a:p>
-        </p:txBody>
-      </p:sp>
-      <p:sp>
-        <p:nvSpPr>
-          <p:cNvPr id="8" name="Rounded Rectangle 7"/>
-          <p:cNvSpPr/>
-          <p:nvPr/>
-        </p:nvSpPr>
-        <p:spPr>
-          <a:xfrm>
-            <a:off x="3337560" y="2606040"/>
-            <a:ext cx="8275320" cy="777240"/>
-          </a:xfrm>
-          <a:prstGeom prst="roundRect">
-            <a:avLst>
-              <a:gd name="adj" fmla="val 12000"/>
-            </a:avLst>
-          </a:prstGeom>
-          <a:solidFill>
-            <a:srgbClr val="FFFFFF"/>
+            <a:srgbClr val="E8F7EE"/>
           </a:solidFill>
           <a:ln w="19050">
             <a:solidFill>
@@ -7810,13 +8225,13 @@
           <a:p>
             <a:pPr algn="l"/>
             <a:r>
-              <a:rPr sz="1300" b="0">
+              <a:rPr sz="1150" b="0">
                 <a:solidFill>
                   <a:srgbClr val="1F2937"/>
                 </a:solidFill>
                 <a:latin typeface="Calibri"/>
               </a:rPr>
-              <a:t>ChatPromptTemplate | ChatHuggingFace | StrOutputParser: prompt in, plain text out</a:t>
+              <a:t>On this computer</a:t>
             </a:r>
           </a:p>
         </p:txBody>
@@ -7829,85 +8244,16 @@
         </p:nvSpPr>
         <p:spPr>
           <a:xfrm>
-            <a:off x="548640" y="3520440"/>
-            <a:ext cx="2651760" cy="777240"/>
+            <a:off x="7452360" y="2148840"/>
+            <a:ext cx="4206240" cy="402336"/>
           </a:xfrm>
           <a:prstGeom prst="roundRect">
             <a:avLst>
-              <a:gd name="adj" fmla="val 12000"/>
+              <a:gd name="adj" fmla="val 8000"/>
             </a:avLst>
           </a:prstGeom>
           <a:solidFill>
             <a:srgbClr val="E6F6F4"/>
-          </a:solidFill>
-          <a:ln w="19050">
-            <a:solidFill>
-              <a:srgbClr val="0F766E"/>
-            </a:solidFill>
-          </a:ln>
-          <a:effectLst/>
-        </p:spPr>
-        <p:style>
-          <a:lnRef idx="1">
-            <a:schemeClr val="accent1"/>
-          </a:lnRef>
-          <a:fillRef idx="3">
-            <a:schemeClr val="accent1"/>
-          </a:fillRef>
-          <a:effectRef idx="2">
-            <a:schemeClr val="accent1"/>
-          </a:effectRef>
-          <a:fontRef idx="minor">
-            <a:schemeClr val="lt1"/>
-          </a:fontRef>
-        </p:style>
-        <p:txBody>
-          <a:bodyPr rtlCol="0" anchor="ctr" wrap="square"/>
-          <a:lstStyle/>
-          <a:p>
-            <a:pPr algn="ctr"/>
-            <a:r>
-              <a:rPr sz="1500" b="1">
-                <a:solidFill>
-                  <a:srgbClr val="0F766E"/>
-                </a:solidFill>
-                <a:latin typeface="Calibri"/>
-              </a:rPr>
-              <a:t>Model integration</a:t>
-            </a:r>
-          </a:p>
-          <a:p>
-            <a:pPr algn="ctr"/>
-            <a:r>
-              <a:rPr sz="1000" b="0">
-                <a:solidFill>
-                  <a:srgbClr val="1F2937"/>
-                </a:solidFill>
-                <a:latin typeface="Calibri"/>
-              </a:rPr>
-              <a:t>langchain-huggingface 1.2</a:t>
-            </a:r>
-          </a:p>
-        </p:txBody>
-      </p:sp>
-      <p:sp>
-        <p:nvSpPr>
-          <p:cNvPr id="10" name="Rounded Rectangle 9"/>
-          <p:cNvSpPr/>
-          <p:nvPr/>
-        </p:nvSpPr>
-        <p:spPr>
-          <a:xfrm>
-            <a:off x="3337560" y="3520440"/>
-            <a:ext cx="8275320" cy="777240"/>
-          </a:xfrm>
-          <a:prstGeom prst="roundRect">
-            <a:avLst>
-              <a:gd name="adj" fmla="val 12000"/>
-            </a:avLst>
-          </a:prstGeom>
-          <a:solidFill>
-            <a:srgbClr val="FFFFFF"/>
           </a:solidFill>
           <a:ln w="19050">
             <a:solidFill>
@@ -7936,104 +8282,35 @@
           <a:p>
             <a:pPr algn="l"/>
             <a:r>
-              <a:rPr sz="1300" b="0">
+              <a:rPr sz="1150" b="0">
                 <a:solidFill>
                   <a:srgbClr val="1F2937"/>
                 </a:solidFill>
                 <a:latin typeface="Calibri"/>
               </a:rPr>
-              <a:t>HuggingFaceEndpoint: model id, max_new_tokens, temperature; makes the HTTPS call</a:t>
-            </a:r>
-          </a:p>
-        </p:txBody>
-      </p:sp>
-      <p:sp>
-        <p:nvSpPr>
-          <p:cNvPr id="11" name="Rounded Rectangle 10"/>
+              <a:t>On a provider's GPUs (groq, nscale, deepinfra, …)</a:t>
+            </a:r>
+          </a:p>
+        </p:txBody>
+      </p:sp>
+      <p:sp>
+        <p:nvSpPr>
+          <p:cNvPr id="10" name="Rounded Rectangle 9"/>
           <p:cNvSpPr/>
           <p:nvPr/>
         </p:nvSpPr>
         <p:spPr>
           <a:xfrm>
-            <a:off x="548640" y="4434840"/>
-            <a:ext cx="2651760" cy="777240"/>
+            <a:off x="548640" y="2606040"/>
+            <a:ext cx="2651760" cy="402336"/>
           </a:xfrm>
           <a:prstGeom prst="roundRect">
             <a:avLst>
-              <a:gd name="adj" fmla="val 12000"/>
+              <a:gd name="adj" fmla="val 8000"/>
             </a:avLst>
           </a:prstGeom>
           <a:solidFill>
-            <a:srgbClr val="FFFFFF"/>
-          </a:solidFill>
-          <a:ln w="19050">
-            <a:solidFill>
-              <a:srgbClr val="0F766E"/>
-            </a:solidFill>
-          </a:ln>
-          <a:effectLst/>
-        </p:spPr>
-        <p:style>
-          <a:lnRef idx="1">
-            <a:schemeClr val="accent1"/>
-          </a:lnRef>
-          <a:fillRef idx="3">
-            <a:schemeClr val="accent1"/>
-          </a:fillRef>
-          <a:effectRef idx="2">
-            <a:schemeClr val="accent1"/>
-          </a:effectRef>
-          <a:fontRef idx="minor">
-            <a:schemeClr val="lt1"/>
-          </a:fontRef>
-        </p:style>
-        <p:txBody>
-          <a:bodyPr rtlCol="0" anchor="ctr" wrap="square"/>
-          <a:lstStyle/>
-          <a:p>
-            <a:pPr algn="ctr"/>
-            <a:r>
-              <a:rPr sz="1500" b="1">
-                <a:solidFill>
-                  <a:srgbClr val="0F766E"/>
-                </a:solidFill>
-                <a:latin typeface="Calibri"/>
-              </a:rPr>
-              <a:t>Model serving</a:t>
-            </a:r>
-          </a:p>
-          <a:p>
-            <a:pPr algn="ctr"/>
-            <a:r>
-              <a:rPr sz="1000" b="0">
-                <a:solidFill>
-                  <a:srgbClr val="1F2937"/>
-                </a:solidFill>
-                <a:latin typeface="Calibri"/>
-              </a:rPr>
-              <a:t>HF Inference Providers</a:t>
-            </a:r>
-          </a:p>
-        </p:txBody>
-      </p:sp>
-      <p:sp>
-        <p:nvSpPr>
-          <p:cNvPr id="12" name="Rounded Rectangle 11"/>
-          <p:cNvSpPr/>
-          <p:nvPr/>
-        </p:nvSpPr>
-        <p:spPr>
-          <a:xfrm>
-            <a:off x="3337560" y="4434840"/>
-            <a:ext cx="8275320" cy="777240"/>
-          </a:xfrm>
-          <a:prstGeom prst="roundRect">
-            <a:avLst>
-              <a:gd name="adj" fmla="val 12000"/>
-            </a:avLst>
-          </a:prstGeom>
-          <a:solidFill>
-            <a:srgbClr val="FFFFFF"/>
+            <a:srgbClr val="F3F4F6"/>
           </a:solidFill>
           <a:ln w="19050">
             <a:solidFill>
@@ -8062,104 +8339,35 @@
           <a:p>
             <a:pPr algn="l"/>
             <a:r>
-              <a:rPr sz="1300" b="0">
+              <a:rPr sz="1150" b="1">
                 <a:solidFill>
                   <a:srgbClr val="1F2937"/>
                 </a:solidFill>
                 <a:latin typeface="Calibri"/>
               </a:rPr>
-              <a:t>The router picks a provider (groq, nscale, deepinfra, …) that runs the model</a:t>
-            </a:r>
-          </a:p>
-        </p:txBody>
-      </p:sp>
-      <p:sp>
-        <p:nvSpPr>
-          <p:cNvPr id="13" name="Rounded Rectangle 12"/>
+              <a:t>Cost</a:t>
+            </a:r>
+          </a:p>
+        </p:txBody>
+      </p:sp>
+      <p:sp>
+        <p:nvSpPr>
+          <p:cNvPr id="11" name="Rounded Rectangle 10"/>
           <p:cNvSpPr/>
           <p:nvPr/>
         </p:nvSpPr>
         <p:spPr>
           <a:xfrm>
-            <a:off x="548640" y="5349240"/>
-            <a:ext cx="2651760" cy="777240"/>
+            <a:off x="3291840" y="2606040"/>
+            <a:ext cx="4069080" cy="402336"/>
           </a:xfrm>
           <a:prstGeom prst="roundRect">
             <a:avLst>
-              <a:gd name="adj" fmla="val 12000"/>
+              <a:gd name="adj" fmla="val 8000"/>
             </a:avLst>
           </a:prstGeom>
           <a:solidFill>
-            <a:srgbClr val="FEF3E2"/>
-          </a:solidFill>
-          <a:ln w="19050">
-            <a:solidFill>
-              <a:srgbClr val="B45309"/>
-            </a:solidFill>
-          </a:ln>
-          <a:effectLst/>
-        </p:spPr>
-        <p:style>
-          <a:lnRef idx="1">
-            <a:schemeClr val="accent1"/>
-          </a:lnRef>
-          <a:fillRef idx="3">
-            <a:schemeClr val="accent1"/>
-          </a:fillRef>
-          <a:effectRef idx="2">
-            <a:schemeClr val="accent1"/>
-          </a:effectRef>
-          <a:fontRef idx="minor">
-            <a:schemeClr val="lt1"/>
-          </a:fontRef>
-        </p:style>
-        <p:txBody>
-          <a:bodyPr rtlCol="0" anchor="ctr" wrap="square"/>
-          <a:lstStyle/>
-          <a:p>
-            <a:pPr algn="ctr"/>
-            <a:r>
-              <a:rPr sz="1500" b="1">
-                <a:solidFill>
-                  <a:srgbClr val="B45309"/>
-                </a:solidFill>
-                <a:latin typeface="Calibri"/>
-              </a:rPr>
-              <a:t>Configuration</a:t>
-            </a:r>
-          </a:p>
-          <a:p>
-            <a:pPr algn="ctr"/>
-            <a:r>
-              <a:rPr sz="1000" b="0">
-                <a:solidFill>
-                  <a:srgbClr val="1F2937"/>
-                </a:solidFill>
-                <a:latin typeface="Calibri"/>
-              </a:rPr>
-              <a:t>sidebar · secrets · HF_TOKEN</a:t>
-            </a:r>
-          </a:p>
-        </p:txBody>
-      </p:sp>
-      <p:sp>
-        <p:nvSpPr>
-          <p:cNvPr id="14" name="Rounded Rectangle 13"/>
-          <p:cNvSpPr/>
-          <p:nvPr/>
-        </p:nvSpPr>
-        <p:spPr>
-          <a:xfrm>
-            <a:off x="3337560" y="5349240"/>
-            <a:ext cx="8275320" cy="777240"/>
-          </a:xfrm>
-          <a:prstGeom prst="roundRect">
-            <a:avLst>
-              <a:gd name="adj" fmla="val 12000"/>
-            </a:avLst>
-          </a:prstGeom>
-          <a:solidFill>
-            <a:srgbClr val="FFFFFF"/>
+            <a:srgbClr val="E8F7EE"/>
           </a:solidFill>
           <a:ln w="19050">
             <a:solidFill>
@@ -8188,20 +8396,1274 @@
           <a:p>
             <a:pPr algn="l"/>
             <a:r>
-              <a:rPr sz="1300" b="0">
+              <a:rPr sz="1150" b="0">
                 <a:solidFill>
                   <a:srgbClr val="1F2937"/>
                 </a:solidFill>
                 <a:latin typeface="Calibri"/>
               </a:rPr>
-              <a:t>Supplies the API token; never printed, and secrets.toml is git-ignored</a:t>
-            </a:r>
-          </a:p>
-        </p:txBody>
-      </p:sp>
-      <p:sp>
-        <p:nvSpPr>
-          <p:cNvPr id="15" name="TextBox 14"/>
+              <a:t>Free</a:t>
+            </a:r>
+          </a:p>
+        </p:txBody>
+      </p:sp>
+      <p:sp>
+        <p:nvSpPr>
+          <p:cNvPr id="12" name="Rounded Rectangle 11"/>
+          <p:cNvSpPr/>
+          <p:nvPr/>
+        </p:nvSpPr>
+        <p:spPr>
+          <a:xfrm>
+            <a:off x="7452360" y="2606040"/>
+            <a:ext cx="4206240" cy="402336"/>
+          </a:xfrm>
+          <a:prstGeom prst="roundRect">
+            <a:avLst>
+              <a:gd name="adj" fmla="val 8000"/>
+            </a:avLst>
+          </a:prstGeom>
+          <a:solidFill>
+            <a:srgbClr val="E6F6F4"/>
+          </a:solidFill>
+          <a:ln w="19050">
+            <a:solidFill>
+              <a:srgbClr val="E5E7EB"/>
+            </a:solidFill>
+          </a:ln>
+          <a:effectLst/>
+        </p:spPr>
+        <p:style>
+          <a:lnRef idx="1">
+            <a:schemeClr val="accent1"/>
+          </a:lnRef>
+          <a:fillRef idx="3">
+            <a:schemeClr val="accent1"/>
+          </a:fillRef>
+          <a:effectRef idx="2">
+            <a:schemeClr val="accent1"/>
+          </a:effectRef>
+          <a:fontRef idx="minor">
+            <a:schemeClr val="lt1"/>
+          </a:fontRef>
+        </p:style>
+        <p:txBody>
+          <a:bodyPr rtlCol="0" anchor="ctr" wrap="square"/>
+          <a:lstStyle/>
+          <a:p>
+            <a:pPr algn="l"/>
+            <a:r>
+              <a:rPr sz="1150" b="0">
+                <a:solidFill>
+                  <a:srgbClr val="1F2937"/>
+                </a:solidFill>
+                <a:latin typeface="Calibri"/>
+              </a:rPr>
+              <a:t>Paid per use; small free monthly credits</a:t>
+            </a:r>
+          </a:p>
+        </p:txBody>
+      </p:sp>
+      <p:sp>
+        <p:nvSpPr>
+          <p:cNvPr id="13" name="Rounded Rectangle 12"/>
+          <p:cNvSpPr/>
+          <p:nvPr/>
+        </p:nvSpPr>
+        <p:spPr>
+          <a:xfrm>
+            <a:off x="548640" y="3063240"/>
+            <a:ext cx="2651760" cy="402336"/>
+          </a:xfrm>
+          <a:prstGeom prst="roundRect">
+            <a:avLst>
+              <a:gd name="adj" fmla="val 8000"/>
+            </a:avLst>
+          </a:prstGeom>
+          <a:solidFill>
+            <a:srgbClr val="F3F4F6"/>
+          </a:solidFill>
+          <a:ln w="19050">
+            <a:solidFill>
+              <a:srgbClr val="E5E7EB"/>
+            </a:solidFill>
+          </a:ln>
+          <a:effectLst/>
+        </p:spPr>
+        <p:style>
+          <a:lnRef idx="1">
+            <a:schemeClr val="accent1"/>
+          </a:lnRef>
+          <a:fillRef idx="3">
+            <a:schemeClr val="accent1"/>
+          </a:fillRef>
+          <a:effectRef idx="2">
+            <a:schemeClr val="accent1"/>
+          </a:effectRef>
+          <a:fontRef idx="minor">
+            <a:schemeClr val="lt1"/>
+          </a:fontRef>
+        </p:style>
+        <p:txBody>
+          <a:bodyPr rtlCol="0" anchor="ctr" wrap="square"/>
+          <a:lstStyle/>
+          <a:p>
+            <a:pPr algn="l"/>
+            <a:r>
+              <a:rPr sz="1150" b="1">
+                <a:solidFill>
+                  <a:srgbClr val="1F2937"/>
+                </a:solidFill>
+                <a:latin typeface="Calibri"/>
+              </a:rPr>
+              <a:t>API token</a:t>
+            </a:r>
+          </a:p>
+        </p:txBody>
+      </p:sp>
+      <p:sp>
+        <p:nvSpPr>
+          <p:cNvPr id="14" name="Rounded Rectangle 13"/>
+          <p:cNvSpPr/>
+          <p:nvPr/>
+        </p:nvSpPr>
+        <p:spPr>
+          <a:xfrm>
+            <a:off x="3291840" y="3063240"/>
+            <a:ext cx="4069080" cy="402336"/>
+          </a:xfrm>
+          <a:prstGeom prst="roundRect">
+            <a:avLst>
+              <a:gd name="adj" fmla="val 8000"/>
+            </a:avLst>
+          </a:prstGeom>
+          <a:solidFill>
+            <a:srgbClr val="E8F7EE"/>
+          </a:solidFill>
+          <a:ln w="19050">
+            <a:solidFill>
+              <a:srgbClr val="E5E7EB"/>
+            </a:solidFill>
+          </a:ln>
+          <a:effectLst/>
+        </p:spPr>
+        <p:style>
+          <a:lnRef idx="1">
+            <a:schemeClr val="accent1"/>
+          </a:lnRef>
+          <a:fillRef idx="3">
+            <a:schemeClr val="accent1"/>
+          </a:fillRef>
+          <a:effectRef idx="2">
+            <a:schemeClr val="accent1"/>
+          </a:effectRef>
+          <a:fontRef idx="minor">
+            <a:schemeClr val="lt1"/>
+          </a:fontRef>
+        </p:style>
+        <p:txBody>
+          <a:bodyPr rtlCol="0" anchor="ctr" wrap="square"/>
+          <a:lstStyle/>
+          <a:p>
+            <a:pPr algn="l"/>
+            <a:r>
+              <a:rPr sz="1150" b="0">
+                <a:solidFill>
+                  <a:srgbClr val="1F2937"/>
+                </a:solidFill>
+                <a:latin typeface="Calibri"/>
+              </a:rPr>
+              <a:t>Not needed</a:t>
+            </a:r>
+          </a:p>
+        </p:txBody>
+      </p:sp>
+      <p:sp>
+        <p:nvSpPr>
+          <p:cNvPr id="15" name="Rounded Rectangle 14"/>
+          <p:cNvSpPr/>
+          <p:nvPr/>
+        </p:nvSpPr>
+        <p:spPr>
+          <a:xfrm>
+            <a:off x="7452360" y="3063240"/>
+            <a:ext cx="4206240" cy="402336"/>
+          </a:xfrm>
+          <a:prstGeom prst="roundRect">
+            <a:avLst>
+              <a:gd name="adj" fmla="val 8000"/>
+            </a:avLst>
+          </a:prstGeom>
+          <a:solidFill>
+            <a:srgbClr val="E6F6F4"/>
+          </a:solidFill>
+          <a:ln w="19050">
+            <a:solidFill>
+              <a:srgbClr val="E5E7EB"/>
+            </a:solidFill>
+          </a:ln>
+          <a:effectLst/>
+        </p:spPr>
+        <p:style>
+          <a:lnRef idx="1">
+            <a:schemeClr val="accent1"/>
+          </a:lnRef>
+          <a:fillRef idx="3">
+            <a:schemeClr val="accent1"/>
+          </a:fillRef>
+          <a:effectRef idx="2">
+            <a:schemeClr val="accent1"/>
+          </a:effectRef>
+          <a:fontRef idx="minor">
+            <a:schemeClr val="lt1"/>
+          </a:fontRef>
+        </p:style>
+        <p:txBody>
+          <a:bodyPr rtlCol="0" anchor="ctr" wrap="square"/>
+          <a:lstStyle/>
+          <a:p>
+            <a:pPr algn="l"/>
+            <a:r>
+              <a:rPr sz="1150" b="0">
+                <a:solidFill>
+                  <a:srgbClr val="1F2937"/>
+                </a:solidFill>
+                <a:latin typeface="Calibri"/>
+              </a:rPr>
+              <a:t>Needed: sidebar, secrets.toml or HF_TOKEN</a:t>
+            </a:r>
+          </a:p>
+        </p:txBody>
+      </p:sp>
+      <p:sp>
+        <p:nvSpPr>
+          <p:cNvPr id="16" name="Rounded Rectangle 15"/>
+          <p:cNvSpPr/>
+          <p:nvPr/>
+        </p:nvSpPr>
+        <p:spPr>
+          <a:xfrm>
+            <a:off x="548640" y="3520440"/>
+            <a:ext cx="2651760" cy="402336"/>
+          </a:xfrm>
+          <a:prstGeom prst="roundRect">
+            <a:avLst>
+              <a:gd name="adj" fmla="val 8000"/>
+            </a:avLst>
+          </a:prstGeom>
+          <a:solidFill>
+            <a:srgbClr val="F3F4F6"/>
+          </a:solidFill>
+          <a:ln w="19050">
+            <a:solidFill>
+              <a:srgbClr val="E5E7EB"/>
+            </a:solidFill>
+          </a:ln>
+          <a:effectLst/>
+        </p:spPr>
+        <p:style>
+          <a:lnRef idx="1">
+            <a:schemeClr val="accent1"/>
+          </a:lnRef>
+          <a:fillRef idx="3">
+            <a:schemeClr val="accent1"/>
+          </a:fillRef>
+          <a:effectRef idx="2">
+            <a:schemeClr val="accent1"/>
+          </a:effectRef>
+          <a:fontRef idx="minor">
+            <a:schemeClr val="lt1"/>
+          </a:fontRef>
+        </p:style>
+        <p:txBody>
+          <a:bodyPr rtlCol="0" anchor="ctr" wrap="square"/>
+          <a:lstStyle/>
+          <a:p>
+            <a:pPr algn="l"/>
+            <a:r>
+              <a:rPr sz="1150" b="1">
+                <a:solidFill>
+                  <a:srgbClr val="1F2937"/>
+                </a:solidFill>
+                <a:latin typeface="Calibri"/>
+              </a:rPr>
+              <a:t>Internet</a:t>
+            </a:r>
+          </a:p>
+        </p:txBody>
+      </p:sp>
+      <p:sp>
+        <p:nvSpPr>
+          <p:cNvPr id="17" name="Rounded Rectangle 16"/>
+          <p:cNvSpPr/>
+          <p:nvPr/>
+        </p:nvSpPr>
+        <p:spPr>
+          <a:xfrm>
+            <a:off x="3291840" y="3520440"/>
+            <a:ext cx="4069080" cy="402336"/>
+          </a:xfrm>
+          <a:prstGeom prst="roundRect">
+            <a:avLst>
+              <a:gd name="adj" fmla="val 8000"/>
+            </a:avLst>
+          </a:prstGeom>
+          <a:solidFill>
+            <a:srgbClr val="E8F7EE"/>
+          </a:solidFill>
+          <a:ln w="19050">
+            <a:solidFill>
+              <a:srgbClr val="E5E7EB"/>
+            </a:solidFill>
+          </a:ln>
+          <a:effectLst/>
+        </p:spPr>
+        <p:style>
+          <a:lnRef idx="1">
+            <a:schemeClr val="accent1"/>
+          </a:lnRef>
+          <a:fillRef idx="3">
+            <a:schemeClr val="accent1"/>
+          </a:fillRef>
+          <a:effectRef idx="2">
+            <a:schemeClr val="accent1"/>
+          </a:effectRef>
+          <a:fontRef idx="minor">
+            <a:schemeClr val="lt1"/>
+          </a:fontRef>
+        </p:style>
+        <p:txBody>
+          <a:bodyPr rtlCol="0" anchor="ctr" wrap="square"/>
+          <a:lstStyle/>
+          <a:p>
+            <a:pPr algn="l"/>
+            <a:r>
+              <a:rPr sz="1150" b="0">
+                <a:solidFill>
+                  <a:srgbClr val="1F2937"/>
+                </a:solidFill>
+                <a:latin typeface="Calibri"/>
+              </a:rPr>
+              <a:t>Not needed once the model is downloaded</a:t>
+            </a:r>
+          </a:p>
+        </p:txBody>
+      </p:sp>
+      <p:sp>
+        <p:nvSpPr>
+          <p:cNvPr id="18" name="Rounded Rectangle 17"/>
+          <p:cNvSpPr/>
+          <p:nvPr/>
+        </p:nvSpPr>
+        <p:spPr>
+          <a:xfrm>
+            <a:off x="7452360" y="3520440"/>
+            <a:ext cx="4206240" cy="402336"/>
+          </a:xfrm>
+          <a:prstGeom prst="roundRect">
+            <a:avLst>
+              <a:gd name="adj" fmla="val 8000"/>
+            </a:avLst>
+          </a:prstGeom>
+          <a:solidFill>
+            <a:srgbClr val="E6F6F4"/>
+          </a:solidFill>
+          <a:ln w="19050">
+            <a:solidFill>
+              <a:srgbClr val="E5E7EB"/>
+            </a:solidFill>
+          </a:ln>
+          <a:effectLst/>
+        </p:spPr>
+        <p:style>
+          <a:lnRef idx="1">
+            <a:schemeClr val="accent1"/>
+          </a:lnRef>
+          <a:fillRef idx="3">
+            <a:schemeClr val="accent1"/>
+          </a:fillRef>
+          <a:effectRef idx="2">
+            <a:schemeClr val="accent1"/>
+          </a:effectRef>
+          <a:fontRef idx="minor">
+            <a:schemeClr val="lt1"/>
+          </a:fontRef>
+        </p:style>
+        <p:txBody>
+          <a:bodyPr rtlCol="0" anchor="ctr" wrap="square"/>
+          <a:lstStyle/>
+          <a:p>
+            <a:pPr algn="l"/>
+            <a:r>
+              <a:rPr sz="1150" b="0">
+                <a:solidFill>
+                  <a:srgbClr val="1F2937"/>
+                </a:solidFill>
+                <a:latin typeface="Calibri"/>
+              </a:rPr>
+              <a:t>Needed</a:t>
+            </a:r>
+          </a:p>
+        </p:txBody>
+      </p:sp>
+      <p:sp>
+        <p:nvSpPr>
+          <p:cNvPr id="19" name="Rounded Rectangle 18"/>
+          <p:cNvSpPr/>
+          <p:nvPr/>
+        </p:nvSpPr>
+        <p:spPr>
+          <a:xfrm>
+            <a:off x="548640" y="3977639"/>
+            <a:ext cx="2651760" cy="402336"/>
+          </a:xfrm>
+          <a:prstGeom prst="roundRect">
+            <a:avLst>
+              <a:gd name="adj" fmla="val 8000"/>
+            </a:avLst>
+          </a:prstGeom>
+          <a:solidFill>
+            <a:srgbClr val="F3F4F6"/>
+          </a:solidFill>
+          <a:ln w="19050">
+            <a:solidFill>
+              <a:srgbClr val="E5E7EB"/>
+            </a:solidFill>
+          </a:ln>
+          <a:effectLst/>
+        </p:spPr>
+        <p:style>
+          <a:lnRef idx="1">
+            <a:schemeClr val="accent1"/>
+          </a:lnRef>
+          <a:fillRef idx="3">
+            <a:schemeClr val="accent1"/>
+          </a:fillRef>
+          <a:effectRef idx="2">
+            <a:schemeClr val="accent1"/>
+          </a:effectRef>
+          <a:fontRef idx="minor">
+            <a:schemeClr val="lt1"/>
+          </a:fontRef>
+        </p:style>
+        <p:txBody>
+          <a:bodyPr rtlCol="0" anchor="ctr" wrap="square"/>
+          <a:lstStyle/>
+          <a:p>
+            <a:pPr algn="l"/>
+            <a:r>
+              <a:rPr sz="1150" b="1">
+                <a:solidFill>
+                  <a:srgbClr val="1F2937"/>
+                </a:solidFill>
+                <a:latin typeface="Calibri"/>
+              </a:rPr>
+              <a:t>Privacy</a:t>
+            </a:r>
+          </a:p>
+        </p:txBody>
+      </p:sp>
+      <p:sp>
+        <p:nvSpPr>
+          <p:cNvPr id="20" name="Rounded Rectangle 19"/>
+          <p:cNvSpPr/>
+          <p:nvPr/>
+        </p:nvSpPr>
+        <p:spPr>
+          <a:xfrm>
+            <a:off x="3291840" y="3977639"/>
+            <a:ext cx="4069080" cy="402336"/>
+          </a:xfrm>
+          <a:prstGeom prst="roundRect">
+            <a:avLst>
+              <a:gd name="adj" fmla="val 8000"/>
+            </a:avLst>
+          </a:prstGeom>
+          <a:solidFill>
+            <a:srgbClr val="E8F7EE"/>
+          </a:solidFill>
+          <a:ln w="19050">
+            <a:solidFill>
+              <a:srgbClr val="E5E7EB"/>
+            </a:solidFill>
+          </a:ln>
+          <a:effectLst/>
+        </p:spPr>
+        <p:style>
+          <a:lnRef idx="1">
+            <a:schemeClr val="accent1"/>
+          </a:lnRef>
+          <a:fillRef idx="3">
+            <a:schemeClr val="accent1"/>
+          </a:fillRef>
+          <a:effectRef idx="2">
+            <a:schemeClr val="accent1"/>
+          </a:effectRef>
+          <a:fontRef idx="minor">
+            <a:schemeClr val="lt1"/>
+          </a:fontRef>
+        </p:style>
+        <p:txBody>
+          <a:bodyPr rtlCol="0" anchor="ctr" wrap="square"/>
+          <a:lstStyle/>
+          <a:p>
+            <a:pPr algn="l"/>
+            <a:r>
+              <a:rPr sz="1150" b="0">
+                <a:solidFill>
+                  <a:srgbClr val="1F2937"/>
+                </a:solidFill>
+                <a:latin typeface="Calibri"/>
+              </a:rPr>
+              <a:t>Prompts never leave the computer</a:t>
+            </a:r>
+          </a:p>
+        </p:txBody>
+      </p:sp>
+      <p:sp>
+        <p:nvSpPr>
+          <p:cNvPr id="21" name="Rounded Rectangle 20"/>
+          <p:cNvSpPr/>
+          <p:nvPr/>
+        </p:nvSpPr>
+        <p:spPr>
+          <a:xfrm>
+            <a:off x="7452360" y="3977639"/>
+            <a:ext cx="4206240" cy="402336"/>
+          </a:xfrm>
+          <a:prstGeom prst="roundRect">
+            <a:avLst>
+              <a:gd name="adj" fmla="val 8000"/>
+            </a:avLst>
+          </a:prstGeom>
+          <a:solidFill>
+            <a:srgbClr val="E6F6F4"/>
+          </a:solidFill>
+          <a:ln w="19050">
+            <a:solidFill>
+              <a:srgbClr val="E5E7EB"/>
+            </a:solidFill>
+          </a:ln>
+          <a:effectLst/>
+        </p:spPr>
+        <p:style>
+          <a:lnRef idx="1">
+            <a:schemeClr val="accent1"/>
+          </a:lnRef>
+          <a:fillRef idx="3">
+            <a:schemeClr val="accent1"/>
+          </a:fillRef>
+          <a:effectRef idx="2">
+            <a:schemeClr val="accent1"/>
+          </a:effectRef>
+          <a:fontRef idx="minor">
+            <a:schemeClr val="lt1"/>
+          </a:fontRef>
+        </p:style>
+        <p:txBody>
+          <a:bodyPr rtlCol="0" anchor="ctr" wrap="square"/>
+          <a:lstStyle/>
+          <a:p>
+            <a:pPr algn="l"/>
+            <a:r>
+              <a:rPr sz="1150" b="0">
+                <a:solidFill>
+                  <a:srgbClr val="1F2937"/>
+                </a:solidFill>
+                <a:latin typeface="Calibri"/>
+              </a:rPr>
+              <a:t>Prompts are sent to Hugging Face and a provider</a:t>
+            </a:r>
+          </a:p>
+        </p:txBody>
+      </p:sp>
+      <p:sp>
+        <p:nvSpPr>
+          <p:cNvPr id="22" name="Rounded Rectangle 21"/>
+          <p:cNvSpPr/>
+          <p:nvPr/>
+        </p:nvSpPr>
+        <p:spPr>
+          <a:xfrm>
+            <a:off x="548640" y="4434840"/>
+            <a:ext cx="2651760" cy="402336"/>
+          </a:xfrm>
+          <a:prstGeom prst="roundRect">
+            <a:avLst>
+              <a:gd name="adj" fmla="val 8000"/>
+            </a:avLst>
+          </a:prstGeom>
+          <a:solidFill>
+            <a:srgbClr val="F3F4F6"/>
+          </a:solidFill>
+          <a:ln w="19050">
+            <a:solidFill>
+              <a:srgbClr val="E5E7EB"/>
+            </a:solidFill>
+          </a:ln>
+          <a:effectLst/>
+        </p:spPr>
+        <p:style>
+          <a:lnRef idx="1">
+            <a:schemeClr val="accent1"/>
+          </a:lnRef>
+          <a:fillRef idx="3">
+            <a:schemeClr val="accent1"/>
+          </a:fillRef>
+          <a:effectRef idx="2">
+            <a:schemeClr val="accent1"/>
+          </a:effectRef>
+          <a:fontRef idx="minor">
+            <a:schemeClr val="lt1"/>
+          </a:fontRef>
+        </p:style>
+        <p:txBody>
+          <a:bodyPr rtlCol="0" anchor="ctr" wrap="square"/>
+          <a:lstStyle/>
+          <a:p>
+            <a:pPr algn="l"/>
+            <a:r>
+              <a:rPr sz="1150" b="1">
+                <a:solidFill>
+                  <a:srgbClr val="1F2937"/>
+                </a:solidFill>
+                <a:latin typeface="Calibri"/>
+              </a:rPr>
+              <a:t>Models</a:t>
+            </a:r>
+          </a:p>
+        </p:txBody>
+      </p:sp>
+      <p:sp>
+        <p:nvSpPr>
+          <p:cNvPr id="23" name="Rounded Rectangle 22"/>
+          <p:cNvSpPr/>
+          <p:nvPr/>
+        </p:nvSpPr>
+        <p:spPr>
+          <a:xfrm>
+            <a:off x="3291840" y="4434840"/>
+            <a:ext cx="4069080" cy="402336"/>
+          </a:xfrm>
+          <a:prstGeom prst="roundRect">
+            <a:avLst>
+              <a:gd name="adj" fmla="val 8000"/>
+            </a:avLst>
+          </a:prstGeom>
+          <a:solidFill>
+            <a:srgbClr val="E8F7EE"/>
+          </a:solidFill>
+          <a:ln w="19050">
+            <a:solidFill>
+              <a:srgbClr val="E5E7EB"/>
+            </a:solidFill>
+          </a:ln>
+          <a:effectLst/>
+        </p:spPr>
+        <p:style>
+          <a:lnRef idx="1">
+            <a:schemeClr val="accent1"/>
+          </a:lnRef>
+          <a:fillRef idx="3">
+            <a:schemeClr val="accent1"/>
+          </a:fillRef>
+          <a:effectRef idx="2">
+            <a:schemeClr val="accent1"/>
+          </a:effectRef>
+          <a:fontRef idx="minor">
+            <a:schemeClr val="lt1"/>
+          </a:fontRef>
+        </p:style>
+        <p:txBody>
+          <a:bodyPr rtlCol="0" anchor="ctr" wrap="square"/>
+          <a:lstStyle/>
+          <a:p>
+            <a:pPr algn="l"/>
+            <a:r>
+              <a:rPr sz="1150" b="0">
+                <a:solidFill>
+                  <a:srgbClr val="1F2937"/>
+                </a:solidFill>
+                <a:latin typeface="Calibri"/>
+              </a:rPr>
+              <a:t>Whatever you have downloaded (ollama pull …)</a:t>
+            </a:r>
+          </a:p>
+        </p:txBody>
+      </p:sp>
+      <p:sp>
+        <p:nvSpPr>
+          <p:cNvPr id="24" name="Rounded Rectangle 23"/>
+          <p:cNvSpPr/>
+          <p:nvPr/>
+        </p:nvSpPr>
+        <p:spPr>
+          <a:xfrm>
+            <a:off x="7452360" y="4434840"/>
+            <a:ext cx="4206240" cy="402336"/>
+          </a:xfrm>
+          <a:prstGeom prst="roundRect">
+            <a:avLst>
+              <a:gd name="adj" fmla="val 8000"/>
+            </a:avLst>
+          </a:prstGeom>
+          <a:solidFill>
+            <a:srgbClr val="E6F6F4"/>
+          </a:solidFill>
+          <a:ln w="19050">
+            <a:solidFill>
+              <a:srgbClr val="E5E7EB"/>
+            </a:solidFill>
+          </a:ln>
+          <a:effectLst/>
+        </p:spPr>
+        <p:style>
+          <a:lnRef idx="1">
+            <a:schemeClr val="accent1"/>
+          </a:lnRef>
+          <a:fillRef idx="3">
+            <a:schemeClr val="accent1"/>
+          </a:fillRef>
+          <a:effectRef idx="2">
+            <a:schemeClr val="accent1"/>
+          </a:effectRef>
+          <a:fontRef idx="minor">
+            <a:schemeClr val="lt1"/>
+          </a:fontRef>
+        </p:style>
+        <p:txBody>
+          <a:bodyPr rtlCol="0" anchor="ctr" wrap="square"/>
+          <a:lstStyle/>
+          <a:p>
+            <a:pPr algn="l"/>
+            <a:r>
+              <a:rPr sz="1150" b="0">
+                <a:solidFill>
+                  <a:srgbClr val="1F2937"/>
+                </a:solidFill>
+                <a:latin typeface="Calibri"/>
+              </a:rPr>
+              <a:t>Qwen3 8B, gpt-oss 20B, Llama 3.1 8B, Gemma 3 27B</a:t>
+            </a:r>
+          </a:p>
+        </p:txBody>
+      </p:sp>
+      <p:sp>
+        <p:nvSpPr>
+          <p:cNvPr id="25" name="Rounded Rectangle 24"/>
+          <p:cNvSpPr/>
+          <p:nvPr/>
+        </p:nvSpPr>
+        <p:spPr>
+          <a:xfrm>
+            <a:off x="548640" y="4892040"/>
+            <a:ext cx="2651760" cy="402336"/>
+          </a:xfrm>
+          <a:prstGeom prst="roundRect">
+            <a:avLst>
+              <a:gd name="adj" fmla="val 8000"/>
+            </a:avLst>
+          </a:prstGeom>
+          <a:solidFill>
+            <a:srgbClr val="F3F4F6"/>
+          </a:solidFill>
+          <a:ln w="19050">
+            <a:solidFill>
+              <a:srgbClr val="E5E7EB"/>
+            </a:solidFill>
+          </a:ln>
+          <a:effectLst/>
+        </p:spPr>
+        <p:style>
+          <a:lnRef idx="1">
+            <a:schemeClr val="accent1"/>
+          </a:lnRef>
+          <a:fillRef idx="3">
+            <a:schemeClr val="accent1"/>
+          </a:fillRef>
+          <a:effectRef idx="2">
+            <a:schemeClr val="accent1"/>
+          </a:effectRef>
+          <a:fontRef idx="minor">
+            <a:schemeClr val="lt1"/>
+          </a:fontRef>
+        </p:style>
+        <p:txBody>
+          <a:bodyPr rtlCol="0" anchor="ctr" wrap="square"/>
+          <a:lstStyle/>
+          <a:p>
+            <a:pPr algn="l"/>
+            <a:r>
+              <a:rPr sz="1150" b="1">
+                <a:solidFill>
+                  <a:srgbClr val="1F2937"/>
+                </a:solidFill>
+                <a:latin typeface="Calibri"/>
+              </a:rPr>
+              <a:t>Size and speed</a:t>
+            </a:r>
+          </a:p>
+        </p:txBody>
+      </p:sp>
+      <p:sp>
+        <p:nvSpPr>
+          <p:cNvPr id="26" name="Rounded Rectangle 25"/>
+          <p:cNvSpPr/>
+          <p:nvPr/>
+        </p:nvSpPr>
+        <p:spPr>
+          <a:xfrm>
+            <a:off x="3291840" y="4892040"/>
+            <a:ext cx="4069080" cy="402336"/>
+          </a:xfrm>
+          <a:prstGeom prst="roundRect">
+            <a:avLst>
+              <a:gd name="adj" fmla="val 8000"/>
+            </a:avLst>
+          </a:prstGeom>
+          <a:solidFill>
+            <a:srgbClr val="E8F7EE"/>
+          </a:solidFill>
+          <a:ln w="19050">
+            <a:solidFill>
+              <a:srgbClr val="E5E7EB"/>
+            </a:solidFill>
+          </a:ln>
+          <a:effectLst/>
+        </p:spPr>
+        <p:style>
+          <a:lnRef idx="1">
+            <a:schemeClr val="accent1"/>
+          </a:lnRef>
+          <a:fillRef idx="3">
+            <a:schemeClr val="accent1"/>
+          </a:fillRef>
+          <a:effectRef idx="2">
+            <a:schemeClr val="accent1"/>
+          </a:effectRef>
+          <a:fontRef idx="minor">
+            <a:schemeClr val="lt1"/>
+          </a:fontRef>
+        </p:style>
+        <p:txBody>
+          <a:bodyPr rtlCol="0" anchor="ctr" wrap="square"/>
+          <a:lstStyle/>
+          <a:p>
+            <a:pPr algn="l"/>
+            <a:r>
+              <a:rPr sz="1150" b="0">
+                <a:solidFill>
+                  <a:srgbClr val="1F2937"/>
+                </a:solidFill>
+                <a:latin typeface="Calibri"/>
+              </a:rPr>
+              <a:t>Limited by this computer's memory</a:t>
+            </a:r>
+          </a:p>
+        </p:txBody>
+      </p:sp>
+      <p:sp>
+        <p:nvSpPr>
+          <p:cNvPr id="27" name="Rounded Rectangle 26"/>
+          <p:cNvSpPr/>
+          <p:nvPr/>
+        </p:nvSpPr>
+        <p:spPr>
+          <a:xfrm>
+            <a:off x="7452360" y="4892040"/>
+            <a:ext cx="4206240" cy="402336"/>
+          </a:xfrm>
+          <a:prstGeom prst="roundRect">
+            <a:avLst>
+              <a:gd name="adj" fmla="val 8000"/>
+            </a:avLst>
+          </a:prstGeom>
+          <a:solidFill>
+            <a:srgbClr val="E6F6F4"/>
+          </a:solidFill>
+          <a:ln w="19050">
+            <a:solidFill>
+              <a:srgbClr val="E5E7EB"/>
+            </a:solidFill>
+          </a:ln>
+          <a:effectLst/>
+        </p:spPr>
+        <p:style>
+          <a:lnRef idx="1">
+            <a:schemeClr val="accent1"/>
+          </a:lnRef>
+          <a:fillRef idx="3">
+            <a:schemeClr val="accent1"/>
+          </a:fillRef>
+          <a:effectRef idx="2">
+            <a:schemeClr val="accent1"/>
+          </a:effectRef>
+          <a:fontRef idx="minor">
+            <a:schemeClr val="lt1"/>
+          </a:fontRef>
+        </p:style>
+        <p:txBody>
+          <a:bodyPr rtlCol="0" anchor="ctr" wrap="square"/>
+          <a:lstStyle/>
+          <a:p>
+            <a:pPr algn="l"/>
+            <a:r>
+              <a:rPr sz="1150" b="0">
+                <a:solidFill>
+                  <a:srgbClr val="1F2937"/>
+                </a:solidFill>
+                <a:latin typeface="Calibri"/>
+              </a:rPr>
+              <a:t>Large models, fast hardware</a:t>
+            </a:r>
+          </a:p>
+        </p:txBody>
+      </p:sp>
+      <p:sp>
+        <p:nvSpPr>
+          <p:cNvPr id="28" name="Rounded Rectangle 27"/>
+          <p:cNvSpPr/>
+          <p:nvPr/>
+        </p:nvSpPr>
+        <p:spPr>
+          <a:xfrm>
+            <a:off x="548640" y="5349240"/>
+            <a:ext cx="2651760" cy="402336"/>
+          </a:xfrm>
+          <a:prstGeom prst="roundRect">
+            <a:avLst>
+              <a:gd name="adj" fmla="val 8000"/>
+            </a:avLst>
+          </a:prstGeom>
+          <a:solidFill>
+            <a:srgbClr val="F3F4F6"/>
+          </a:solidFill>
+          <a:ln w="19050">
+            <a:solidFill>
+              <a:srgbClr val="E5E7EB"/>
+            </a:solidFill>
+          </a:ln>
+          <a:effectLst/>
+        </p:spPr>
+        <p:style>
+          <a:lnRef idx="1">
+            <a:schemeClr val="accent1"/>
+          </a:lnRef>
+          <a:fillRef idx="3">
+            <a:schemeClr val="accent1"/>
+          </a:fillRef>
+          <a:effectRef idx="2">
+            <a:schemeClr val="accent1"/>
+          </a:effectRef>
+          <a:fontRef idx="minor">
+            <a:schemeClr val="lt1"/>
+          </a:fontRef>
+        </p:style>
+        <p:txBody>
+          <a:bodyPr rtlCol="0" anchor="ctr" wrap="square"/>
+          <a:lstStyle/>
+          <a:p>
+            <a:pPr algn="l"/>
+            <a:r>
+              <a:rPr sz="1150" b="1">
+                <a:solidFill>
+                  <a:srgbClr val="1F2937"/>
+                </a:solidFill>
+                <a:latin typeface="Calibri"/>
+              </a:rPr>
+              <a:t>Setup</a:t>
+            </a:r>
+          </a:p>
+        </p:txBody>
+      </p:sp>
+      <p:sp>
+        <p:nvSpPr>
+          <p:cNvPr id="29" name="Rounded Rectangle 28"/>
+          <p:cNvSpPr/>
+          <p:nvPr/>
+        </p:nvSpPr>
+        <p:spPr>
+          <a:xfrm>
+            <a:off x="3291840" y="5349240"/>
+            <a:ext cx="4069080" cy="402336"/>
+          </a:xfrm>
+          <a:prstGeom prst="roundRect">
+            <a:avLst>
+              <a:gd name="adj" fmla="val 8000"/>
+            </a:avLst>
+          </a:prstGeom>
+          <a:solidFill>
+            <a:srgbClr val="E8F7EE"/>
+          </a:solidFill>
+          <a:ln w="19050">
+            <a:solidFill>
+              <a:srgbClr val="E5E7EB"/>
+            </a:solidFill>
+          </a:ln>
+          <a:effectLst/>
+        </p:spPr>
+        <p:style>
+          <a:lnRef idx="1">
+            <a:schemeClr val="accent1"/>
+          </a:lnRef>
+          <a:fillRef idx="3">
+            <a:schemeClr val="accent1"/>
+          </a:fillRef>
+          <a:effectRef idx="2">
+            <a:schemeClr val="accent1"/>
+          </a:effectRef>
+          <a:fontRef idx="minor">
+            <a:schemeClr val="lt1"/>
+          </a:fontRef>
+        </p:style>
+        <p:txBody>
+          <a:bodyPr rtlCol="0" anchor="ctr" wrap="square"/>
+          <a:lstStyle/>
+          <a:p>
+            <a:pPr algn="l"/>
+            <a:r>
+              <a:rPr sz="1150" b="0">
+                <a:solidFill>
+                  <a:srgbClr val="1F2937"/>
+                </a:solidFill>
+                <a:latin typeface="Calibri"/>
+              </a:rPr>
+              <a:t>Install Ollama, download a model</a:t>
+            </a:r>
+          </a:p>
+        </p:txBody>
+      </p:sp>
+      <p:sp>
+        <p:nvSpPr>
+          <p:cNvPr id="30" name="Rounded Rectangle 29"/>
+          <p:cNvSpPr/>
+          <p:nvPr/>
+        </p:nvSpPr>
+        <p:spPr>
+          <a:xfrm>
+            <a:off x="7452360" y="5349240"/>
+            <a:ext cx="4206240" cy="402336"/>
+          </a:xfrm>
+          <a:prstGeom prst="roundRect">
+            <a:avLst>
+              <a:gd name="adj" fmla="val 8000"/>
+            </a:avLst>
+          </a:prstGeom>
+          <a:solidFill>
+            <a:srgbClr val="E6F6F4"/>
+          </a:solidFill>
+          <a:ln w="19050">
+            <a:solidFill>
+              <a:srgbClr val="E5E7EB"/>
+            </a:solidFill>
+          </a:ln>
+          <a:effectLst/>
+        </p:spPr>
+        <p:style>
+          <a:lnRef idx="1">
+            <a:schemeClr val="accent1"/>
+          </a:lnRef>
+          <a:fillRef idx="3">
+            <a:schemeClr val="accent1"/>
+          </a:fillRef>
+          <a:effectRef idx="2">
+            <a:schemeClr val="accent1"/>
+          </a:effectRef>
+          <a:fontRef idx="minor">
+            <a:schemeClr val="lt1"/>
+          </a:fontRef>
+        </p:style>
+        <p:txBody>
+          <a:bodyPr rtlCol="0" anchor="ctr" wrap="square"/>
+          <a:lstStyle/>
+          <a:p>
+            <a:pPr algn="l"/>
+            <a:r>
+              <a:rPr sz="1150" b="0">
+                <a:solidFill>
+                  <a:srgbClr val="1F2937"/>
+                </a:solidFill>
+                <a:latin typeface="Calibri"/>
+              </a:rPr>
+              <a:t>Account, token, licence for gated models</a:t>
+            </a:r>
+          </a:p>
+        </p:txBody>
+      </p:sp>
+      <p:sp>
+        <p:nvSpPr>
+          <p:cNvPr id="31" name="Rounded Rectangle 30"/>
+          <p:cNvSpPr/>
+          <p:nvPr/>
+        </p:nvSpPr>
+        <p:spPr>
+          <a:xfrm>
+            <a:off x="548640" y="5806440"/>
+            <a:ext cx="2651760" cy="402336"/>
+          </a:xfrm>
+          <a:prstGeom prst="roundRect">
+            <a:avLst>
+              <a:gd name="adj" fmla="val 8000"/>
+            </a:avLst>
+          </a:prstGeom>
+          <a:solidFill>
+            <a:srgbClr val="F3F4F6"/>
+          </a:solidFill>
+          <a:ln w="19050">
+            <a:solidFill>
+              <a:srgbClr val="E5E7EB"/>
+            </a:solidFill>
+          </a:ln>
+          <a:effectLst/>
+        </p:spPr>
+        <p:style>
+          <a:lnRef idx="1">
+            <a:schemeClr val="accent1"/>
+          </a:lnRef>
+          <a:fillRef idx="3">
+            <a:schemeClr val="accent1"/>
+          </a:fillRef>
+          <a:effectRef idx="2">
+            <a:schemeClr val="accent1"/>
+          </a:effectRef>
+          <a:fontRef idx="minor">
+            <a:schemeClr val="lt1"/>
+          </a:fontRef>
+        </p:style>
+        <p:txBody>
+          <a:bodyPr rtlCol="0" anchor="ctr" wrap="square"/>
+          <a:lstStyle/>
+          <a:p>
+            <a:pPr algn="l"/>
+            <a:r>
+              <a:rPr sz="1150" b="1">
+                <a:solidFill>
+                  <a:srgbClr val="1F2937"/>
+                </a:solidFill>
+                <a:latin typeface="Calibri"/>
+              </a:rPr>
+              <a:t>LangChain class</a:t>
+            </a:r>
+          </a:p>
+        </p:txBody>
+      </p:sp>
+      <p:sp>
+        <p:nvSpPr>
+          <p:cNvPr id="32" name="Rounded Rectangle 31"/>
+          <p:cNvSpPr/>
+          <p:nvPr/>
+        </p:nvSpPr>
+        <p:spPr>
+          <a:xfrm>
+            <a:off x="3291840" y="5806440"/>
+            <a:ext cx="4069080" cy="402336"/>
+          </a:xfrm>
+          <a:prstGeom prst="roundRect">
+            <a:avLst>
+              <a:gd name="adj" fmla="val 8000"/>
+            </a:avLst>
+          </a:prstGeom>
+          <a:solidFill>
+            <a:srgbClr val="E8F7EE"/>
+          </a:solidFill>
+          <a:ln w="19050">
+            <a:solidFill>
+              <a:srgbClr val="E5E7EB"/>
+            </a:solidFill>
+          </a:ln>
+          <a:effectLst/>
+        </p:spPr>
+        <p:style>
+          <a:lnRef idx="1">
+            <a:schemeClr val="accent1"/>
+          </a:lnRef>
+          <a:fillRef idx="3">
+            <a:schemeClr val="accent1"/>
+          </a:fillRef>
+          <a:effectRef idx="2">
+            <a:schemeClr val="accent1"/>
+          </a:effectRef>
+          <a:fontRef idx="minor">
+            <a:schemeClr val="lt1"/>
+          </a:fontRef>
+        </p:style>
+        <p:txBody>
+          <a:bodyPr rtlCol="0" anchor="ctr" wrap="square"/>
+          <a:lstStyle/>
+          <a:p>
+            <a:pPr algn="l"/>
+            <a:r>
+              <a:rPr sz="1150" b="0">
+                <a:solidFill>
+                  <a:srgbClr val="1F2937"/>
+                </a:solidFill>
+                <a:latin typeface="Calibri"/>
+              </a:rPr>
+              <a:t>ChatOllama (langchain-ollama)</a:t>
+            </a:r>
+          </a:p>
+        </p:txBody>
+      </p:sp>
+      <p:sp>
+        <p:nvSpPr>
+          <p:cNvPr id="33" name="Rounded Rectangle 32"/>
+          <p:cNvSpPr/>
+          <p:nvPr/>
+        </p:nvSpPr>
+        <p:spPr>
+          <a:xfrm>
+            <a:off x="7452360" y="5806440"/>
+            <a:ext cx="4206240" cy="402336"/>
+          </a:xfrm>
+          <a:prstGeom prst="roundRect">
+            <a:avLst>
+              <a:gd name="adj" fmla="val 8000"/>
+            </a:avLst>
+          </a:prstGeom>
+          <a:solidFill>
+            <a:srgbClr val="E6F6F4"/>
+          </a:solidFill>
+          <a:ln w="19050">
+            <a:solidFill>
+              <a:srgbClr val="E5E7EB"/>
+            </a:solidFill>
+          </a:ln>
+          <a:effectLst/>
+        </p:spPr>
+        <p:style>
+          <a:lnRef idx="1">
+            <a:schemeClr val="accent1"/>
+          </a:lnRef>
+          <a:fillRef idx="3">
+            <a:schemeClr val="accent1"/>
+          </a:fillRef>
+          <a:effectRef idx="2">
+            <a:schemeClr val="accent1"/>
+          </a:effectRef>
+          <a:fontRef idx="minor">
+            <a:schemeClr val="lt1"/>
+          </a:fontRef>
+        </p:style>
+        <p:txBody>
+          <a:bodyPr rtlCol="0" anchor="ctr" wrap="square"/>
+          <a:lstStyle/>
+          <a:p>
+            <a:pPr algn="l"/>
+            <a:r>
+              <a:rPr sz="1150" b="0">
+                <a:solidFill>
+                  <a:srgbClr val="1F2937"/>
+                </a:solidFill>
+                <a:latin typeface="Calibri"/>
+              </a:rPr>
+              <a:t>ChatHuggingFace (langchain-huggingface)</a:t>
+            </a:r>
+          </a:p>
+        </p:txBody>
+      </p:sp>
+      <p:sp>
+        <p:nvSpPr>
+          <p:cNvPr id="34" name="TextBox 33"/>
           <p:cNvSpPr txBox="1"/>
           <p:nvPr/>
         </p:nvSpPr>
@@ -8236,14 +9698,14 @@
       </p:sp>
       <p:sp>
         <p:nvSpPr>
-          <p:cNvPr id="16" name="TextBox 15"/>
+          <p:cNvPr id="35" name="TextBox 34"/>
           <p:cNvSpPr txBox="1"/>
           <p:nvPr/>
         </p:nvSpPr>
         <p:spPr>
           <a:xfrm>
-            <a:off x="10972800" y="6446520"/>
-            <a:ext cx="731520" cy="274320"/>
+            <a:off x="10881360" y="6446520"/>
+            <a:ext cx="822960" cy="274320"/>
           </a:xfrm>
           <a:prstGeom prst="rect">
             <a:avLst/>
@@ -8264,7 +9726,7 @@
                 </a:solidFill>
                 <a:latin typeface="Calibri"/>
               </a:rPr>
-              <a:t>4</a:t>
+              <a:t>4 / 6</a:t>
             </a:r>
           </a:p>
         </p:txBody>
@@ -8317,7 +9779,7 @@
                 </a:solidFill>
                 <a:latin typeface="Calibri"/>
               </a:rPr>
-              <a:t>Configuration and error handling</a:t>
+              <a:t>Components and responsibilities</a:t>
             </a:r>
           </a:p>
         </p:txBody>
@@ -8352,7 +9814,838 @@
                 </a:solidFill>
                 <a:latin typeface="Calibri"/>
               </a:rPr>
-              <a:t>Where the token comes from, and what each failure means</a:t>
+              <a:t>Each layer has one job and depends only on the layer below</a:t>
+            </a:r>
+          </a:p>
+        </p:txBody>
+      </p:sp>
+      <p:sp>
+        <p:nvSpPr>
+          <p:cNvPr id="4" name="Rectangle 3"/>
+          <p:cNvSpPr/>
+          <p:nvPr/>
+        </p:nvSpPr>
+        <p:spPr>
+          <a:xfrm>
+            <a:off x="548640" y="1371600"/>
+            <a:ext cx="1097280" cy="54864"/>
+          </a:xfrm>
+          <a:prstGeom prst="rect">
+            <a:avLst/>
+          </a:prstGeom>
+          <a:solidFill>
+            <a:srgbClr val="2563EB"/>
+          </a:solidFill>
+          <a:ln>
+            <a:noFill/>
+          </a:ln>
+        </p:spPr>
+        <p:style>
+          <a:lnRef idx="1">
+            <a:schemeClr val="accent1"/>
+          </a:lnRef>
+          <a:fillRef idx="3">
+            <a:schemeClr val="accent1"/>
+          </a:fillRef>
+          <a:effectRef idx="2">
+            <a:schemeClr val="accent1"/>
+          </a:effectRef>
+          <a:fontRef idx="minor">
+            <a:schemeClr val="lt1"/>
+          </a:fontRef>
+        </p:style>
+        <p:txBody>
+          <a:bodyPr rtlCol="0" anchor="ctr"/>
+          <a:lstStyle/>
+          <a:p>
+            <a:pPr algn="ctr"/>
+          </a:p>
+        </p:txBody>
+      </p:sp>
+      <p:sp>
+        <p:nvSpPr>
+          <p:cNvPr id="5" name="Rounded Rectangle 4"/>
+          <p:cNvSpPr/>
+          <p:nvPr/>
+        </p:nvSpPr>
+        <p:spPr>
+          <a:xfrm>
+            <a:off x="548640" y="1691640"/>
+            <a:ext cx="3017520" cy="777240"/>
+          </a:xfrm>
+          <a:prstGeom prst="roundRect">
+            <a:avLst>
+              <a:gd name="adj" fmla="val 12000"/>
+            </a:avLst>
+          </a:prstGeom>
+          <a:solidFill>
+            <a:srgbClr val="E8F0FE"/>
+          </a:solidFill>
+          <a:ln w="19050">
+            <a:solidFill>
+              <a:srgbClr val="2563EB"/>
+            </a:solidFill>
+          </a:ln>
+          <a:effectLst/>
+        </p:spPr>
+        <p:style>
+          <a:lnRef idx="1">
+            <a:schemeClr val="accent1"/>
+          </a:lnRef>
+          <a:fillRef idx="3">
+            <a:schemeClr val="accent1"/>
+          </a:fillRef>
+          <a:effectRef idx="2">
+            <a:schemeClr val="accent1"/>
+          </a:effectRef>
+          <a:fontRef idx="minor">
+            <a:schemeClr val="lt1"/>
+          </a:fontRef>
+        </p:style>
+        <p:txBody>
+          <a:bodyPr rtlCol="0" anchor="ctr" wrap="square"/>
+          <a:lstStyle/>
+          <a:p>
+            <a:pPr algn="ctr"/>
+            <a:r>
+              <a:rPr sz="1500" b="1">
+                <a:solidFill>
+                  <a:srgbClr val="2563EB"/>
+                </a:solidFill>
+                <a:latin typeface="Calibri"/>
+              </a:rPr>
+              <a:t>Presentation</a:t>
+            </a:r>
+          </a:p>
+          <a:p>
+            <a:pPr algn="ctr"/>
+            <a:r>
+              <a:rPr sz="1000" b="0">
+                <a:solidFill>
+                  <a:srgbClr val="1F2937"/>
+                </a:solidFill>
+                <a:latin typeface="Calibri"/>
+              </a:rPr>
+              <a:t>Streamlit 1.66</a:t>
+            </a:r>
+          </a:p>
+        </p:txBody>
+      </p:sp>
+      <p:sp>
+        <p:nvSpPr>
+          <p:cNvPr id="6" name="Rounded Rectangle 5"/>
+          <p:cNvSpPr/>
+          <p:nvPr/>
+        </p:nvSpPr>
+        <p:spPr>
+          <a:xfrm>
+            <a:off x="3703320" y="1691640"/>
+            <a:ext cx="7909560" cy="777240"/>
+          </a:xfrm>
+          <a:prstGeom prst="roundRect">
+            <a:avLst>
+              <a:gd name="adj" fmla="val 12000"/>
+            </a:avLst>
+          </a:prstGeom>
+          <a:solidFill>
+            <a:srgbClr val="FFFFFF"/>
+          </a:solidFill>
+          <a:ln w="19050">
+            <a:solidFill>
+              <a:srgbClr val="E5E7EB"/>
+            </a:solidFill>
+          </a:ln>
+          <a:effectLst/>
+        </p:spPr>
+        <p:style>
+          <a:lnRef idx="1">
+            <a:schemeClr val="accent1"/>
+          </a:lnRef>
+          <a:fillRef idx="3">
+            <a:schemeClr val="accent1"/>
+          </a:fillRef>
+          <a:effectRef idx="2">
+            <a:schemeClr val="accent1"/>
+          </a:effectRef>
+          <a:fontRef idx="minor">
+            <a:schemeClr val="lt1"/>
+          </a:fontRef>
+        </p:style>
+        <p:txBody>
+          <a:bodyPr rtlCol="0" anchor="ctr" wrap="square"/>
+          <a:lstStyle/>
+          <a:p>
+            <a:pPr algn="l"/>
+            <a:r>
+              <a:rPr sz="1300" b="0">
+                <a:solidFill>
+                  <a:srgbClr val="1F2937"/>
+                </a:solidFill>
+                <a:latin typeface="Calibri"/>
+              </a:rPr>
+              <a:t>Web page from app.py: model-source switch, sliders, prompt; streams the answer live</a:t>
+            </a:r>
+          </a:p>
+        </p:txBody>
+      </p:sp>
+      <p:sp>
+        <p:nvSpPr>
+          <p:cNvPr id="7" name="Rounded Rectangle 6"/>
+          <p:cNvSpPr/>
+          <p:nvPr/>
+        </p:nvSpPr>
+        <p:spPr>
+          <a:xfrm>
+            <a:off x="548640" y="2606040"/>
+            <a:ext cx="3017520" cy="777240"/>
+          </a:xfrm>
+          <a:prstGeom prst="roundRect">
+            <a:avLst>
+              <a:gd name="adj" fmla="val 12000"/>
+            </a:avLst>
+          </a:prstGeom>
+          <a:solidFill>
+            <a:srgbClr val="F1EAFE"/>
+          </a:solidFill>
+          <a:ln w="19050">
+            <a:solidFill>
+              <a:srgbClr val="7C3AED"/>
+            </a:solidFill>
+          </a:ln>
+          <a:effectLst/>
+        </p:spPr>
+        <p:style>
+          <a:lnRef idx="1">
+            <a:schemeClr val="accent1"/>
+          </a:lnRef>
+          <a:fillRef idx="3">
+            <a:schemeClr val="accent1"/>
+          </a:fillRef>
+          <a:effectRef idx="2">
+            <a:schemeClr val="accent1"/>
+          </a:effectRef>
+          <a:fontRef idx="minor">
+            <a:schemeClr val="lt1"/>
+          </a:fontRef>
+        </p:style>
+        <p:txBody>
+          <a:bodyPr rtlCol="0" anchor="ctr" wrap="square"/>
+          <a:lstStyle/>
+          <a:p>
+            <a:pPr algn="ctr"/>
+            <a:r>
+              <a:rPr sz="1500" b="1">
+                <a:solidFill>
+                  <a:srgbClr val="7C3AED"/>
+                </a:solidFill>
+                <a:latin typeface="Calibri"/>
+              </a:rPr>
+              <a:t>Orchestration</a:t>
+            </a:r>
+          </a:p>
+          <a:p>
+            <a:pPr algn="ctr"/>
+            <a:r>
+              <a:rPr sz="1000" b="0">
+                <a:solidFill>
+                  <a:srgbClr val="1F2937"/>
+                </a:solidFill>
+                <a:latin typeface="Calibri"/>
+              </a:rPr>
+              <a:t>langchain-core 1.7</a:t>
+            </a:r>
+          </a:p>
+        </p:txBody>
+      </p:sp>
+      <p:sp>
+        <p:nvSpPr>
+          <p:cNvPr id="8" name="Rounded Rectangle 7"/>
+          <p:cNvSpPr/>
+          <p:nvPr/>
+        </p:nvSpPr>
+        <p:spPr>
+          <a:xfrm>
+            <a:off x="3703320" y="2606040"/>
+            <a:ext cx="7909560" cy="777240"/>
+          </a:xfrm>
+          <a:prstGeom prst="roundRect">
+            <a:avLst>
+              <a:gd name="adj" fmla="val 12000"/>
+            </a:avLst>
+          </a:prstGeom>
+          <a:solidFill>
+            <a:srgbClr val="FFFFFF"/>
+          </a:solidFill>
+          <a:ln w="19050">
+            <a:solidFill>
+              <a:srgbClr val="E5E7EB"/>
+            </a:solidFill>
+          </a:ln>
+          <a:effectLst/>
+        </p:spPr>
+        <p:style>
+          <a:lnRef idx="1">
+            <a:schemeClr val="accent1"/>
+          </a:lnRef>
+          <a:fillRef idx="3">
+            <a:schemeClr val="accent1"/>
+          </a:fillRef>
+          <a:effectRef idx="2">
+            <a:schemeClr val="accent1"/>
+          </a:effectRef>
+          <a:fontRef idx="minor">
+            <a:schemeClr val="lt1"/>
+          </a:fontRef>
+        </p:style>
+        <p:txBody>
+          <a:bodyPr rtlCol="0" anchor="ctr" wrap="square"/>
+          <a:lstStyle/>
+          <a:p>
+            <a:pPr algn="l"/>
+            <a:r>
+              <a:rPr sz="1300" b="0">
+                <a:solidFill>
+                  <a:srgbClr val="1F2937"/>
+                </a:solidFill>
+                <a:latin typeface="Calibri"/>
+              </a:rPr>
+              <a:t>ChatPromptTemplate | chat model | StrOutputParser: the same chain for both sources</a:t>
+            </a:r>
+          </a:p>
+        </p:txBody>
+      </p:sp>
+      <p:sp>
+        <p:nvSpPr>
+          <p:cNvPr id="9" name="Rounded Rectangle 8"/>
+          <p:cNvSpPr/>
+          <p:nvPr/>
+        </p:nvSpPr>
+        <p:spPr>
+          <a:xfrm>
+            <a:off x="548640" y="3520440"/>
+            <a:ext cx="3017520" cy="777240"/>
+          </a:xfrm>
+          <a:prstGeom prst="roundRect">
+            <a:avLst>
+              <a:gd name="adj" fmla="val 12000"/>
+            </a:avLst>
+          </a:prstGeom>
+          <a:solidFill>
+            <a:srgbClr val="FFFFFF"/>
+          </a:solidFill>
+          <a:ln w="19050">
+            <a:solidFill>
+              <a:srgbClr val="7C3AED"/>
+            </a:solidFill>
+          </a:ln>
+          <a:effectLst/>
+        </p:spPr>
+        <p:style>
+          <a:lnRef idx="1">
+            <a:schemeClr val="accent1"/>
+          </a:lnRef>
+          <a:fillRef idx="3">
+            <a:schemeClr val="accent1"/>
+          </a:fillRef>
+          <a:effectRef idx="2">
+            <a:schemeClr val="accent1"/>
+          </a:effectRef>
+          <a:fontRef idx="minor">
+            <a:schemeClr val="lt1"/>
+          </a:fontRef>
+        </p:style>
+        <p:txBody>
+          <a:bodyPr rtlCol="0" anchor="ctr" wrap="square"/>
+          <a:lstStyle/>
+          <a:p>
+            <a:pPr algn="ctr"/>
+            <a:r>
+              <a:rPr sz="1500" b="1">
+                <a:solidFill>
+                  <a:srgbClr val="7C3AED"/>
+                </a:solidFill>
+                <a:latin typeface="Calibri"/>
+              </a:rPr>
+              <a:t>Model integration</a:t>
+            </a:r>
+          </a:p>
+          <a:p>
+            <a:pPr algn="ctr"/>
+            <a:r>
+              <a:rPr sz="1000" b="0">
+                <a:solidFill>
+                  <a:srgbClr val="1F2937"/>
+                </a:solidFill>
+                <a:latin typeface="Calibri"/>
+              </a:rPr>
+              <a:t>langchain-ollama · langchain-huggingface</a:t>
+            </a:r>
+          </a:p>
+        </p:txBody>
+      </p:sp>
+      <p:sp>
+        <p:nvSpPr>
+          <p:cNvPr id="10" name="Rounded Rectangle 9"/>
+          <p:cNvSpPr/>
+          <p:nvPr/>
+        </p:nvSpPr>
+        <p:spPr>
+          <a:xfrm>
+            <a:off x="3703320" y="3520440"/>
+            <a:ext cx="7909560" cy="777240"/>
+          </a:xfrm>
+          <a:prstGeom prst="roundRect">
+            <a:avLst>
+              <a:gd name="adj" fmla="val 12000"/>
+            </a:avLst>
+          </a:prstGeom>
+          <a:solidFill>
+            <a:srgbClr val="FFFFFF"/>
+          </a:solidFill>
+          <a:ln w="19050">
+            <a:solidFill>
+              <a:srgbClr val="E5E7EB"/>
+            </a:solidFill>
+          </a:ln>
+          <a:effectLst/>
+        </p:spPr>
+        <p:style>
+          <a:lnRef idx="1">
+            <a:schemeClr val="accent1"/>
+          </a:lnRef>
+          <a:fillRef idx="3">
+            <a:schemeClr val="accent1"/>
+          </a:fillRef>
+          <a:effectRef idx="2">
+            <a:schemeClr val="accent1"/>
+          </a:effectRef>
+          <a:fontRef idx="minor">
+            <a:schemeClr val="lt1"/>
+          </a:fontRef>
+        </p:style>
+        <p:txBody>
+          <a:bodyPr rtlCol="0" anchor="ctr" wrap="square"/>
+          <a:lstStyle/>
+          <a:p>
+            <a:pPr algn="l"/>
+            <a:r>
+              <a:rPr sz="1300" b="0">
+                <a:solidFill>
+                  <a:srgbClr val="1F2937"/>
+                </a:solidFill>
+                <a:latin typeface="Calibri"/>
+              </a:rPr>
+              <a:t>ChatOllama (local) or ChatHuggingFace (hosted); max tokens and temperature for either</a:t>
+            </a:r>
+          </a:p>
+        </p:txBody>
+      </p:sp>
+      <p:sp>
+        <p:nvSpPr>
+          <p:cNvPr id="11" name="Rounded Rectangle 10"/>
+          <p:cNvSpPr/>
+          <p:nvPr/>
+        </p:nvSpPr>
+        <p:spPr>
+          <a:xfrm>
+            <a:off x="548640" y="4434840"/>
+            <a:ext cx="3017520" cy="777240"/>
+          </a:xfrm>
+          <a:prstGeom prst="roundRect">
+            <a:avLst>
+              <a:gd name="adj" fmla="val 12000"/>
+            </a:avLst>
+          </a:prstGeom>
+          <a:solidFill>
+            <a:srgbClr val="E8F7EE"/>
+          </a:solidFill>
+          <a:ln w="19050">
+            <a:solidFill>
+              <a:srgbClr val="15803D"/>
+            </a:solidFill>
+          </a:ln>
+          <a:effectLst/>
+        </p:spPr>
+        <p:style>
+          <a:lnRef idx="1">
+            <a:schemeClr val="accent1"/>
+          </a:lnRef>
+          <a:fillRef idx="3">
+            <a:schemeClr val="accent1"/>
+          </a:fillRef>
+          <a:effectRef idx="2">
+            <a:schemeClr val="accent1"/>
+          </a:effectRef>
+          <a:fontRef idx="minor">
+            <a:schemeClr val="lt1"/>
+          </a:fontRef>
+        </p:style>
+        <p:txBody>
+          <a:bodyPr rtlCol="0" anchor="ctr" wrap="square"/>
+          <a:lstStyle/>
+          <a:p>
+            <a:pPr algn="ctr"/>
+            <a:r>
+              <a:rPr sz="1500" b="1">
+                <a:solidFill>
+                  <a:srgbClr val="15803D"/>
+                </a:solidFill>
+                <a:latin typeface="Calibri"/>
+              </a:rPr>
+              <a:t>Model serving</a:t>
+            </a:r>
+          </a:p>
+          <a:p>
+            <a:pPr algn="ctr"/>
+            <a:r>
+              <a:rPr sz="1000" b="0">
+                <a:solidFill>
+                  <a:srgbClr val="1F2937"/>
+                </a:solidFill>
+                <a:latin typeface="Calibri"/>
+              </a:rPr>
+              <a:t>Ollama  ·  HF Inference Providers</a:t>
+            </a:r>
+          </a:p>
+        </p:txBody>
+      </p:sp>
+      <p:sp>
+        <p:nvSpPr>
+          <p:cNvPr id="12" name="Rounded Rectangle 11"/>
+          <p:cNvSpPr/>
+          <p:nvPr/>
+        </p:nvSpPr>
+        <p:spPr>
+          <a:xfrm>
+            <a:off x="3703320" y="4434840"/>
+            <a:ext cx="7909560" cy="777240"/>
+          </a:xfrm>
+          <a:prstGeom prst="roundRect">
+            <a:avLst>
+              <a:gd name="adj" fmla="val 12000"/>
+            </a:avLst>
+          </a:prstGeom>
+          <a:solidFill>
+            <a:srgbClr val="FFFFFF"/>
+          </a:solidFill>
+          <a:ln w="19050">
+            <a:solidFill>
+              <a:srgbClr val="E5E7EB"/>
+            </a:solidFill>
+          </a:ln>
+          <a:effectLst/>
+        </p:spPr>
+        <p:style>
+          <a:lnRef idx="1">
+            <a:schemeClr val="accent1"/>
+          </a:lnRef>
+          <a:fillRef idx="3">
+            <a:schemeClr val="accent1"/>
+          </a:fillRef>
+          <a:effectRef idx="2">
+            <a:schemeClr val="accent1"/>
+          </a:effectRef>
+          <a:fontRef idx="minor">
+            <a:schemeClr val="lt1"/>
+          </a:fontRef>
+        </p:style>
+        <p:txBody>
+          <a:bodyPr rtlCol="0" anchor="ctr" wrap="square"/>
+          <a:lstStyle/>
+          <a:p>
+            <a:pPr algn="l"/>
+            <a:r>
+              <a:rPr sz="1300" b="0">
+                <a:solidFill>
+                  <a:srgbClr val="1F2937"/>
+                </a:solidFill>
+                <a:latin typeface="Calibri"/>
+              </a:rPr>
+              <a:t>Local: Ollama on localhost:11434.  Hosted: the router picks a provider that runs the model</a:t>
+            </a:r>
+          </a:p>
+        </p:txBody>
+      </p:sp>
+      <p:sp>
+        <p:nvSpPr>
+          <p:cNvPr id="13" name="Rounded Rectangle 12"/>
+          <p:cNvSpPr/>
+          <p:nvPr/>
+        </p:nvSpPr>
+        <p:spPr>
+          <a:xfrm>
+            <a:off x="548640" y="5349240"/>
+            <a:ext cx="3017520" cy="777240"/>
+          </a:xfrm>
+          <a:prstGeom prst="roundRect">
+            <a:avLst>
+              <a:gd name="adj" fmla="val 12000"/>
+            </a:avLst>
+          </a:prstGeom>
+          <a:solidFill>
+            <a:srgbClr val="FEF3E2"/>
+          </a:solidFill>
+          <a:ln w="19050">
+            <a:solidFill>
+              <a:srgbClr val="B45309"/>
+            </a:solidFill>
+          </a:ln>
+          <a:effectLst/>
+        </p:spPr>
+        <p:style>
+          <a:lnRef idx="1">
+            <a:schemeClr val="accent1"/>
+          </a:lnRef>
+          <a:fillRef idx="3">
+            <a:schemeClr val="accent1"/>
+          </a:fillRef>
+          <a:effectRef idx="2">
+            <a:schemeClr val="accent1"/>
+          </a:effectRef>
+          <a:fontRef idx="minor">
+            <a:schemeClr val="lt1"/>
+          </a:fontRef>
+        </p:style>
+        <p:txBody>
+          <a:bodyPr rtlCol="0" anchor="ctr" wrap="square"/>
+          <a:lstStyle/>
+          <a:p>
+            <a:pPr algn="ctr"/>
+            <a:r>
+              <a:rPr sz="1500" b="1">
+                <a:solidFill>
+                  <a:srgbClr val="B45309"/>
+                </a:solidFill>
+                <a:latin typeface="Calibri"/>
+              </a:rPr>
+              <a:t>Configuration</a:t>
+            </a:r>
+          </a:p>
+          <a:p>
+            <a:pPr algn="ctr"/>
+            <a:r>
+              <a:rPr sz="1000" b="0">
+                <a:solidFill>
+                  <a:srgbClr val="1F2937"/>
+                </a:solidFill>
+                <a:latin typeface="Calibri"/>
+              </a:rPr>
+              <a:t>token · Ollama URL</a:t>
+            </a:r>
+          </a:p>
+        </p:txBody>
+      </p:sp>
+      <p:sp>
+        <p:nvSpPr>
+          <p:cNvPr id="14" name="Rounded Rectangle 13"/>
+          <p:cNvSpPr/>
+          <p:nvPr/>
+        </p:nvSpPr>
+        <p:spPr>
+          <a:xfrm>
+            <a:off x="3703320" y="5349240"/>
+            <a:ext cx="7909560" cy="777240"/>
+          </a:xfrm>
+          <a:prstGeom prst="roundRect">
+            <a:avLst>
+              <a:gd name="adj" fmla="val 12000"/>
+            </a:avLst>
+          </a:prstGeom>
+          <a:solidFill>
+            <a:srgbClr val="FFFFFF"/>
+          </a:solidFill>
+          <a:ln w="19050">
+            <a:solidFill>
+              <a:srgbClr val="E5E7EB"/>
+            </a:solidFill>
+          </a:ln>
+          <a:effectLst/>
+        </p:spPr>
+        <p:style>
+          <a:lnRef idx="1">
+            <a:schemeClr val="accent1"/>
+          </a:lnRef>
+          <a:fillRef idx="3">
+            <a:schemeClr val="accent1"/>
+          </a:fillRef>
+          <a:effectRef idx="2">
+            <a:schemeClr val="accent1"/>
+          </a:effectRef>
+          <a:fontRef idx="minor">
+            <a:schemeClr val="lt1"/>
+          </a:fontRef>
+        </p:style>
+        <p:txBody>
+          <a:bodyPr rtlCol="0" anchor="ctr" wrap="square"/>
+          <a:lstStyle/>
+          <a:p>
+            <a:pPr algn="l"/>
+            <a:r>
+              <a:rPr sz="1300" b="0">
+                <a:solidFill>
+                  <a:srgbClr val="1F2937"/>
+                </a:solidFill>
+                <a:latin typeface="Calibri"/>
+              </a:rPr>
+              <a:t>Hosted: token from sidebar, secrets.toml or HF_TOKEN (never printed). Local: no token</a:t>
+            </a:r>
+          </a:p>
+        </p:txBody>
+      </p:sp>
+      <p:sp>
+        <p:nvSpPr>
+          <p:cNvPr id="15" name="TextBox 14"/>
+          <p:cNvSpPr txBox="1"/>
+          <p:nvPr/>
+        </p:nvSpPr>
+        <p:spPr>
+          <a:xfrm>
+            <a:off x="548640" y="6446520"/>
+            <a:ext cx="8229600" cy="274320"/>
+          </a:xfrm>
+          <a:prstGeom prst="rect">
+            <a:avLst/>
+          </a:prstGeom>
+          <a:noFill/>
+        </p:spPr>
+        <p:txBody>
+          <a:bodyPr wrap="square" lIns="36576" rIns="36576" anchor="t">
+            <a:spAutoFit/>
+          </a:bodyPr>
+          <a:lstStyle/>
+          <a:p>
+            <a:pPr algn="l"/>
+            <a:r>
+              <a:rPr sz="1000" b="0">
+                <a:solidFill>
+                  <a:srgbClr val="8A94A3"/>
+                </a:solidFill>
+                <a:latin typeface="Calibri"/>
+              </a:rPr>
+              <a:t>Text Generation Playground  ·  09-ai-competencies/inference-model-apis/text-generation-app</a:t>
+            </a:r>
+          </a:p>
+        </p:txBody>
+      </p:sp>
+      <p:sp>
+        <p:nvSpPr>
+          <p:cNvPr id="16" name="TextBox 15"/>
+          <p:cNvSpPr txBox="1"/>
+          <p:nvPr/>
+        </p:nvSpPr>
+        <p:spPr>
+          <a:xfrm>
+            <a:off x="10881360" y="6446520"/>
+            <a:ext cx="822960" cy="274320"/>
+          </a:xfrm>
+          <a:prstGeom prst="rect">
+            <a:avLst/>
+          </a:prstGeom>
+          <a:noFill/>
+        </p:spPr>
+        <p:txBody>
+          <a:bodyPr wrap="square" lIns="36576" rIns="36576" anchor="t">
+            <a:spAutoFit/>
+          </a:bodyPr>
+          <a:lstStyle/>
+          <a:p>
+            <a:pPr algn="r"/>
+            <a:r>
+              <a:rPr sz="1000" b="0">
+                <a:solidFill>
+                  <a:srgbClr val="8A94A3"/>
+                </a:solidFill>
+                <a:latin typeface="Calibri"/>
+              </a:rPr>
+              <a:t>5 / 6</a:t>
+            </a:r>
+          </a:p>
+        </p:txBody>
+      </p:sp>
+    </p:spTree>
+  </p:cSld>
+  <p:clrMapOvr>
+    <a:masterClrMapping/>
+  </p:clrMapOvr>
+</p:sld>
+</file>
+
+<file path=ppt/slides/slide6.xml><?xml version="1.0" encoding="utf-8"?>
+<p:sld xmlns:a="http://schemas.openxmlformats.org/drawingml/2006/main" xmlns:p="http://schemas.openxmlformats.org/presentationml/2006/main" xmlns:r="http://schemas.openxmlformats.org/officeDocument/2006/relationships">
+  <p:cSld>
+    <p:spTree>
+      <p:nvGrpSpPr>
+        <p:cNvPr id="1" name=""/>
+        <p:cNvGrpSpPr/>
+        <p:nvPr/>
+      </p:nvGrpSpPr>
+      <p:grpSpPr/>
+      <p:sp>
+        <p:nvSpPr>
+          <p:cNvPr id="2" name="TextBox 1"/>
+          <p:cNvSpPr txBox="1"/>
+          <p:nvPr/>
+        </p:nvSpPr>
+        <p:spPr>
+          <a:xfrm>
+            <a:off x="548640" y="320040"/>
+            <a:ext cx="11064240" cy="640080"/>
+          </a:xfrm>
+          <a:prstGeom prst="rect">
+            <a:avLst/>
+          </a:prstGeom>
+          <a:noFill/>
+        </p:spPr>
+        <p:txBody>
+          <a:bodyPr wrap="square" lIns="36576" rIns="36576" anchor="t">
+            <a:spAutoFit/>
+          </a:bodyPr>
+          <a:lstStyle/>
+          <a:p>
+            <a:pPr algn="l"/>
+            <a:r>
+              <a:rPr sz="3000" b="1">
+                <a:solidFill>
+                  <a:srgbClr val="1F2937"/>
+                </a:solidFill>
+                <a:latin typeface="Calibri"/>
+              </a:rPr>
+              <a:t>Configuration and error handling</a:t>
+            </a:r>
+          </a:p>
+        </p:txBody>
+      </p:sp>
+      <p:sp>
+        <p:nvSpPr>
+          <p:cNvPr id="3" name="TextBox 2"/>
+          <p:cNvSpPr txBox="1"/>
+          <p:nvPr/>
+        </p:nvSpPr>
+        <p:spPr>
+          <a:xfrm>
+            <a:off x="548640" y="914400"/>
+            <a:ext cx="11064240" cy="411480"/>
+          </a:xfrm>
+          <a:prstGeom prst="rect">
+            <a:avLst/>
+          </a:prstGeom>
+          <a:noFill/>
+        </p:spPr>
+        <p:txBody>
+          <a:bodyPr wrap="square" lIns="36576" rIns="36576" anchor="t">
+            <a:spAutoFit/>
+          </a:bodyPr>
+          <a:lstStyle/>
+          <a:p>
+            <a:pPr algn="l"/>
+            <a:r>
+              <a:rPr sz="1500" b="0">
+                <a:solidFill>
+                  <a:srgbClr val="5B6778"/>
+                </a:solidFill>
+                <a:latin typeface="Calibri"/>
+              </a:rPr>
+              <a:t>What each mode needs, and what each failure means</a:t>
             </a:r>
           </a:p>
         </p:txBody>
@@ -8479,7 +10772,7 @@
                 </a:solidFill>
                 <a:latin typeface="Calibri"/>
               </a:rPr>
-              <a:t>TOKEN RESOLUTION</a:t>
+              <a:t>WHAT EACH MODE NEEDS</a:t>
             </a:r>
           </a:p>
         </p:txBody>
@@ -8492,8 +10785,124 @@
         </p:nvSpPr>
         <p:spPr>
           <a:xfrm>
-            <a:off x="822960" y="2148840"/>
-            <a:ext cx="4480560" cy="822960"/>
+            <a:off x="822960" y="2103120"/>
+            <a:ext cx="4480560" cy="914400"/>
+          </a:xfrm>
+          <a:prstGeom prst="roundRect">
+            <a:avLst>
+              <a:gd name="adj" fmla="val 12000"/>
+            </a:avLst>
+          </a:prstGeom>
+          <a:solidFill>
+            <a:srgbClr val="E8F7EE"/>
+          </a:solidFill>
+          <a:ln w="19050">
+            <a:solidFill>
+              <a:srgbClr val="15803D"/>
+            </a:solidFill>
+          </a:ln>
+          <a:effectLst/>
+        </p:spPr>
+        <p:style>
+          <a:lnRef idx="1">
+            <a:schemeClr val="accent1"/>
+          </a:lnRef>
+          <a:fillRef idx="3">
+            <a:schemeClr val="accent1"/>
+          </a:fillRef>
+          <a:effectRef idx="2">
+            <a:schemeClr val="accent1"/>
+          </a:effectRef>
+          <a:fontRef idx="minor">
+            <a:schemeClr val="lt1"/>
+          </a:fontRef>
+        </p:style>
+        <p:txBody>
+          <a:bodyPr rtlCol="0" anchor="ctr" wrap="square"/>
+          <a:lstStyle/>
+          <a:p>
+            <a:pPr algn="ctr"/>
+            <a:r>
+              <a:rPr sz="1300" b="1">
+                <a:solidFill>
+                  <a:srgbClr val="15803D"/>
+                </a:solidFill>
+                <a:latin typeface="Calibri"/>
+              </a:rPr>
+              <a:t>Local (Ollama)</a:t>
+            </a:r>
+          </a:p>
+          <a:p>
+            <a:pPr algn="ctr"/>
+            <a:r>
+              <a:rPr sz="1100" b="0">
+                <a:solidFill>
+                  <a:srgbClr val="1F2937"/>
+                </a:solidFill>
+                <a:latin typeface="Calibri"/>
+              </a:rPr>
+              <a:t>Ollama running at localhost:11434</a:t>
+            </a:r>
+          </a:p>
+          <a:p>
+            <a:pPr algn="ctr"/>
+            <a:r>
+              <a:rPr sz="1100" b="0">
+                <a:solidFill>
+                  <a:srgbClr val="1F2937"/>
+                </a:solidFill>
+                <a:latin typeface="Calibri"/>
+              </a:rPr>
+              <a:t>a downloaded model · no token</a:t>
+            </a:r>
+          </a:p>
+        </p:txBody>
+      </p:sp>
+      <p:sp>
+        <p:nvSpPr>
+          <p:cNvPr id="8" name="TextBox 7"/>
+          <p:cNvSpPr txBox="1"/>
+          <p:nvPr/>
+        </p:nvSpPr>
+        <p:spPr>
+          <a:xfrm>
+            <a:off x="822960" y="3154680"/>
+            <a:ext cx="4480560" cy="274320"/>
+          </a:xfrm>
+          <a:prstGeom prst="rect">
+            <a:avLst/>
+          </a:prstGeom>
+          <a:noFill/>
+        </p:spPr>
+        <p:txBody>
+          <a:bodyPr wrap="square" lIns="36576" rIns="36576" anchor="t">
+            <a:spAutoFit/>
+          </a:bodyPr>
+          <a:lstStyle/>
+          <a:p>
+            <a:pPr algn="l"/>
+            <a:r>
+              <a:rPr sz="1100" b="1">
+                <a:solidFill>
+                  <a:srgbClr val="B45309"/>
+                </a:solidFill>
+                <a:latin typeface="Calibri"/>
+              </a:rPr>
+              <a:t>Hosted (Hugging Face): token, first one found wins</a:t>
+            </a:r>
+          </a:p>
+        </p:txBody>
+      </p:sp>
+      <p:sp>
+        <p:nvSpPr>
+          <p:cNvPr id="9" name="Rounded Rectangle 8"/>
+          <p:cNvSpPr/>
+          <p:nvPr/>
+        </p:nvSpPr>
+        <p:spPr>
+          <a:xfrm>
+            <a:off x="822960" y="3474720"/>
+            <a:ext cx="4480560" cy="603504"/>
           </a:xfrm>
           <a:prstGeom prst="roundRect">
             <a:avLst>
@@ -8530,7 +10939,7 @@
           <a:p>
             <a:pPr algn="ctr"/>
             <a:r>
-              <a:rPr sz="1300" b="1">
+              <a:rPr sz="1200" b="1">
                 <a:solidFill>
                   <a:srgbClr val="B45309"/>
                 </a:solidFill>
@@ -8542,84 +10951,13 @@
           <a:p>
             <a:pPr algn="ctr"/>
             <a:r>
-              <a:rPr sz="1100" b="0">
+              <a:rPr sz="1000" b="0">
                 <a:solidFill>
                   <a:srgbClr val="1F2937"/>
                 </a:solidFill>
                 <a:latin typeface="Calibri"/>
               </a:rPr>
-              <a:t>typed in the browser; never printed</a:t>
-            </a:r>
-          </a:p>
-        </p:txBody>
-      </p:sp>
-      <p:cxnSp>
-        <p:nvCxnSpPr>
-          <p:cNvPr id="8" name="Connector 7"/>
-          <p:cNvCxnSpPr/>
-          <p:nvPr/>
-        </p:nvCxnSpPr>
-        <p:spPr>
-          <a:xfrm>
-            <a:off x="3063240" y="2971800"/>
-            <a:ext cx="0" cy="228600"/>
-          </a:xfrm>
-          <a:prstGeom prst="line">
-            <a:avLst/>
-          </a:prstGeom>
-          <a:ln w="19050">
-            <a:solidFill>
-              <a:srgbClr val="B45309"/>
-            </a:solidFill>
-            <a:tailEnd type="triangle" w="med" len="med"/>
-          </a:ln>
-        </p:spPr>
-        <p:style>
-          <a:lnRef idx="2">
-            <a:schemeClr val="accent1"/>
-          </a:lnRef>
-          <a:fillRef idx="0">
-            <a:schemeClr val="accent1"/>
-          </a:fillRef>
-          <a:effectRef idx="1">
-            <a:schemeClr val="accent1"/>
-          </a:effectRef>
-          <a:fontRef idx="minor">
-            <a:schemeClr val="tx1"/>
-          </a:fontRef>
-        </p:style>
-      </p:cxnSp>
-      <p:sp>
-        <p:nvSpPr>
-          <p:cNvPr id="9" name="TextBox 8"/>
-          <p:cNvSpPr txBox="1"/>
-          <p:nvPr/>
-        </p:nvSpPr>
-        <p:spPr>
-          <a:xfrm>
-            <a:off x="3200400" y="2944368"/>
-            <a:ext cx="1645920" cy="274320"/>
-          </a:xfrm>
-          <a:prstGeom prst="rect">
-            <a:avLst/>
-          </a:prstGeom>
-          <a:noFill/>
-        </p:spPr>
-        <p:txBody>
-          <a:bodyPr wrap="square" lIns="36576" rIns="36576" anchor="t">
-            <a:spAutoFit/>
-          </a:bodyPr>
-          <a:lstStyle/>
-          <a:p>
-            <a:pPr algn="l"/>
-            <a:r>
-              <a:rPr sz="1000" b="0">
-                <a:solidFill>
-                  <a:srgbClr val="5B6778"/>
-                </a:solidFill>
-                <a:latin typeface="Calibri"/>
-              </a:rPr>
-              <a:t>if empty</a:t>
+              <a:t>never printed</a:t>
             </a:r>
           </a:p>
         </p:txBody>
@@ -8632,8 +10970,8 @@
         </p:nvSpPr>
         <p:spPr>
           <a:xfrm>
-            <a:off x="822960" y="3200400"/>
-            <a:ext cx="4480560" cy="822960"/>
+            <a:off x="822960" y="4187952"/>
+            <a:ext cx="4480560" cy="603504"/>
           </a:xfrm>
           <a:prstGeom prst="roundRect">
             <a:avLst>
@@ -8670,7 +11008,7 @@
           <a:p>
             <a:pPr algn="ctr"/>
             <a:r>
-              <a:rPr sz="1300" b="1">
+              <a:rPr sz="1200" b="1">
                 <a:solidFill>
                   <a:srgbClr val="B45309"/>
                 </a:solidFill>
@@ -8682,98 +11020,27 @@
           <a:p>
             <a:pPr algn="ctr"/>
             <a:r>
-              <a:rPr sz="1100" b="0">
+              <a:rPr sz="1000" b="0">
                 <a:solidFill>
                   <a:srgbClr val="1F2937"/>
                 </a:solidFill>
                 <a:latin typeface="Calibri"/>
               </a:rPr>
-              <a:t>HF_TOKEN = "hf_…"  (git-ignored)</a:t>
-            </a:r>
-          </a:p>
-        </p:txBody>
-      </p:sp>
-      <p:cxnSp>
-        <p:nvCxnSpPr>
-          <p:cNvPr id="11" name="Connector 10"/>
-          <p:cNvCxnSpPr/>
-          <p:nvPr/>
-        </p:nvCxnSpPr>
-        <p:spPr>
-          <a:xfrm>
-            <a:off x="3063240" y="4023360"/>
-            <a:ext cx="0" cy="228600"/>
-          </a:xfrm>
-          <a:prstGeom prst="line">
-            <a:avLst/>
-          </a:prstGeom>
-          <a:ln w="19050">
-            <a:solidFill>
-              <a:srgbClr val="B45309"/>
-            </a:solidFill>
-            <a:tailEnd type="triangle" w="med" len="med"/>
-          </a:ln>
-        </p:spPr>
-        <p:style>
-          <a:lnRef idx="2">
-            <a:schemeClr val="accent1"/>
-          </a:lnRef>
-          <a:fillRef idx="0">
-            <a:schemeClr val="accent1"/>
-          </a:fillRef>
-          <a:effectRef idx="1">
-            <a:schemeClr val="accent1"/>
-          </a:effectRef>
-          <a:fontRef idx="minor">
-            <a:schemeClr val="tx1"/>
-          </a:fontRef>
-        </p:style>
-      </p:cxnSp>
-      <p:sp>
-        <p:nvSpPr>
-          <p:cNvPr id="12" name="TextBox 11"/>
-          <p:cNvSpPr txBox="1"/>
-          <p:nvPr/>
-        </p:nvSpPr>
-        <p:spPr>
-          <a:xfrm>
-            <a:off x="3200400" y="3995928"/>
-            <a:ext cx="1645920" cy="274320"/>
-          </a:xfrm>
-          <a:prstGeom prst="rect">
-            <a:avLst/>
-          </a:prstGeom>
-          <a:noFill/>
-        </p:spPr>
-        <p:txBody>
-          <a:bodyPr wrap="square" lIns="36576" rIns="36576" anchor="t">
-            <a:spAutoFit/>
-          </a:bodyPr>
-          <a:lstStyle/>
-          <a:p>
-            <a:pPr algn="l"/>
-            <a:r>
-              <a:rPr sz="1000" b="0">
-                <a:solidFill>
-                  <a:srgbClr val="5B6778"/>
-                </a:solidFill>
-                <a:latin typeface="Calibri"/>
-              </a:rPr>
-              <a:t>if empty</a:t>
-            </a:r>
-          </a:p>
-        </p:txBody>
-      </p:sp>
-      <p:sp>
-        <p:nvSpPr>
-          <p:cNvPr id="13" name="Rounded Rectangle 12"/>
+              <a:t>HF_TOKEN = "hf_…" (git-ignored)</a:t>
+            </a:r>
+          </a:p>
+        </p:txBody>
+      </p:sp>
+      <p:sp>
+        <p:nvSpPr>
+          <p:cNvPr id="11" name="Rounded Rectangle 10"/>
           <p:cNvSpPr/>
           <p:nvPr/>
         </p:nvSpPr>
         <p:spPr>
           <a:xfrm>
-            <a:off x="822960" y="4251960"/>
-            <a:ext cx="4480560" cy="822960"/>
+            <a:off x="822960" y="4901183"/>
+            <a:ext cx="4480560" cy="603504"/>
           </a:xfrm>
           <a:prstGeom prst="roundRect">
             <a:avLst>
@@ -8810,7 +11077,7 @@
           <a:p>
             <a:pPr algn="ctr"/>
             <a:r>
-              <a:rPr sz="1300" b="1">
+              <a:rPr sz="1200" b="1">
                 <a:solidFill>
                   <a:srgbClr val="B45309"/>
                 </a:solidFill>
@@ -8822,77 +11089,20 @@
           <a:p>
             <a:pPr algn="ctr"/>
             <a:r>
-              <a:rPr sz="1100" b="0">
+              <a:rPr sz="1000" b="0">
                 <a:solidFill>
                   <a:srgbClr val="1F2937"/>
                 </a:solidFill>
                 <a:latin typeface="Calibri"/>
               </a:rPr>
-              <a:t>for servers and deployment</a:t>
-            </a:r>
-          </a:p>
-        </p:txBody>
-      </p:sp>
-      <p:sp>
-        <p:nvSpPr>
-          <p:cNvPr id="14" name="Rounded Rectangle 13"/>
-          <p:cNvSpPr/>
-          <p:nvPr/>
-        </p:nvSpPr>
-        <p:spPr>
-          <a:xfrm>
-            <a:off x="822960" y="5349240"/>
-            <a:ext cx="4480560" cy="640080"/>
-          </a:xfrm>
-          <a:prstGeom prst="roundRect">
-            <a:avLst>
-              <a:gd name="adj" fmla="val 12000"/>
-            </a:avLst>
-          </a:prstGeom>
-          <a:solidFill>
-            <a:srgbClr val="FFFFFF"/>
-          </a:solidFill>
-          <a:ln w="19050">
-            <a:solidFill>
-              <a:srgbClr val="B91C1C"/>
-            </a:solidFill>
-          </a:ln>
-          <a:effectLst/>
-        </p:spPr>
-        <p:style>
-          <a:lnRef idx="1">
-            <a:schemeClr val="accent1"/>
-          </a:lnRef>
-          <a:fillRef idx="3">
-            <a:schemeClr val="accent1"/>
-          </a:fillRef>
-          <a:effectRef idx="2">
-            <a:schemeClr val="accent1"/>
-          </a:effectRef>
-          <a:fontRef idx="minor">
-            <a:schemeClr val="lt1"/>
-          </a:fontRef>
-        </p:style>
-        <p:txBody>
-          <a:bodyPr rtlCol="0" anchor="ctr" wrap="square"/>
-          <a:lstStyle/>
-          <a:p>
-            <a:pPr algn="ctr"/>
-            <a:r>
-              <a:rPr sz="1200" b="1">
-                <a:solidFill>
-                  <a:srgbClr val="B91C1C"/>
-                </a:solidFill>
-                <a:latin typeface="Calibri"/>
-              </a:rPr>
-              <a:t>No token → “Please enter your token”</a:t>
-            </a:r>
-          </a:p>
-        </p:txBody>
-      </p:sp>
-      <p:sp>
-        <p:nvSpPr>
-          <p:cNvPr id="15" name="Rounded Rectangle 14"/>
+              <a:t>servers and deployment</a:t>
+            </a:r>
+          </a:p>
+        </p:txBody>
+      </p:sp>
+      <p:sp>
+        <p:nvSpPr>
+          <p:cNvPr id="12" name="Rounded Rectangle 11"/>
           <p:cNvSpPr/>
           <p:nvPr/>
         </p:nvSpPr>
@@ -8941,7 +11151,7 @@
       </p:sp>
       <p:sp>
         <p:nvSpPr>
-          <p:cNvPr id="16" name="TextBox 15"/>
+          <p:cNvPr id="13" name="TextBox 12"/>
           <p:cNvSpPr txBox="1"/>
           <p:nvPr/>
         </p:nvSpPr>
@@ -8969,7 +11179,178 @@
                 </a:solidFill>
                 <a:latin typeface="Calibri"/>
               </a:rPr>
-              <a:t>ERRORS FROM HUGGING FACE  →  WHAT THE APP TELLS YOU</a:t>
+              <a:t>ERRORS  →  WHAT THE APP TELLS YOU</a:t>
+            </a:r>
+          </a:p>
+        </p:txBody>
+      </p:sp>
+      <p:sp>
+        <p:nvSpPr>
+          <p:cNvPr id="14" name="Rounded Rectangle 13"/>
+          <p:cNvSpPr/>
+          <p:nvPr/>
+        </p:nvSpPr>
+        <p:spPr>
+          <a:xfrm>
+            <a:off x="6217920" y="2103120"/>
+            <a:ext cx="914400" cy="484632"/>
+          </a:xfrm>
+          <a:prstGeom prst="roundRect">
+            <a:avLst>
+              <a:gd name="adj" fmla="val 12000"/>
+            </a:avLst>
+          </a:prstGeom>
+          <a:solidFill>
+            <a:srgbClr val="15803D"/>
+          </a:solidFill>
+          <a:ln w="19050">
+            <a:solidFill>
+              <a:srgbClr val="FFFFFF"/>
+            </a:solidFill>
+          </a:ln>
+          <a:effectLst/>
+        </p:spPr>
+        <p:style>
+          <a:lnRef idx="1">
+            <a:schemeClr val="accent1"/>
+          </a:lnRef>
+          <a:fillRef idx="3">
+            <a:schemeClr val="accent1"/>
+          </a:fillRef>
+          <a:effectRef idx="2">
+            <a:schemeClr val="accent1"/>
+          </a:effectRef>
+          <a:fontRef idx="minor">
+            <a:schemeClr val="lt1"/>
+          </a:fontRef>
+        </p:style>
+        <p:txBody>
+          <a:bodyPr rtlCol="0" anchor="ctr" wrap="square"/>
+          <a:lstStyle/>
+          <a:p>
+            <a:pPr algn="ctr"/>
+            <a:r>
+              <a:rPr sz="1200" b="1">
+                <a:solidFill>
+                  <a:srgbClr val="FFFFFF"/>
+                </a:solidFill>
+                <a:latin typeface="Calibri"/>
+              </a:rPr>
+              <a:t>Local</a:t>
+            </a:r>
+          </a:p>
+        </p:txBody>
+      </p:sp>
+      <p:sp>
+        <p:nvSpPr>
+          <p:cNvPr id="15" name="Rounded Rectangle 14"/>
+          <p:cNvSpPr/>
+          <p:nvPr/>
+        </p:nvSpPr>
+        <p:spPr>
+          <a:xfrm>
+            <a:off x="7269480" y="2103120"/>
+            <a:ext cx="4114800" cy="484632"/>
+          </a:xfrm>
+          <a:prstGeom prst="roundRect">
+            <a:avLst>
+              <a:gd name="adj" fmla="val 12000"/>
+            </a:avLst>
+          </a:prstGeom>
+          <a:solidFill>
+            <a:srgbClr val="FFFFFF"/>
+          </a:solidFill>
+          <a:ln w="19050">
+            <a:solidFill>
+              <a:srgbClr val="E5E7EB"/>
+            </a:solidFill>
+          </a:ln>
+          <a:effectLst/>
+        </p:spPr>
+        <p:style>
+          <a:lnRef idx="1">
+            <a:schemeClr val="accent1"/>
+          </a:lnRef>
+          <a:fillRef idx="3">
+            <a:schemeClr val="accent1"/>
+          </a:fillRef>
+          <a:effectRef idx="2">
+            <a:schemeClr val="accent1"/>
+          </a:effectRef>
+          <a:fontRef idx="minor">
+            <a:schemeClr val="lt1"/>
+          </a:fontRef>
+        </p:style>
+        <p:txBody>
+          <a:bodyPr rtlCol="0" anchor="ctr" wrap="square"/>
+          <a:lstStyle/>
+          <a:p>
+            <a:pPr algn="l"/>
+            <a:r>
+              <a:rPr sz="1050" b="0">
+                <a:solidFill>
+                  <a:srgbClr val="1F2937"/>
+                </a:solidFill>
+                <a:latin typeface="Calibri"/>
+              </a:rPr>
+              <a:t>Ollama not running: start the Ollama app</a:t>
+            </a:r>
+          </a:p>
+        </p:txBody>
+      </p:sp>
+      <p:sp>
+        <p:nvSpPr>
+          <p:cNvPr id="16" name="Rounded Rectangle 15"/>
+          <p:cNvSpPr/>
+          <p:nvPr/>
+        </p:nvSpPr>
+        <p:spPr>
+          <a:xfrm>
+            <a:off x="6217920" y="2679191"/>
+            <a:ext cx="914400" cy="484632"/>
+          </a:xfrm>
+          <a:prstGeom prst="roundRect">
+            <a:avLst>
+              <a:gd name="adj" fmla="val 12000"/>
+            </a:avLst>
+          </a:prstGeom>
+          <a:solidFill>
+            <a:srgbClr val="15803D"/>
+          </a:solidFill>
+          <a:ln w="19050">
+            <a:solidFill>
+              <a:srgbClr val="FFFFFF"/>
+            </a:solidFill>
+          </a:ln>
+          <a:effectLst/>
+        </p:spPr>
+        <p:style>
+          <a:lnRef idx="1">
+            <a:schemeClr val="accent1"/>
+          </a:lnRef>
+          <a:fillRef idx="3">
+            <a:schemeClr val="accent1"/>
+          </a:fillRef>
+          <a:effectRef idx="2">
+            <a:schemeClr val="accent1"/>
+          </a:effectRef>
+          <a:fontRef idx="minor">
+            <a:schemeClr val="lt1"/>
+          </a:fontRef>
+        </p:style>
+        <p:txBody>
+          <a:bodyPr rtlCol="0" anchor="ctr" wrap="square"/>
+          <a:lstStyle/>
+          <a:p>
+            <a:pPr algn="ctr"/>
+            <a:r>
+              <a:rPr sz="1200" b="1">
+                <a:solidFill>
+                  <a:srgbClr val="FFFFFF"/>
+                </a:solidFill>
+                <a:latin typeface="Calibri"/>
+              </a:rPr>
+              <a:t>Local</a:t>
             </a:r>
           </a:p>
         </p:txBody>
@@ -8982,8 +11363,65 @@
         </p:nvSpPr>
         <p:spPr>
           <a:xfrm>
-            <a:off x="6217920" y="2148840"/>
-            <a:ext cx="868680" cy="621792"/>
+            <a:off x="7269480" y="2679191"/>
+            <a:ext cx="4114800" cy="484632"/>
+          </a:xfrm>
+          <a:prstGeom prst="roundRect">
+            <a:avLst>
+              <a:gd name="adj" fmla="val 12000"/>
+            </a:avLst>
+          </a:prstGeom>
+          <a:solidFill>
+            <a:srgbClr val="FFFFFF"/>
+          </a:solidFill>
+          <a:ln w="19050">
+            <a:solidFill>
+              <a:srgbClr val="E5E7EB"/>
+            </a:solidFill>
+          </a:ln>
+          <a:effectLst/>
+        </p:spPr>
+        <p:style>
+          <a:lnRef idx="1">
+            <a:schemeClr val="accent1"/>
+          </a:lnRef>
+          <a:fillRef idx="3">
+            <a:schemeClr val="accent1"/>
+          </a:fillRef>
+          <a:effectRef idx="2">
+            <a:schemeClr val="accent1"/>
+          </a:effectRef>
+          <a:fontRef idx="minor">
+            <a:schemeClr val="lt1"/>
+          </a:fontRef>
+        </p:style>
+        <p:txBody>
+          <a:bodyPr rtlCol="0" anchor="ctr" wrap="square"/>
+          <a:lstStyle/>
+          <a:p>
+            <a:pPr algn="l"/>
+            <a:r>
+              <a:rPr sz="1050" b="0">
+                <a:solidFill>
+                  <a:srgbClr val="1F2937"/>
+                </a:solidFill>
+                <a:latin typeface="Calibri"/>
+              </a:rPr>
+              <a:t>Model not downloaded: run: ollama pull &lt;model&gt;</a:t>
+            </a:r>
+          </a:p>
+        </p:txBody>
+      </p:sp>
+      <p:sp>
+        <p:nvSpPr>
+          <p:cNvPr id="18" name="Rounded Rectangle 17"/>
+          <p:cNvSpPr/>
+          <p:nvPr/>
+        </p:nvSpPr>
+        <p:spPr>
+          <a:xfrm>
+            <a:off x="6217920" y="3255263"/>
+            <a:ext cx="914400" cy="484632"/>
           </a:xfrm>
           <a:prstGeom prst="roundRect">
             <a:avLst>
@@ -9020,7 +11458,7 @@
           <a:p>
             <a:pPr algn="ctr"/>
             <a:r>
-              <a:rPr sz="1500" b="1">
+              <a:rPr sz="1400" b="1">
                 <a:solidFill>
                   <a:srgbClr val="FFFFFF"/>
                 </a:solidFill>
@@ -9033,14 +11471,14 @@
       </p:sp>
       <p:sp>
         <p:nvSpPr>
-          <p:cNvPr id="18" name="Rounded Rectangle 17"/>
+          <p:cNvPr id="19" name="Rounded Rectangle 18"/>
           <p:cNvSpPr/>
           <p:nvPr/>
         </p:nvSpPr>
         <p:spPr>
           <a:xfrm>
-            <a:off x="7223760" y="2148840"/>
-            <a:ext cx="4160520" cy="621792"/>
+            <a:off x="7269480" y="3255263"/>
+            <a:ext cx="4114800" cy="484632"/>
           </a:xfrm>
           <a:prstGeom prst="roundRect">
             <a:avLst>
@@ -9077,39 +11515,27 @@
           <a:p>
             <a:pPr algn="l"/>
             <a:r>
-              <a:rPr sz="1200" b="1">
+              <a:rPr sz="1050" b="0">
                 <a:solidFill>
                   <a:srgbClr val="1F2937"/>
                 </a:solidFill>
                 <a:latin typeface="Calibri"/>
               </a:rPr>
-              <a:t>Token rejected</a:t>
-            </a:r>
-          </a:p>
-          <a:p>
-            <a:pPr algn="l"/>
-            <a:r>
-              <a:rPr sz="1000" b="0">
-                <a:solidFill>
-                  <a:srgbClr val="1F2937"/>
-                </a:solidFill>
-                <a:latin typeface="Calibri"/>
-              </a:rPr>
-              <a:t>copy the whole token / create a new one</a:t>
-            </a:r>
-          </a:p>
-        </p:txBody>
-      </p:sp>
-      <p:sp>
-        <p:nvSpPr>
-          <p:cNvPr id="19" name="Rounded Rectangle 18"/>
+              <a:t>Token rejected: copy the whole token / create a new one</a:t>
+            </a:r>
+          </a:p>
+        </p:txBody>
+      </p:sp>
+      <p:sp>
+        <p:nvSpPr>
+          <p:cNvPr id="20" name="Rounded Rectangle 19"/>
           <p:cNvSpPr/>
           <p:nvPr/>
         </p:nvSpPr>
         <p:spPr>
           <a:xfrm>
-            <a:off x="6217920" y="2935224"/>
-            <a:ext cx="868680" cy="621792"/>
+            <a:off x="6217920" y="3831335"/>
+            <a:ext cx="914400" cy="484632"/>
           </a:xfrm>
           <a:prstGeom prst="roundRect">
             <a:avLst>
@@ -9146,7 +11572,7 @@
           <a:p>
             <a:pPr algn="ctr"/>
             <a:r>
-              <a:rPr sz="1500" b="1">
+              <a:rPr sz="1400" b="1">
                 <a:solidFill>
                   <a:srgbClr val="FFFFFF"/>
                 </a:solidFill>
@@ -9159,14 +11585,14 @@
       </p:sp>
       <p:sp>
         <p:nvSpPr>
-          <p:cNvPr id="20" name="Rounded Rectangle 19"/>
+          <p:cNvPr id="21" name="Rounded Rectangle 20"/>
           <p:cNvSpPr/>
           <p:nvPr/>
         </p:nvSpPr>
         <p:spPr>
           <a:xfrm>
-            <a:off x="7223760" y="2935224"/>
-            <a:ext cx="4160520" cy="621792"/>
+            <a:off x="7269480" y="3831335"/>
+            <a:ext cx="4114800" cy="484632"/>
           </a:xfrm>
           <a:prstGeom prst="roundRect">
             <a:avLst>
@@ -9203,39 +11629,27 @@
           <a:p>
             <a:pPr algn="l"/>
             <a:r>
-              <a:rPr sz="1200" b="1">
+              <a:rPr sz="1050" b="0">
                 <a:solidFill>
                   <a:srgbClr val="1F2937"/>
                 </a:solidFill>
                 <a:latin typeface="Calibri"/>
               </a:rPr>
-              <a:t>Out of credits</a:t>
-            </a:r>
-          </a:p>
-          <a:p>
-            <a:pPr algn="l"/>
-            <a:r>
-              <a:rPr sz="1000" b="0">
-                <a:solidFill>
-                  <a:srgbClr val="1F2937"/>
-                </a:solidFill>
-                <a:latin typeface="Calibri"/>
-              </a:rPr>
-              <a:t>monthly reset, add credits, or run locally</a:t>
-            </a:r>
-          </a:p>
-        </p:txBody>
-      </p:sp>
-      <p:sp>
-        <p:nvSpPr>
-          <p:cNvPr id="21" name="Rounded Rectangle 20"/>
+              <a:t>Out of credits: monthly reset, add credits, or use local mode</a:t>
+            </a:r>
+          </a:p>
+        </p:txBody>
+      </p:sp>
+      <p:sp>
+        <p:nvSpPr>
+          <p:cNvPr id="22" name="Rounded Rectangle 21"/>
           <p:cNvSpPr/>
           <p:nvPr/>
         </p:nvSpPr>
         <p:spPr>
           <a:xfrm>
-            <a:off x="6217920" y="3721608"/>
-            <a:ext cx="868680" cy="621792"/>
+            <a:off x="6217920" y="4407408"/>
+            <a:ext cx="914400" cy="484632"/>
           </a:xfrm>
           <a:prstGeom prst="roundRect">
             <a:avLst>
@@ -9272,7 +11686,7 @@
           <a:p>
             <a:pPr algn="ctr"/>
             <a:r>
-              <a:rPr sz="1500" b="1">
+              <a:rPr sz="1400" b="1">
                 <a:solidFill>
                   <a:srgbClr val="FFFFFF"/>
                 </a:solidFill>
@@ -9285,14 +11699,14 @@
       </p:sp>
       <p:sp>
         <p:nvSpPr>
-          <p:cNvPr id="22" name="Rounded Rectangle 21"/>
+          <p:cNvPr id="23" name="Rounded Rectangle 22"/>
           <p:cNvSpPr/>
           <p:nvPr/>
         </p:nvSpPr>
         <p:spPr>
           <a:xfrm>
-            <a:off x="7223760" y="3721608"/>
-            <a:ext cx="4160520" cy="621792"/>
+            <a:off x="7269480" y="4407408"/>
+            <a:ext cx="4114800" cy="484632"/>
           </a:xfrm>
           <a:prstGeom prst="roundRect">
             <a:avLst>
@@ -9329,39 +11743,27 @@
           <a:p>
             <a:pPr algn="l"/>
             <a:r>
-              <a:rPr sz="1200" b="1">
+              <a:rPr sz="1050" b="0">
                 <a:solidFill>
                   <a:srgbClr val="1F2937"/>
                 </a:solidFill>
                 <a:latin typeface="Calibri"/>
               </a:rPr>
-              <a:t>Not allowed</a:t>
-            </a:r>
-          </a:p>
-          <a:p>
-            <a:pPr algn="l"/>
-            <a:r>
-              <a:rPr sz="1000" b="0">
-                <a:solidFill>
-                  <a:srgbClr val="1F2937"/>
-                </a:solidFill>
-                <a:latin typeface="Calibri"/>
-              </a:rPr>
-              <a:t>licence pending, or token lacks Inference permission</a:t>
-            </a:r>
-          </a:p>
-        </p:txBody>
-      </p:sp>
-      <p:sp>
-        <p:nvSpPr>
-          <p:cNvPr id="23" name="Rounded Rectangle 22"/>
+              <a:t>Not allowed: licence pending, or token lacks permission</a:t>
+            </a:r>
+          </a:p>
+        </p:txBody>
+      </p:sp>
+      <p:sp>
+        <p:nvSpPr>
+          <p:cNvPr id="24" name="Rounded Rectangle 23"/>
           <p:cNvSpPr/>
           <p:nvPr/>
         </p:nvSpPr>
         <p:spPr>
           <a:xfrm>
-            <a:off x="6217920" y="4507992"/>
-            <a:ext cx="868680" cy="621792"/>
+            <a:off x="6217920" y="4983479"/>
+            <a:ext cx="914400" cy="484632"/>
           </a:xfrm>
           <a:prstGeom prst="roundRect">
             <a:avLst>
@@ -9398,7 +11800,7 @@
           <a:p>
             <a:pPr algn="ctr"/>
             <a:r>
-              <a:rPr sz="1500" b="1">
+              <a:rPr sz="1400" b="1">
                 <a:solidFill>
                   <a:srgbClr val="FFFFFF"/>
                 </a:solidFill>
@@ -9411,14 +11813,14 @@
       </p:sp>
       <p:sp>
         <p:nvSpPr>
-          <p:cNvPr id="24" name="Rounded Rectangle 23"/>
+          <p:cNvPr id="25" name="Rounded Rectangle 24"/>
           <p:cNvSpPr/>
           <p:nvPr/>
         </p:nvSpPr>
         <p:spPr>
           <a:xfrm>
-            <a:off x="7223760" y="4507992"/>
-            <a:ext cx="4160520" cy="621792"/>
+            <a:off x="7269480" y="4983479"/>
+            <a:ext cx="4114800" cy="484632"/>
           </a:xfrm>
           <a:prstGeom prst="roundRect">
             <a:avLst>
@@ -9455,39 +11857,27 @@
           <a:p>
             <a:pPr algn="l"/>
             <a:r>
-              <a:rPr sz="1200" b="1">
+              <a:rPr sz="1050" b="0">
                 <a:solidFill>
                   <a:srgbClr val="1F2937"/>
                 </a:solidFill>
                 <a:latin typeface="Calibri"/>
               </a:rPr>
-              <a:t>No provider</a:t>
-            </a:r>
-          </a:p>
-          <a:p>
-            <a:pPr algn="l"/>
-            <a:r>
-              <a:rPr sz="1000" b="0">
-                <a:solidFill>
-                  <a:srgbClr val="1F2937"/>
-                </a:solidFill>
-                <a:latin typeface="Calibri"/>
-              </a:rPr>
-              <a:t>pick another model / enable providers</a:t>
-            </a:r>
-          </a:p>
-        </p:txBody>
-      </p:sp>
-      <p:sp>
-        <p:nvSpPr>
-          <p:cNvPr id="25" name="Rounded Rectangle 24"/>
+              <a:t>No provider: pick another model / enable providers</a:t>
+            </a:r>
+          </a:p>
+        </p:txBody>
+      </p:sp>
+      <p:sp>
+        <p:nvSpPr>
+          <p:cNvPr id="26" name="Rounded Rectangle 25"/>
           <p:cNvSpPr/>
           <p:nvPr/>
         </p:nvSpPr>
         <p:spPr>
           <a:xfrm>
-            <a:off x="6217920" y="5294376"/>
-            <a:ext cx="868680" cy="621792"/>
+            <a:off x="6217920" y="5559552"/>
+            <a:ext cx="914400" cy="484632"/>
           </a:xfrm>
           <a:prstGeom prst="roundRect">
             <a:avLst>
@@ -9524,7 +11914,7 @@
           <a:p>
             <a:pPr algn="ctr"/>
             <a:r>
-              <a:rPr sz="1500" b="1">
+              <a:rPr sz="1400" b="1">
                 <a:solidFill>
                   <a:srgbClr val="FFFFFF"/>
                 </a:solidFill>
@@ -9537,14 +11927,14 @@
       </p:sp>
       <p:sp>
         <p:nvSpPr>
-          <p:cNvPr id="26" name="Rounded Rectangle 25"/>
+          <p:cNvPr id="27" name="Rounded Rectangle 26"/>
           <p:cNvSpPr/>
           <p:nvPr/>
         </p:nvSpPr>
         <p:spPr>
           <a:xfrm>
-            <a:off x="7223760" y="5294376"/>
-            <a:ext cx="4160520" cy="621792"/>
+            <a:off x="7269480" y="5559552"/>
+            <a:ext cx="4114800" cy="484632"/>
           </a:xfrm>
           <a:prstGeom prst="roundRect">
             <a:avLst>
@@ -9581,32 +11971,20 @@
           <a:p>
             <a:pPr algn="l"/>
             <a:r>
-              <a:rPr sz="1200" b="1">
+              <a:rPr sz="1050" b="0">
                 <a:solidFill>
                   <a:srgbClr val="1F2937"/>
                 </a:solidFill>
                 <a:latin typeface="Calibri"/>
               </a:rPr>
-              <a:t>Rate limited</a:t>
-            </a:r>
-          </a:p>
-          <a:p>
-            <a:pPr algn="l"/>
-            <a:r>
-              <a:rPr sz="1000" b="0">
-                <a:solidFill>
-                  <a:srgbClr val="1F2937"/>
-                </a:solidFill>
-                <a:latin typeface="Calibri"/>
-              </a:rPr>
-              <a:t>wait and retry</a:t>
-            </a:r>
-          </a:p>
-        </p:txBody>
-      </p:sp>
-      <p:sp>
-        <p:nvSpPr>
-          <p:cNvPr id="27" name="TextBox 26"/>
+              <a:t>Rate limited: wait and retry</a:t>
+            </a:r>
+          </a:p>
+        </p:txBody>
+      </p:sp>
+      <p:sp>
+        <p:nvSpPr>
+          <p:cNvPr id="28" name="TextBox 27"/>
           <p:cNvSpPr txBox="1"/>
           <p:nvPr/>
         </p:nvSpPr>
@@ -9641,14 +12019,14 @@
       </p:sp>
       <p:sp>
         <p:nvSpPr>
-          <p:cNvPr id="28" name="TextBox 27"/>
+          <p:cNvPr id="29" name="TextBox 28"/>
           <p:cNvSpPr txBox="1"/>
           <p:nvPr/>
         </p:nvSpPr>
         <p:spPr>
           <a:xfrm>
-            <a:off x="10972800" y="6446520"/>
-            <a:ext cx="731520" cy="274320"/>
+            <a:off x="10881360" y="6446520"/>
+            <a:ext cx="822960" cy="274320"/>
           </a:xfrm>
           <a:prstGeom prst="rect">
             <a:avLst/>
@@ -9669,7 +12047,7 @@
                 </a:solidFill>
                 <a:latin typeface="Calibri"/>
               </a:rPr>
-              <a:t>5</a:t>
+              <a:t>6 / 6</a:t>
             </a:r>
           </a:p>
         </p:txBody>
